--- a/docs/postmeet-pitch.pptx
+++ b/docs/postmeet-pitch.pptx
@@ -16,6 +16,7 @@
     <p:sldId id="264" r:id="rId15"/>
     <p:sldId id="265" r:id="rId16"/>
     <p:sldId id="266" r:id="rId17"/>
+    <p:sldId id="267" r:id="rId18"/>
   </p:sldIdLst>
   <p:sldSz cx="12191695" cy="6858000" type="screen4x3"/>
   <p:notesSz cx="6858000" cy="9144000"/>
@@ -3401,7 +3402,7 @@
                 </a:solidFill>
                 <a:latin typeface="Calibri"/>
               </a:rPr>
-              <a:t>   ·   aspiring AI Product Manager</a:t>
+              <a:t>   ·   AI Product Manager</a:t>
             </a:r>
           </a:p>
         </p:txBody>
@@ -3597,7 +3598,7 @@
                 </a:solidFill>
                 <a:latin typeface="Consolas"/>
               </a:rPr>
-              <a:t>09 · ROADMAP &amp; MOAT</a:t>
+              <a:t>08 · PRIORITIZATION</a:t>
             </a:r>
           </a:p>
         </p:txBody>
@@ -3642,321 +3643,66 @@
                 </a:solidFill>
                 <a:latin typeface="Calibri"/>
               </a:rPr>
-              <a:t>From a one-click helper to the system of record for follow-through.</a:t>
-            </a:r>
-          </a:p>
-        </p:txBody>
-      </p:sp>
-      <p:sp>
-        <p:nvSpPr>
-          <p:cNvPr id="6" name="Rounded Rectangle 5"/>
+              <a:t>What I deliberately left out — and why that's the point.</a:t>
+            </a:r>
+          </a:p>
+        </p:txBody>
+      </p:sp>
+      <p:sp>
+        <p:nvSpPr>
+          <p:cNvPr id="6" name="TextBox 5"/>
+          <p:cNvSpPr txBox="1"/>
+          <p:nvPr/>
+        </p:nvSpPr>
+        <p:spPr>
+          <a:xfrm>
+            <a:off x="822960" y="2011680"/>
+            <a:ext cx="10424160" cy="640080"/>
+          </a:xfrm>
+          <a:prstGeom prst="rect">
+            <a:avLst/>
+          </a:prstGeom>
+          <a:noFill/>
+        </p:spPr>
+        <p:txBody>
+          <a:bodyPr wrap="square" anchor="t">
+            <a:spAutoFit/>
+          </a:bodyPr>
+          <a:lstStyle/>
+          <a:p>
+            <a:pPr algn="l">
+              <a:lnSpc>
+                <a:spcPct val="114000"/>
+              </a:lnSpc>
+              <a:spcBef>
+                <a:spcPts val="0"/>
+              </a:spcBef>
+              <a:spcAft>
+                <a:spcPts val="0"/>
+              </a:spcAft>
+            </a:pPr>
+            <a:r>
+              <a:rPr sz="1550" b="0">
+                <a:solidFill>
+                  <a:srgbClr val="5A616E"/>
+                </a:solidFill>
+                <a:latin typeface="Calibri"/>
+              </a:rPr>
+              <a:t>MVP scope is a hypothesis test, not a feature checklist. I cut everything not needed to validate one thing: will people extract, then actually distribute?</a:t>
+            </a:r>
+          </a:p>
+        </p:txBody>
+      </p:sp>
+      <p:sp>
+        <p:nvSpPr>
+          <p:cNvPr id="7" name="Rounded Rectangle 6"/>
           <p:cNvSpPr/>
           <p:nvPr/>
         </p:nvSpPr>
         <p:spPr>
           <a:xfrm>
-            <a:off x="822960" y="2286000"/>
-            <a:ext cx="3429000" cy="2377440"/>
-          </a:xfrm>
-          <a:prstGeom prst="roundRect">
-            <a:avLst>
-              <a:gd name="adj" fmla="val 4500"/>
-            </a:avLst>
-          </a:prstGeom>
-          <a:solidFill>
-            <a:srgbClr val="FFFFFF"/>
-          </a:solidFill>
-          <a:ln w="17780">
-            <a:solidFill>
-              <a:srgbClr val="C2410C"/>
-            </a:solidFill>
-          </a:ln>
-          <a:effectLst/>
-        </p:spPr>
-        <p:style>
-          <a:lnRef idx="1">
-            <a:schemeClr val="accent1"/>
-          </a:lnRef>
-          <a:fillRef idx="3">
-            <a:schemeClr val="accent1"/>
-          </a:fillRef>
-          <a:effectRef idx="2">
-            <a:schemeClr val="accent1"/>
-          </a:effectRef>
-          <a:fontRef idx="minor">
-            <a:schemeClr val="lt1"/>
-          </a:fontRef>
-        </p:style>
-        <p:txBody>
-          <a:bodyPr rtlCol="0" anchor="ctr"/>
-          <a:lstStyle/>
-          <a:p>
-            <a:pPr algn="ctr"/>
-          </a:p>
-        </p:txBody>
-      </p:sp>
-      <p:sp>
-        <p:nvSpPr>
-          <p:cNvPr id="7" name="TextBox 6"/>
-          <p:cNvSpPr txBox="1"/>
-          <p:nvPr/>
-        </p:nvSpPr>
-        <p:spPr>
-          <a:xfrm>
-            <a:off x="1060704" y="2468880"/>
-            <a:ext cx="3017520" cy="320040"/>
-          </a:xfrm>
-          <a:prstGeom prst="rect">
-            <a:avLst/>
-          </a:prstGeom>
-          <a:noFill/>
-        </p:spPr>
-        <p:txBody>
-          <a:bodyPr wrap="square" anchor="t">
-            <a:spAutoFit/>
-          </a:bodyPr>
-          <a:lstStyle/>
-          <a:p>
-            <a:pPr algn="l">
-              <a:lnSpc>
-                <a:spcPct val="106000"/>
-              </a:lnSpc>
-              <a:spcBef>
-                <a:spcPts val="0"/>
-              </a:spcBef>
-              <a:spcAft>
-                <a:spcPts val="0"/>
-              </a:spcAft>
-            </a:pPr>
-            <a:r>
-              <a:rPr sz="1050" b="1">
-                <a:solidFill>
-                  <a:srgbClr val="C2410C"/>
-                </a:solidFill>
-                <a:latin typeface="Consolas"/>
-              </a:rPr>
-              <a:t>NOW · VALIDATE</a:t>
-            </a:r>
-          </a:p>
-        </p:txBody>
-      </p:sp>
-      <p:sp>
-        <p:nvSpPr>
-          <p:cNvPr id="8" name="TextBox 7"/>
-          <p:cNvSpPr txBox="1"/>
-          <p:nvPr/>
-        </p:nvSpPr>
-        <p:spPr>
-          <a:xfrm>
-            <a:off x="1060704" y="2816352"/>
-            <a:ext cx="3017520" cy="411480"/>
-          </a:xfrm>
-          <a:prstGeom prst="rect">
-            <a:avLst/>
-          </a:prstGeom>
-          <a:noFill/>
-        </p:spPr>
-        <p:txBody>
-          <a:bodyPr wrap="square" anchor="t">
-            <a:spAutoFit/>
-          </a:bodyPr>
-          <a:lstStyle/>
-          <a:p>
-            <a:pPr algn="l">
-              <a:lnSpc>
-                <a:spcPct val="106000"/>
-              </a:lnSpc>
-              <a:spcBef>
-                <a:spcPts val="0"/>
-              </a:spcBef>
-              <a:spcAft>
-                <a:spcPts val="0"/>
-              </a:spcAft>
-            </a:pPr>
-            <a:r>
-              <a:rPr sz="1550" b="1">
-                <a:solidFill>
-                  <a:srgbClr val="16181F"/>
-                </a:solidFill>
-                <a:latin typeface="Calibri"/>
-              </a:rPr>
-              <a:t>The core loop</a:t>
-            </a:r>
-          </a:p>
-        </p:txBody>
-      </p:sp>
-      <p:sp>
-        <p:nvSpPr>
-          <p:cNvPr id="9" name="TextBox 8"/>
-          <p:cNvSpPr txBox="1"/>
-          <p:nvPr/>
-        </p:nvSpPr>
-        <p:spPr>
-          <a:xfrm>
-            <a:off x="1060704" y="3310128"/>
-            <a:ext cx="3017520" cy="457200"/>
-          </a:xfrm>
-          <a:prstGeom prst="rect">
-            <a:avLst/>
-          </a:prstGeom>
-          <a:noFill/>
-        </p:spPr>
-        <p:txBody>
-          <a:bodyPr wrap="square" anchor="t">
-            <a:spAutoFit/>
-          </a:bodyPr>
-          <a:lstStyle/>
-          <a:p>
-            <a:pPr algn="l">
-              <a:lnSpc>
-                <a:spcPct val="105000"/>
-              </a:lnSpc>
-              <a:spcBef>
-                <a:spcPts val="0"/>
-              </a:spcBef>
-              <a:spcAft>
-                <a:spcPts val="0"/>
-              </a:spcAft>
-            </a:pPr>
-            <a:r>
-              <a:rPr sz="1200" b="1">
-                <a:solidFill>
-                  <a:srgbClr val="C2410C"/>
-                </a:solidFill>
-                <a:latin typeface="Calibri"/>
-              </a:rPr>
-              <a:t>•  </a:t>
-            </a:r>
-            <a:r>
-              <a:rPr sz="1250" b="0">
-                <a:solidFill>
-                  <a:srgbClr val="5A616E"/>
-                </a:solidFill>
-                <a:latin typeface="Calibri"/>
-              </a:rPr>
-              <a:t>Paste → extract → distribute</a:t>
-            </a:r>
-          </a:p>
-        </p:txBody>
-      </p:sp>
-      <p:sp>
-        <p:nvSpPr>
-          <p:cNvPr id="10" name="TextBox 9"/>
-          <p:cNvSpPr txBox="1"/>
-          <p:nvPr/>
-        </p:nvSpPr>
-        <p:spPr>
-          <a:xfrm>
-            <a:off x="1060704" y="3730752"/>
-            <a:ext cx="3017520" cy="457200"/>
-          </a:xfrm>
-          <a:prstGeom prst="rect">
-            <a:avLst/>
-          </a:prstGeom>
-          <a:noFill/>
-        </p:spPr>
-        <p:txBody>
-          <a:bodyPr wrap="square" anchor="t">
-            <a:spAutoFit/>
-          </a:bodyPr>
-          <a:lstStyle/>
-          <a:p>
-            <a:pPr algn="l">
-              <a:lnSpc>
-                <a:spcPct val="105000"/>
-              </a:lnSpc>
-              <a:spcBef>
-                <a:spcPts val="0"/>
-              </a:spcBef>
-              <a:spcAft>
-                <a:spcPts val="0"/>
-              </a:spcAft>
-            </a:pPr>
-            <a:r>
-              <a:rPr sz="1200" b="1">
-                <a:solidFill>
-                  <a:srgbClr val="C2410C"/>
-                </a:solidFill>
-                <a:latin typeface="Calibri"/>
-              </a:rPr>
-              <a:t>•  </a:t>
-            </a:r>
-            <a:r>
-              <a:rPr sz="1250" b="0">
-                <a:solidFill>
-                  <a:srgbClr val="5A616E"/>
-                </a:solidFill>
-                <a:latin typeface="Calibri"/>
-              </a:rPr>
-              <a:t>Zero setup, no OAuth</a:t>
-            </a:r>
-          </a:p>
-        </p:txBody>
-      </p:sp>
-      <p:sp>
-        <p:nvSpPr>
-          <p:cNvPr id="11" name="TextBox 10"/>
-          <p:cNvSpPr txBox="1"/>
-          <p:nvPr/>
-        </p:nvSpPr>
-        <p:spPr>
-          <a:xfrm>
-            <a:off x="1060704" y="4151376"/>
-            <a:ext cx="3017520" cy="457200"/>
-          </a:xfrm>
-          <a:prstGeom prst="rect">
-            <a:avLst/>
-          </a:prstGeom>
-          <a:noFill/>
-        </p:spPr>
-        <p:txBody>
-          <a:bodyPr wrap="square" anchor="t">
-            <a:spAutoFit/>
-          </a:bodyPr>
-          <a:lstStyle/>
-          <a:p>
-            <a:pPr algn="l">
-              <a:lnSpc>
-                <a:spcPct val="105000"/>
-              </a:lnSpc>
-              <a:spcBef>
-                <a:spcPts val="0"/>
-              </a:spcBef>
-              <a:spcAft>
-                <a:spcPts val="0"/>
-              </a:spcAft>
-            </a:pPr>
-            <a:r>
-              <a:rPr sz="1200" b="1">
-                <a:solidFill>
-                  <a:srgbClr val="C2410C"/>
-                </a:solidFill>
-                <a:latin typeface="Calibri"/>
-              </a:rPr>
-              <a:t>•  </a:t>
-            </a:r>
-            <a:r>
-              <a:rPr sz="1250" b="0">
-                <a:solidFill>
-                  <a:srgbClr val="5A616E"/>
-                </a:solidFill>
-                <a:latin typeface="Calibri"/>
-              </a:rPr>
-              <a:t>Reliable structured output</a:t>
-            </a:r>
-          </a:p>
-        </p:txBody>
-      </p:sp>
-      <p:sp>
-        <p:nvSpPr>
-          <p:cNvPr id="12" name="Rounded Rectangle 11"/>
-          <p:cNvSpPr/>
-          <p:nvPr/>
-        </p:nvSpPr>
-        <p:spPr>
-          <a:xfrm>
-            <a:off x="4434840" y="2286000"/>
-            <a:ext cx="3429000" cy="2377440"/>
+            <a:off x="822960" y="2926080"/>
+            <a:ext cx="5120640" cy="1463040"/>
           </a:xfrm>
           <a:prstGeom prst="roundRect">
             <a:avLst>
@@ -3997,14 +3743,14 @@
       </p:sp>
       <p:sp>
         <p:nvSpPr>
-          <p:cNvPr id="13" name="TextBox 12"/>
-          <p:cNvSpPr txBox="1"/>
-          <p:nvPr/>
-        </p:nvSpPr>
-        <p:spPr>
-          <a:xfrm>
-            <a:off x="4672584" y="2468880"/>
-            <a:ext cx="3017520" cy="320040"/>
+          <p:cNvPr id="8" name="TextBox 7"/>
+          <p:cNvSpPr txBox="1"/>
+          <p:nvPr/>
+        </p:nvSpPr>
+        <p:spPr>
+          <a:xfrm>
+            <a:off x="1078992" y="3090672"/>
+            <a:ext cx="4572000" cy="320040"/>
           </a:xfrm>
           <a:prstGeom prst="rect">
             <a:avLst/>
@@ -4029,234 +3775,72 @@
               </a:spcAft>
             </a:pPr>
             <a:r>
-              <a:rPr sz="1050" b="1">
+              <a:rPr sz="1100" b="1">
                 <a:solidFill>
                   <a:srgbClr val="C2410C"/>
                 </a:solidFill>
                 <a:latin typeface="Consolas"/>
               </a:rPr>
-              <a:t>NEXT · DEEPEN</a:t>
-            </a:r>
-          </a:p>
-        </p:txBody>
-      </p:sp>
-      <p:sp>
-        <p:nvSpPr>
-          <p:cNvPr id="14" name="TextBox 13"/>
-          <p:cNvSpPr txBox="1"/>
-          <p:nvPr/>
-        </p:nvSpPr>
-        <p:spPr>
-          <a:xfrm>
-            <a:off x="4672584" y="2816352"/>
-            <a:ext cx="3017520" cy="411480"/>
-          </a:xfrm>
-          <a:prstGeom prst="rect">
-            <a:avLst/>
-          </a:prstGeom>
-          <a:noFill/>
-        </p:spPr>
-        <p:txBody>
-          <a:bodyPr wrap="square" anchor="t">
-            <a:spAutoFit/>
-          </a:bodyPr>
-          <a:lstStyle/>
-          <a:p>
-            <a:pPr algn="l">
-              <a:lnSpc>
-                <a:spcPct val="106000"/>
-              </a:lnSpc>
-              <a:spcBef>
-                <a:spcPts val="0"/>
-              </a:spcBef>
-              <a:spcAft>
-                <a:spcPts val="0"/>
-              </a:spcAft>
-            </a:pPr>
-            <a:r>
-              <a:rPr sz="1550" b="1">
-                <a:solidFill>
-                  <a:srgbClr val="16181F"/>
+              <a:t>CUT · PERSISTENCE</a:t>
+            </a:r>
+          </a:p>
+        </p:txBody>
+      </p:sp>
+      <p:sp>
+        <p:nvSpPr>
+          <p:cNvPr id="9" name="TextBox 8"/>
+          <p:cNvSpPr txBox="1"/>
+          <p:nvPr/>
+        </p:nvSpPr>
+        <p:spPr>
+          <a:xfrm>
+            <a:off x="1078992" y="3429000"/>
+            <a:ext cx="4617720" cy="868680"/>
+          </a:xfrm>
+          <a:prstGeom prst="rect">
+            <a:avLst/>
+          </a:prstGeom>
+          <a:noFill/>
+        </p:spPr>
+        <p:txBody>
+          <a:bodyPr wrap="square" anchor="t">
+            <a:spAutoFit/>
+          </a:bodyPr>
+          <a:lstStyle/>
+          <a:p>
+            <a:pPr algn="l">
+              <a:lnSpc>
+                <a:spcPct val="112000"/>
+              </a:lnSpc>
+              <a:spcBef>
+                <a:spcPts val="0"/>
+              </a:spcBef>
+              <a:spcAft>
+                <a:spcPts val="0"/>
+              </a:spcAft>
+            </a:pPr>
+            <a:r>
+              <a:rPr sz="1300" b="0">
+                <a:solidFill>
+                  <a:srgbClr val="5A616E"/>
                 </a:solidFill>
                 <a:latin typeface="Calibri"/>
               </a:rPr>
-              <a:t>Real workflow</a:t>
-            </a:r>
-          </a:p>
-        </p:txBody>
-      </p:sp>
-      <p:sp>
-        <p:nvSpPr>
-          <p:cNvPr id="15" name="TextBox 14"/>
-          <p:cNvSpPr txBox="1"/>
-          <p:nvPr/>
-        </p:nvSpPr>
-        <p:spPr>
-          <a:xfrm>
-            <a:off x="4672584" y="3310128"/>
-            <a:ext cx="3017520" cy="457200"/>
-          </a:xfrm>
-          <a:prstGeom prst="rect">
-            <a:avLst/>
-          </a:prstGeom>
-          <a:noFill/>
-        </p:spPr>
-        <p:txBody>
-          <a:bodyPr wrap="square" anchor="t">
-            <a:spAutoFit/>
-          </a:bodyPr>
-          <a:lstStyle/>
-          <a:p>
-            <a:pPr algn="l">
-              <a:lnSpc>
-                <a:spcPct val="105000"/>
-              </a:lnSpc>
-              <a:spcBef>
-                <a:spcPts val="0"/>
-              </a:spcBef>
-              <a:spcAft>
-                <a:spcPts val="0"/>
-              </a:spcAft>
-            </a:pPr>
-            <a:r>
-              <a:rPr sz="1200" b="1">
-                <a:solidFill>
-                  <a:srgbClr val="C2410C"/>
-                </a:solidFill>
-                <a:latin typeface="Calibri"/>
-              </a:rPr>
-              <a:t>•  </a:t>
-            </a:r>
-            <a:r>
-              <a:rPr sz="1250" b="0">
-                <a:solidFill>
-                  <a:srgbClr val="5A616E"/>
-                </a:solidFill>
-                <a:latin typeface="Calibri"/>
-              </a:rPr>
-              <a:t>Native Calendar / Gmail / Slack / Notion</a:t>
-            </a:r>
-          </a:p>
-        </p:txBody>
-      </p:sp>
-      <p:sp>
-        <p:nvSpPr>
-          <p:cNvPr id="16" name="TextBox 15"/>
-          <p:cNvSpPr txBox="1"/>
-          <p:nvPr/>
-        </p:nvSpPr>
-        <p:spPr>
-          <a:xfrm>
-            <a:off x="4672584" y="3730752"/>
-            <a:ext cx="3017520" cy="457200"/>
-          </a:xfrm>
-          <a:prstGeom prst="rect">
-            <a:avLst/>
-          </a:prstGeom>
-          <a:noFill/>
-        </p:spPr>
-        <p:txBody>
-          <a:bodyPr wrap="square" anchor="t">
-            <a:spAutoFit/>
-          </a:bodyPr>
-          <a:lstStyle/>
-          <a:p>
-            <a:pPr algn="l">
-              <a:lnSpc>
-                <a:spcPct val="105000"/>
-              </a:lnSpc>
-              <a:spcBef>
-                <a:spcPts val="0"/>
-              </a:spcBef>
-              <a:spcAft>
-                <a:spcPts val="0"/>
-              </a:spcAft>
-            </a:pPr>
-            <a:r>
-              <a:rPr sz="1200" b="1">
-                <a:solidFill>
-                  <a:srgbClr val="C2410C"/>
-                </a:solidFill>
-                <a:latin typeface="Calibri"/>
-              </a:rPr>
-              <a:t>•  </a:t>
-            </a:r>
-            <a:r>
-              <a:rPr sz="1250" b="0">
-                <a:solidFill>
-                  <a:srgbClr val="5A616E"/>
-                </a:solidFill>
-                <a:latin typeface="Calibri"/>
-              </a:rPr>
-              <a:t>Persistence + team workspaces</a:t>
-            </a:r>
-          </a:p>
-        </p:txBody>
-      </p:sp>
-      <p:sp>
-        <p:nvSpPr>
-          <p:cNvPr id="17" name="TextBox 16"/>
-          <p:cNvSpPr txBox="1"/>
-          <p:nvPr/>
-        </p:nvSpPr>
-        <p:spPr>
-          <a:xfrm>
-            <a:off x="4672584" y="4151376"/>
-            <a:ext cx="3017520" cy="457200"/>
-          </a:xfrm>
-          <a:prstGeom prst="rect">
-            <a:avLst/>
-          </a:prstGeom>
-          <a:noFill/>
-        </p:spPr>
-        <p:txBody>
-          <a:bodyPr wrap="square" anchor="t">
-            <a:spAutoFit/>
-          </a:bodyPr>
-          <a:lstStyle/>
-          <a:p>
-            <a:pPr algn="l">
-              <a:lnSpc>
-                <a:spcPct val="105000"/>
-              </a:lnSpc>
-              <a:spcBef>
-                <a:spcPts val="0"/>
-              </a:spcBef>
-              <a:spcAft>
-                <a:spcPts val="0"/>
-              </a:spcAft>
-            </a:pPr>
-            <a:r>
-              <a:rPr sz="1200" b="1">
-                <a:solidFill>
-                  <a:srgbClr val="C2410C"/>
-                </a:solidFill>
-                <a:latin typeface="Calibri"/>
-              </a:rPr>
-              <a:t>•  </a:t>
-            </a:r>
-            <a:r>
-              <a:rPr sz="1250" b="0">
-                <a:solidFill>
-                  <a:srgbClr val="5A616E"/>
-                </a:solidFill>
-                <a:latin typeface="Calibri"/>
-              </a:rPr>
-              <a:t>Auto-MoM to attendees</a:t>
-            </a:r>
-          </a:p>
-        </p:txBody>
-      </p:sp>
-      <p:sp>
-        <p:nvSpPr>
-          <p:cNvPr id="18" name="Rounded Rectangle 17"/>
+              <a:t>No database. A refresh clears everything — and “no data stored” removes privacy friction for testers.</a:t>
+            </a:r>
+          </a:p>
+        </p:txBody>
+      </p:sp>
+      <p:sp>
+        <p:nvSpPr>
+          <p:cNvPr id="10" name="Rounded Rectangle 9"/>
           <p:cNvSpPr/>
           <p:nvPr/>
         </p:nvSpPr>
         <p:spPr>
           <a:xfrm>
-            <a:off x="8046720" y="2286000"/>
-            <a:ext cx="3429000" cy="2377440"/>
+            <a:off x="6263640" y="2926080"/>
+            <a:ext cx="5120640" cy="1463040"/>
           </a:xfrm>
           <a:prstGeom prst="roundRect">
             <a:avLst>
@@ -4297,14 +3881,14 @@
       </p:sp>
       <p:sp>
         <p:nvSpPr>
-          <p:cNvPr id="19" name="TextBox 18"/>
-          <p:cNvSpPr txBox="1"/>
-          <p:nvPr/>
-        </p:nvSpPr>
-        <p:spPr>
-          <a:xfrm>
-            <a:off x="8284464" y="2468880"/>
-            <a:ext cx="3017520" cy="320040"/>
+          <p:cNvPr id="11" name="TextBox 10"/>
+          <p:cNvSpPr txBox="1"/>
+          <p:nvPr/>
+        </p:nvSpPr>
+        <p:spPr>
+          <a:xfrm>
+            <a:off x="6519672" y="3090672"/>
+            <a:ext cx="4572000" cy="320040"/>
           </a:xfrm>
           <a:prstGeom prst="rect">
             <a:avLst/>
@@ -4329,243 +3913,85 @@
               </a:spcAft>
             </a:pPr>
             <a:r>
-              <a:rPr sz="1050" b="1">
+              <a:rPr sz="1100" b="1">
                 <a:solidFill>
                   <a:srgbClr val="C2410C"/>
                 </a:solidFill>
                 <a:latin typeface="Consolas"/>
               </a:rPr>
-              <a:t>LATER · OWN THE OUTCOME</a:t>
-            </a:r>
-          </a:p>
-        </p:txBody>
-      </p:sp>
-      <p:sp>
-        <p:nvSpPr>
-          <p:cNvPr id="20" name="TextBox 19"/>
-          <p:cNvSpPr txBox="1"/>
-          <p:nvPr/>
-        </p:nvSpPr>
-        <p:spPr>
-          <a:xfrm>
-            <a:off x="8284464" y="2816352"/>
-            <a:ext cx="3017520" cy="411480"/>
-          </a:xfrm>
-          <a:prstGeom prst="rect">
-            <a:avLst/>
-          </a:prstGeom>
-          <a:noFill/>
-        </p:spPr>
-        <p:txBody>
-          <a:bodyPr wrap="square" anchor="t">
-            <a:spAutoFit/>
-          </a:bodyPr>
-          <a:lstStyle/>
-          <a:p>
-            <a:pPr algn="l">
-              <a:lnSpc>
-                <a:spcPct val="106000"/>
-              </a:lnSpc>
-              <a:spcBef>
-                <a:spcPts val="0"/>
-              </a:spcBef>
-              <a:spcAft>
-                <a:spcPts val="0"/>
-              </a:spcAft>
-            </a:pPr>
-            <a:r>
-              <a:rPr sz="1550" b="1">
-                <a:solidFill>
-                  <a:srgbClr val="16181F"/>
+              <a:t>CUT · REAL INTEGRATIONS</a:t>
+            </a:r>
+          </a:p>
+        </p:txBody>
+      </p:sp>
+      <p:sp>
+        <p:nvSpPr>
+          <p:cNvPr id="12" name="TextBox 11"/>
+          <p:cNvSpPr txBox="1"/>
+          <p:nvPr/>
+        </p:nvSpPr>
+        <p:spPr>
+          <a:xfrm>
+            <a:off x="6519672" y="3429000"/>
+            <a:ext cx="4617720" cy="868680"/>
+          </a:xfrm>
+          <a:prstGeom prst="rect">
+            <a:avLst/>
+          </a:prstGeom>
+          <a:noFill/>
+        </p:spPr>
+        <p:txBody>
+          <a:bodyPr wrap="square" anchor="t">
+            <a:spAutoFit/>
+          </a:bodyPr>
+          <a:lstStyle/>
+          <a:p>
+            <a:pPr algn="l">
+              <a:lnSpc>
+                <a:spcPct val="112000"/>
+              </a:lnSpc>
+              <a:spcBef>
+                <a:spcPts val="0"/>
+              </a:spcBef>
+              <a:spcAft>
+                <a:spcPts val="0"/>
+              </a:spcAft>
+            </a:pPr>
+            <a:r>
+              <a:rPr sz="1300" b="0">
+                <a:solidFill>
+                  <a:srgbClr val="5A616E"/>
                 </a:solidFill>
                 <a:latin typeface="Calibri"/>
               </a:rPr>
-              <a:t>Proactive follow-through</a:t>
-            </a:r>
-          </a:p>
-        </p:txBody>
-      </p:sp>
-      <p:sp>
-        <p:nvSpPr>
-          <p:cNvPr id="21" name="TextBox 20"/>
-          <p:cNvSpPr txBox="1"/>
-          <p:nvPr/>
-        </p:nvSpPr>
-        <p:spPr>
-          <a:xfrm>
-            <a:off x="8284464" y="3310128"/>
-            <a:ext cx="3017520" cy="457200"/>
-          </a:xfrm>
-          <a:prstGeom prst="rect">
-            <a:avLst/>
-          </a:prstGeom>
-          <a:noFill/>
-        </p:spPr>
-        <p:txBody>
-          <a:bodyPr wrap="square" anchor="t">
-            <a:spAutoFit/>
-          </a:bodyPr>
-          <a:lstStyle/>
-          <a:p>
-            <a:pPr algn="l">
-              <a:lnSpc>
-                <a:spcPct val="105000"/>
-              </a:lnSpc>
-              <a:spcBef>
-                <a:spcPts val="0"/>
-              </a:spcBef>
-              <a:spcAft>
-                <a:spcPts val="0"/>
-              </a:spcAft>
-            </a:pPr>
-            <a:r>
-              <a:rPr sz="1200" b="1">
-                <a:solidFill>
-                  <a:srgbClr val="C2410C"/>
-                </a:solidFill>
-                <a:latin typeface="Calibri"/>
-              </a:rPr>
-              <a:t>•  </a:t>
-            </a:r>
-            <a:r>
-              <a:rPr sz="1250" b="0">
-                <a:solidFill>
-                  <a:srgbClr val="5A616E"/>
-                </a:solidFill>
-                <a:latin typeface="Calibri"/>
-              </a:rPr>
-              <a:t>Auto-join &amp; live capture</a:t>
-            </a:r>
-          </a:p>
-        </p:txBody>
-      </p:sp>
-      <p:sp>
-        <p:nvSpPr>
-          <p:cNvPr id="22" name="TextBox 21"/>
-          <p:cNvSpPr txBox="1"/>
-          <p:nvPr/>
-        </p:nvSpPr>
-        <p:spPr>
-          <a:xfrm>
-            <a:off x="8284464" y="3730752"/>
-            <a:ext cx="3017520" cy="457200"/>
-          </a:xfrm>
-          <a:prstGeom prst="rect">
-            <a:avLst/>
-          </a:prstGeom>
-          <a:noFill/>
-        </p:spPr>
-        <p:txBody>
-          <a:bodyPr wrap="square" anchor="t">
-            <a:spAutoFit/>
-          </a:bodyPr>
-          <a:lstStyle/>
-          <a:p>
-            <a:pPr algn="l">
-              <a:lnSpc>
-                <a:spcPct val="105000"/>
-              </a:lnSpc>
-              <a:spcBef>
-                <a:spcPts val="0"/>
-              </a:spcBef>
-              <a:spcAft>
-                <a:spcPts val="0"/>
-              </a:spcAft>
-            </a:pPr>
-            <a:r>
-              <a:rPr sz="1200" b="1">
-                <a:solidFill>
-                  <a:srgbClr val="C2410C"/>
-                </a:solidFill>
-                <a:latin typeface="Calibri"/>
-              </a:rPr>
-              <a:t>•  </a:t>
-            </a:r>
-            <a:r>
-              <a:rPr sz="1250" b="0">
-                <a:solidFill>
-                  <a:srgbClr val="5A616E"/>
-                </a:solidFill>
-                <a:latin typeface="Calibri"/>
-              </a:rPr>
-              <a:t>Nudges: “did you ship X?”</a:t>
-            </a:r>
-          </a:p>
-        </p:txBody>
-      </p:sp>
-      <p:sp>
-        <p:nvSpPr>
-          <p:cNvPr id="23" name="TextBox 22"/>
-          <p:cNvSpPr txBox="1"/>
-          <p:nvPr/>
-        </p:nvSpPr>
-        <p:spPr>
-          <a:xfrm>
-            <a:off x="8284464" y="4151376"/>
-            <a:ext cx="3017520" cy="457200"/>
-          </a:xfrm>
-          <a:prstGeom prst="rect">
-            <a:avLst/>
-          </a:prstGeom>
-          <a:noFill/>
-        </p:spPr>
-        <p:txBody>
-          <a:bodyPr wrap="square" anchor="t">
-            <a:spAutoFit/>
-          </a:bodyPr>
-          <a:lstStyle/>
-          <a:p>
-            <a:pPr algn="l">
-              <a:lnSpc>
-                <a:spcPct val="105000"/>
-              </a:lnSpc>
-              <a:spcBef>
-                <a:spcPts val="0"/>
-              </a:spcBef>
-              <a:spcAft>
-                <a:spcPts val="0"/>
-              </a:spcAft>
-            </a:pPr>
-            <a:r>
-              <a:rPr sz="1200" b="1">
-                <a:solidFill>
-                  <a:srgbClr val="C2410C"/>
-                </a:solidFill>
-                <a:latin typeface="Calibri"/>
-              </a:rPr>
-              <a:t>•  </a:t>
-            </a:r>
-            <a:r>
-              <a:rPr sz="1250" b="0">
-                <a:solidFill>
-                  <a:srgbClr val="5A616E"/>
-                </a:solidFill>
-                <a:latin typeface="Calibri"/>
-              </a:rPr>
-              <a:t>Completion tracking → closes the loop</a:t>
-            </a:r>
-          </a:p>
-        </p:txBody>
-      </p:sp>
-      <p:sp>
-        <p:nvSpPr>
-          <p:cNvPr id="24" name="Rectangle 23"/>
+              <a:t>The URL-prefill trick proves value without OAuth. Real APIs are a scaling investment, made once the loop is proven.</a:t>
+            </a:r>
+          </a:p>
+        </p:txBody>
+      </p:sp>
+      <p:sp>
+        <p:nvSpPr>
+          <p:cNvPr id="13" name="Rounded Rectangle 12"/>
           <p:cNvSpPr/>
           <p:nvPr/>
         </p:nvSpPr>
         <p:spPr>
           <a:xfrm>
-            <a:off x="822960" y="4937760"/>
-            <a:ext cx="54864" cy="1005840"/>
-          </a:xfrm>
-          <a:prstGeom prst="rect">
-            <a:avLst/>
+            <a:off x="822960" y="4526280"/>
+            <a:ext cx="5120640" cy="1463040"/>
+          </a:xfrm>
+          <a:prstGeom prst="roundRect">
+            <a:avLst>
+              <a:gd name="adj" fmla="val 4500"/>
+            </a:avLst>
           </a:prstGeom>
           <a:solidFill>
-            <a:srgbClr val="C2410C"/>
+            <a:srgbClr val="FFFFFF"/>
           </a:solidFill>
-          <a:ln>
-            <a:noFill/>
+          <a:ln w="12700">
+            <a:solidFill>
+              <a:srgbClr val="DEE1E7"/>
+            </a:solidFill>
           </a:ln>
           <a:effectLst/>
         </p:spPr>
@@ -4593,45 +4019,228 @@
       </p:sp>
       <p:sp>
         <p:nvSpPr>
-          <p:cNvPr id="25" name="TextBox 24"/>
-          <p:cNvSpPr txBox="1"/>
-          <p:nvPr/>
-        </p:nvSpPr>
-        <p:spPr>
-          <a:xfrm>
-            <a:off x="1097280" y="4992624"/>
-            <a:ext cx="10241280" cy="1005840"/>
-          </a:xfrm>
-          <a:prstGeom prst="rect">
-            <a:avLst/>
-          </a:prstGeom>
-          <a:noFill/>
-        </p:spPr>
-        <p:txBody>
-          <a:bodyPr wrap="square" anchor="t">
-            <a:spAutoFit/>
-          </a:bodyPr>
-          <a:lstStyle/>
-          <a:p>
-            <a:pPr algn="l">
-              <a:lnSpc>
-                <a:spcPct val="114000"/>
-              </a:lnSpc>
-              <a:spcBef>
-                <a:spcPts val="0"/>
-              </a:spcBef>
-              <a:spcAft>
-                <a:spcPts val="0"/>
-              </a:spcAft>
-            </a:pPr>
-            <a:r>
-              <a:rPr sz="1700" b="0">
-                <a:solidFill>
-                  <a:srgbClr val="16181F"/>
+          <p:cNvPr id="14" name="TextBox 13"/>
+          <p:cNvSpPr txBox="1"/>
+          <p:nvPr/>
+        </p:nvSpPr>
+        <p:spPr>
+          <a:xfrm>
+            <a:off x="1078992" y="4690872"/>
+            <a:ext cx="4572000" cy="320040"/>
+          </a:xfrm>
+          <a:prstGeom prst="rect">
+            <a:avLst/>
+          </a:prstGeom>
+          <a:noFill/>
+        </p:spPr>
+        <p:txBody>
+          <a:bodyPr wrap="square" anchor="t">
+            <a:spAutoFit/>
+          </a:bodyPr>
+          <a:lstStyle/>
+          <a:p>
+            <a:pPr algn="l">
+              <a:lnSpc>
+                <a:spcPct val="106000"/>
+              </a:lnSpc>
+              <a:spcBef>
+                <a:spcPts val="0"/>
+              </a:spcBef>
+              <a:spcAft>
+                <a:spcPts val="0"/>
+              </a:spcAft>
+            </a:pPr>
+            <a:r>
+              <a:rPr sz="1100" b="1">
+                <a:solidFill>
+                  <a:srgbClr val="C2410C"/>
+                </a:solidFill>
+                <a:latin typeface="Consolas"/>
+              </a:rPr>
+              <a:t>CUT · ACCOUNTS &amp; TEAMS</a:t>
+            </a:r>
+          </a:p>
+        </p:txBody>
+      </p:sp>
+      <p:sp>
+        <p:nvSpPr>
+          <p:cNvPr id="15" name="TextBox 14"/>
+          <p:cNvSpPr txBox="1"/>
+          <p:nvPr/>
+        </p:nvSpPr>
+        <p:spPr>
+          <a:xfrm>
+            <a:off x="1078992" y="5029200"/>
+            <a:ext cx="4617720" cy="868680"/>
+          </a:xfrm>
+          <a:prstGeom prst="rect">
+            <a:avLst/>
+          </a:prstGeom>
+          <a:noFill/>
+        </p:spPr>
+        <p:txBody>
+          <a:bodyPr wrap="square" anchor="t">
+            <a:spAutoFit/>
+          </a:bodyPr>
+          <a:lstStyle/>
+          <a:p>
+            <a:pPr algn="l">
+              <a:lnSpc>
+                <a:spcPct val="112000"/>
+              </a:lnSpc>
+              <a:spcBef>
+                <a:spcPts val="0"/>
+              </a:spcBef>
+              <a:spcAft>
+                <a:spcPts val="0"/>
+              </a:spcAft>
+            </a:pPr>
+            <a:r>
+              <a:rPr sz="1300" b="0">
+                <a:solidFill>
+                  <a:srgbClr val="5A616E"/>
                 </a:solidFill>
                 <a:latin typeface="Calibri"/>
               </a:rPr>
-              <a:t>Moat = the feedback loop. Accepted &amp; edited action items become proprietary training data → accuracy that compounds with usage.</a:t>
+              <a:t>Single-session, no login. Multi-user is a growth concern, not a validation one.</a:t>
+            </a:r>
+          </a:p>
+        </p:txBody>
+      </p:sp>
+      <p:sp>
+        <p:nvSpPr>
+          <p:cNvPr id="16" name="Rounded Rectangle 15"/>
+          <p:cNvSpPr/>
+          <p:nvPr/>
+        </p:nvSpPr>
+        <p:spPr>
+          <a:xfrm>
+            <a:off x="6263640" y="4526280"/>
+            <a:ext cx="5120640" cy="1463040"/>
+          </a:xfrm>
+          <a:prstGeom prst="roundRect">
+            <a:avLst>
+              <a:gd name="adj" fmla="val 4500"/>
+            </a:avLst>
+          </a:prstGeom>
+          <a:solidFill>
+            <a:srgbClr val="FFFFFF"/>
+          </a:solidFill>
+          <a:ln w="12700">
+            <a:solidFill>
+              <a:srgbClr val="DEE1E7"/>
+            </a:solidFill>
+          </a:ln>
+          <a:effectLst/>
+        </p:spPr>
+        <p:style>
+          <a:lnRef idx="1">
+            <a:schemeClr val="accent1"/>
+          </a:lnRef>
+          <a:fillRef idx="3">
+            <a:schemeClr val="accent1"/>
+          </a:fillRef>
+          <a:effectRef idx="2">
+            <a:schemeClr val="accent1"/>
+          </a:effectRef>
+          <a:fontRef idx="minor">
+            <a:schemeClr val="lt1"/>
+          </a:fontRef>
+        </p:style>
+        <p:txBody>
+          <a:bodyPr rtlCol="0" anchor="ctr"/>
+          <a:lstStyle/>
+          <a:p>
+            <a:pPr algn="ctr"/>
+          </a:p>
+        </p:txBody>
+      </p:sp>
+      <p:sp>
+        <p:nvSpPr>
+          <p:cNvPr id="17" name="TextBox 16"/>
+          <p:cNvSpPr txBox="1"/>
+          <p:nvPr/>
+        </p:nvSpPr>
+        <p:spPr>
+          <a:xfrm>
+            <a:off x="6519672" y="4690872"/>
+            <a:ext cx="4572000" cy="320040"/>
+          </a:xfrm>
+          <a:prstGeom prst="rect">
+            <a:avLst/>
+          </a:prstGeom>
+          <a:noFill/>
+        </p:spPr>
+        <p:txBody>
+          <a:bodyPr wrap="square" anchor="t">
+            <a:spAutoFit/>
+          </a:bodyPr>
+          <a:lstStyle/>
+          <a:p>
+            <a:pPr algn="l">
+              <a:lnSpc>
+                <a:spcPct val="106000"/>
+              </a:lnSpc>
+              <a:spcBef>
+                <a:spcPts val="0"/>
+              </a:spcBef>
+              <a:spcAft>
+                <a:spcPts val="0"/>
+              </a:spcAft>
+            </a:pPr>
+            <a:r>
+              <a:rPr sz="1100" b="1">
+                <a:solidFill>
+                  <a:srgbClr val="C2410C"/>
+                </a:solidFill>
+                <a:latin typeface="Consolas"/>
+              </a:rPr>
+              <a:t>KEPT · THE CORE LOOP + TRUST</a:t>
+            </a:r>
+          </a:p>
+        </p:txBody>
+      </p:sp>
+      <p:sp>
+        <p:nvSpPr>
+          <p:cNvPr id="18" name="TextBox 17"/>
+          <p:cNvSpPr txBox="1"/>
+          <p:nvPr/>
+        </p:nvSpPr>
+        <p:spPr>
+          <a:xfrm>
+            <a:off x="6519672" y="5029200"/>
+            <a:ext cx="4617720" cy="868680"/>
+          </a:xfrm>
+          <a:prstGeom prst="rect">
+            <a:avLst/>
+          </a:prstGeom>
+          <a:noFill/>
+        </p:spPr>
+        <p:txBody>
+          <a:bodyPr wrap="square" anchor="t">
+            <a:spAutoFit/>
+          </a:bodyPr>
+          <a:lstStyle/>
+          <a:p>
+            <a:pPr algn="l">
+              <a:lnSpc>
+                <a:spcPct val="112000"/>
+              </a:lnSpc>
+              <a:spcBef>
+                <a:spcPts val="0"/>
+              </a:spcBef>
+              <a:spcAft>
+                <a:spcPts val="0"/>
+              </a:spcAft>
+            </a:pPr>
+            <a:r>
+              <a:rPr sz="1300" b="0">
+                <a:solidFill>
+                  <a:srgbClr val="5A616E"/>
+                </a:solidFill>
+                <a:latin typeface="Calibri"/>
+              </a:rPr>
+              <a:t>Extraction reliability, one-click distribution, honest guardrails, 100%-tested logic.</a:t>
             </a:r>
           </a:p>
         </p:txBody>
@@ -4782,6 +4391,1191 @@
                 </a:solidFill>
                 <a:latin typeface="Consolas"/>
               </a:rPr>
+              <a:t>09 · ROADMAP &amp; MOAT</a:t>
+            </a:r>
+          </a:p>
+        </p:txBody>
+      </p:sp>
+      <p:sp>
+        <p:nvSpPr>
+          <p:cNvPr id="5" name="TextBox 4"/>
+          <p:cNvSpPr txBox="1"/>
+          <p:nvPr/>
+        </p:nvSpPr>
+        <p:spPr>
+          <a:xfrm>
+            <a:off x="822960" y="1051560"/>
+            <a:ext cx="10515600" cy="1371600"/>
+          </a:xfrm>
+          <a:prstGeom prst="rect">
+            <a:avLst/>
+          </a:prstGeom>
+          <a:noFill/>
+        </p:spPr>
+        <p:txBody>
+          <a:bodyPr wrap="square" anchor="t">
+            <a:spAutoFit/>
+          </a:bodyPr>
+          <a:lstStyle/>
+          <a:p>
+            <a:pPr algn="l">
+              <a:lnSpc>
+                <a:spcPct val="102000"/>
+              </a:lnSpc>
+              <a:spcBef>
+                <a:spcPts val="0"/>
+              </a:spcBef>
+              <a:spcAft>
+                <a:spcPts val="0"/>
+              </a:spcAft>
+            </a:pPr>
+            <a:r>
+              <a:rPr sz="3300" b="1">
+                <a:solidFill>
+                  <a:srgbClr val="16181F"/>
+                </a:solidFill>
+                <a:latin typeface="Calibri"/>
+              </a:rPr>
+              <a:t>From a one-click helper to the system of record for follow-through.</a:t>
+            </a:r>
+          </a:p>
+        </p:txBody>
+      </p:sp>
+      <p:sp>
+        <p:nvSpPr>
+          <p:cNvPr id="6" name="Rounded Rectangle 5"/>
+          <p:cNvSpPr/>
+          <p:nvPr/>
+        </p:nvSpPr>
+        <p:spPr>
+          <a:xfrm>
+            <a:off x="822960" y="2286000"/>
+            <a:ext cx="3429000" cy="2377440"/>
+          </a:xfrm>
+          <a:prstGeom prst="roundRect">
+            <a:avLst>
+              <a:gd name="adj" fmla="val 4500"/>
+            </a:avLst>
+          </a:prstGeom>
+          <a:solidFill>
+            <a:srgbClr val="FFFFFF"/>
+          </a:solidFill>
+          <a:ln w="17780">
+            <a:solidFill>
+              <a:srgbClr val="C2410C"/>
+            </a:solidFill>
+          </a:ln>
+          <a:effectLst/>
+        </p:spPr>
+        <p:style>
+          <a:lnRef idx="1">
+            <a:schemeClr val="accent1"/>
+          </a:lnRef>
+          <a:fillRef idx="3">
+            <a:schemeClr val="accent1"/>
+          </a:fillRef>
+          <a:effectRef idx="2">
+            <a:schemeClr val="accent1"/>
+          </a:effectRef>
+          <a:fontRef idx="minor">
+            <a:schemeClr val="lt1"/>
+          </a:fontRef>
+        </p:style>
+        <p:txBody>
+          <a:bodyPr rtlCol="0" anchor="ctr"/>
+          <a:lstStyle/>
+          <a:p>
+            <a:pPr algn="ctr"/>
+          </a:p>
+        </p:txBody>
+      </p:sp>
+      <p:sp>
+        <p:nvSpPr>
+          <p:cNvPr id="7" name="TextBox 6"/>
+          <p:cNvSpPr txBox="1"/>
+          <p:nvPr/>
+        </p:nvSpPr>
+        <p:spPr>
+          <a:xfrm>
+            <a:off x="1060704" y="2468880"/>
+            <a:ext cx="3017520" cy="320040"/>
+          </a:xfrm>
+          <a:prstGeom prst="rect">
+            <a:avLst/>
+          </a:prstGeom>
+          <a:noFill/>
+        </p:spPr>
+        <p:txBody>
+          <a:bodyPr wrap="square" anchor="t">
+            <a:spAutoFit/>
+          </a:bodyPr>
+          <a:lstStyle/>
+          <a:p>
+            <a:pPr algn="l">
+              <a:lnSpc>
+                <a:spcPct val="106000"/>
+              </a:lnSpc>
+              <a:spcBef>
+                <a:spcPts val="0"/>
+              </a:spcBef>
+              <a:spcAft>
+                <a:spcPts val="0"/>
+              </a:spcAft>
+            </a:pPr>
+            <a:r>
+              <a:rPr sz="1050" b="1">
+                <a:solidFill>
+                  <a:srgbClr val="C2410C"/>
+                </a:solidFill>
+                <a:latin typeface="Consolas"/>
+              </a:rPr>
+              <a:t>NOW · VALIDATE</a:t>
+            </a:r>
+          </a:p>
+        </p:txBody>
+      </p:sp>
+      <p:sp>
+        <p:nvSpPr>
+          <p:cNvPr id="8" name="TextBox 7"/>
+          <p:cNvSpPr txBox="1"/>
+          <p:nvPr/>
+        </p:nvSpPr>
+        <p:spPr>
+          <a:xfrm>
+            <a:off x="1060704" y="2816352"/>
+            <a:ext cx="3017520" cy="411480"/>
+          </a:xfrm>
+          <a:prstGeom prst="rect">
+            <a:avLst/>
+          </a:prstGeom>
+          <a:noFill/>
+        </p:spPr>
+        <p:txBody>
+          <a:bodyPr wrap="square" anchor="t">
+            <a:spAutoFit/>
+          </a:bodyPr>
+          <a:lstStyle/>
+          <a:p>
+            <a:pPr algn="l">
+              <a:lnSpc>
+                <a:spcPct val="106000"/>
+              </a:lnSpc>
+              <a:spcBef>
+                <a:spcPts val="0"/>
+              </a:spcBef>
+              <a:spcAft>
+                <a:spcPts val="0"/>
+              </a:spcAft>
+            </a:pPr>
+            <a:r>
+              <a:rPr sz="1550" b="1">
+                <a:solidFill>
+                  <a:srgbClr val="16181F"/>
+                </a:solidFill>
+                <a:latin typeface="Calibri"/>
+              </a:rPr>
+              <a:t>The core loop</a:t>
+            </a:r>
+          </a:p>
+        </p:txBody>
+      </p:sp>
+      <p:sp>
+        <p:nvSpPr>
+          <p:cNvPr id="9" name="TextBox 8"/>
+          <p:cNvSpPr txBox="1"/>
+          <p:nvPr/>
+        </p:nvSpPr>
+        <p:spPr>
+          <a:xfrm>
+            <a:off x="1060704" y="3310128"/>
+            <a:ext cx="3017520" cy="457200"/>
+          </a:xfrm>
+          <a:prstGeom prst="rect">
+            <a:avLst/>
+          </a:prstGeom>
+          <a:noFill/>
+        </p:spPr>
+        <p:txBody>
+          <a:bodyPr wrap="square" anchor="t">
+            <a:spAutoFit/>
+          </a:bodyPr>
+          <a:lstStyle/>
+          <a:p>
+            <a:pPr algn="l">
+              <a:lnSpc>
+                <a:spcPct val="105000"/>
+              </a:lnSpc>
+              <a:spcBef>
+                <a:spcPts val="0"/>
+              </a:spcBef>
+              <a:spcAft>
+                <a:spcPts val="0"/>
+              </a:spcAft>
+            </a:pPr>
+            <a:r>
+              <a:rPr sz="1200" b="1">
+                <a:solidFill>
+                  <a:srgbClr val="C2410C"/>
+                </a:solidFill>
+                <a:latin typeface="Calibri"/>
+              </a:rPr>
+              <a:t>•  </a:t>
+            </a:r>
+            <a:r>
+              <a:rPr sz="1250" b="0">
+                <a:solidFill>
+                  <a:srgbClr val="5A616E"/>
+                </a:solidFill>
+                <a:latin typeface="Calibri"/>
+              </a:rPr>
+              <a:t>Paste → extract → distribute</a:t>
+            </a:r>
+          </a:p>
+        </p:txBody>
+      </p:sp>
+      <p:sp>
+        <p:nvSpPr>
+          <p:cNvPr id="10" name="TextBox 9"/>
+          <p:cNvSpPr txBox="1"/>
+          <p:nvPr/>
+        </p:nvSpPr>
+        <p:spPr>
+          <a:xfrm>
+            <a:off x="1060704" y="3730752"/>
+            <a:ext cx="3017520" cy="457200"/>
+          </a:xfrm>
+          <a:prstGeom prst="rect">
+            <a:avLst/>
+          </a:prstGeom>
+          <a:noFill/>
+        </p:spPr>
+        <p:txBody>
+          <a:bodyPr wrap="square" anchor="t">
+            <a:spAutoFit/>
+          </a:bodyPr>
+          <a:lstStyle/>
+          <a:p>
+            <a:pPr algn="l">
+              <a:lnSpc>
+                <a:spcPct val="105000"/>
+              </a:lnSpc>
+              <a:spcBef>
+                <a:spcPts val="0"/>
+              </a:spcBef>
+              <a:spcAft>
+                <a:spcPts val="0"/>
+              </a:spcAft>
+            </a:pPr>
+            <a:r>
+              <a:rPr sz="1200" b="1">
+                <a:solidFill>
+                  <a:srgbClr val="C2410C"/>
+                </a:solidFill>
+                <a:latin typeface="Calibri"/>
+              </a:rPr>
+              <a:t>•  </a:t>
+            </a:r>
+            <a:r>
+              <a:rPr sz="1250" b="0">
+                <a:solidFill>
+                  <a:srgbClr val="5A616E"/>
+                </a:solidFill>
+                <a:latin typeface="Calibri"/>
+              </a:rPr>
+              <a:t>Zero setup, no OAuth</a:t>
+            </a:r>
+          </a:p>
+        </p:txBody>
+      </p:sp>
+      <p:sp>
+        <p:nvSpPr>
+          <p:cNvPr id="11" name="TextBox 10"/>
+          <p:cNvSpPr txBox="1"/>
+          <p:nvPr/>
+        </p:nvSpPr>
+        <p:spPr>
+          <a:xfrm>
+            <a:off x="1060704" y="4151376"/>
+            <a:ext cx="3017520" cy="457200"/>
+          </a:xfrm>
+          <a:prstGeom prst="rect">
+            <a:avLst/>
+          </a:prstGeom>
+          <a:noFill/>
+        </p:spPr>
+        <p:txBody>
+          <a:bodyPr wrap="square" anchor="t">
+            <a:spAutoFit/>
+          </a:bodyPr>
+          <a:lstStyle/>
+          <a:p>
+            <a:pPr algn="l">
+              <a:lnSpc>
+                <a:spcPct val="105000"/>
+              </a:lnSpc>
+              <a:spcBef>
+                <a:spcPts val="0"/>
+              </a:spcBef>
+              <a:spcAft>
+                <a:spcPts val="0"/>
+              </a:spcAft>
+            </a:pPr>
+            <a:r>
+              <a:rPr sz="1200" b="1">
+                <a:solidFill>
+                  <a:srgbClr val="C2410C"/>
+                </a:solidFill>
+                <a:latin typeface="Calibri"/>
+              </a:rPr>
+              <a:t>•  </a:t>
+            </a:r>
+            <a:r>
+              <a:rPr sz="1250" b="0">
+                <a:solidFill>
+                  <a:srgbClr val="5A616E"/>
+                </a:solidFill>
+                <a:latin typeface="Calibri"/>
+              </a:rPr>
+              <a:t>Reliable structured output</a:t>
+            </a:r>
+          </a:p>
+        </p:txBody>
+      </p:sp>
+      <p:sp>
+        <p:nvSpPr>
+          <p:cNvPr id="12" name="Rounded Rectangle 11"/>
+          <p:cNvSpPr/>
+          <p:nvPr/>
+        </p:nvSpPr>
+        <p:spPr>
+          <a:xfrm>
+            <a:off x="4434840" y="2286000"/>
+            <a:ext cx="3429000" cy="2377440"/>
+          </a:xfrm>
+          <a:prstGeom prst="roundRect">
+            <a:avLst>
+              <a:gd name="adj" fmla="val 4500"/>
+            </a:avLst>
+          </a:prstGeom>
+          <a:solidFill>
+            <a:srgbClr val="FFFFFF"/>
+          </a:solidFill>
+          <a:ln w="12700">
+            <a:solidFill>
+              <a:srgbClr val="DEE1E7"/>
+            </a:solidFill>
+          </a:ln>
+          <a:effectLst/>
+        </p:spPr>
+        <p:style>
+          <a:lnRef idx="1">
+            <a:schemeClr val="accent1"/>
+          </a:lnRef>
+          <a:fillRef idx="3">
+            <a:schemeClr val="accent1"/>
+          </a:fillRef>
+          <a:effectRef idx="2">
+            <a:schemeClr val="accent1"/>
+          </a:effectRef>
+          <a:fontRef idx="minor">
+            <a:schemeClr val="lt1"/>
+          </a:fontRef>
+        </p:style>
+        <p:txBody>
+          <a:bodyPr rtlCol="0" anchor="ctr"/>
+          <a:lstStyle/>
+          <a:p>
+            <a:pPr algn="ctr"/>
+          </a:p>
+        </p:txBody>
+      </p:sp>
+      <p:sp>
+        <p:nvSpPr>
+          <p:cNvPr id="13" name="TextBox 12"/>
+          <p:cNvSpPr txBox="1"/>
+          <p:nvPr/>
+        </p:nvSpPr>
+        <p:spPr>
+          <a:xfrm>
+            <a:off x="4672584" y="2468880"/>
+            <a:ext cx="3017520" cy="320040"/>
+          </a:xfrm>
+          <a:prstGeom prst="rect">
+            <a:avLst/>
+          </a:prstGeom>
+          <a:noFill/>
+        </p:spPr>
+        <p:txBody>
+          <a:bodyPr wrap="square" anchor="t">
+            <a:spAutoFit/>
+          </a:bodyPr>
+          <a:lstStyle/>
+          <a:p>
+            <a:pPr algn="l">
+              <a:lnSpc>
+                <a:spcPct val="106000"/>
+              </a:lnSpc>
+              <a:spcBef>
+                <a:spcPts val="0"/>
+              </a:spcBef>
+              <a:spcAft>
+                <a:spcPts val="0"/>
+              </a:spcAft>
+            </a:pPr>
+            <a:r>
+              <a:rPr sz="1050" b="1">
+                <a:solidFill>
+                  <a:srgbClr val="C2410C"/>
+                </a:solidFill>
+                <a:latin typeface="Consolas"/>
+              </a:rPr>
+              <a:t>NEXT · AUTO-CAPTURE</a:t>
+            </a:r>
+          </a:p>
+        </p:txBody>
+      </p:sp>
+      <p:sp>
+        <p:nvSpPr>
+          <p:cNvPr id="14" name="TextBox 13"/>
+          <p:cNvSpPr txBox="1"/>
+          <p:nvPr/>
+        </p:nvSpPr>
+        <p:spPr>
+          <a:xfrm>
+            <a:off x="4672584" y="2816352"/>
+            <a:ext cx="3017520" cy="411480"/>
+          </a:xfrm>
+          <a:prstGeom prst="rect">
+            <a:avLst/>
+          </a:prstGeom>
+          <a:noFill/>
+        </p:spPr>
+        <p:txBody>
+          <a:bodyPr wrap="square" anchor="t">
+            <a:spAutoFit/>
+          </a:bodyPr>
+          <a:lstStyle/>
+          <a:p>
+            <a:pPr algn="l">
+              <a:lnSpc>
+                <a:spcPct val="106000"/>
+              </a:lnSpc>
+              <a:spcBef>
+                <a:spcPts val="0"/>
+              </a:spcBef>
+              <a:spcAft>
+                <a:spcPts val="0"/>
+              </a:spcAft>
+            </a:pPr>
+            <a:r>
+              <a:rPr sz="1550" b="1">
+                <a:solidFill>
+                  <a:srgbClr val="16181F"/>
+                </a:solidFill>
+                <a:latin typeface="Calibri"/>
+              </a:rPr>
+              <a:t>Capture everywhere</a:t>
+            </a:r>
+          </a:p>
+        </p:txBody>
+      </p:sp>
+      <p:sp>
+        <p:nvSpPr>
+          <p:cNvPr id="15" name="TextBox 14"/>
+          <p:cNvSpPr txBox="1"/>
+          <p:nvPr/>
+        </p:nvSpPr>
+        <p:spPr>
+          <a:xfrm>
+            <a:off x="4672584" y="3310128"/>
+            <a:ext cx="3017520" cy="457200"/>
+          </a:xfrm>
+          <a:prstGeom prst="rect">
+            <a:avLst/>
+          </a:prstGeom>
+          <a:noFill/>
+        </p:spPr>
+        <p:txBody>
+          <a:bodyPr wrap="square" anchor="t">
+            <a:spAutoFit/>
+          </a:bodyPr>
+          <a:lstStyle/>
+          <a:p>
+            <a:pPr algn="l">
+              <a:lnSpc>
+                <a:spcPct val="105000"/>
+              </a:lnSpc>
+              <a:spcBef>
+                <a:spcPts val="0"/>
+              </a:spcBef>
+              <a:spcAft>
+                <a:spcPts val="0"/>
+              </a:spcAft>
+            </a:pPr>
+            <a:r>
+              <a:rPr sz="1200" b="1">
+                <a:solidFill>
+                  <a:srgbClr val="C2410C"/>
+                </a:solidFill>
+                <a:latin typeface="Calibri"/>
+              </a:rPr>
+              <a:t>•  </a:t>
+            </a:r>
+            <a:r>
+              <a:rPr sz="1250" b="0">
+                <a:solidFill>
+                  <a:srgbClr val="5A616E"/>
+                </a:solidFill>
+                <a:latin typeface="Calibri"/>
+              </a:rPr>
+              <a:t>Extension + AI notetaker</a:t>
+            </a:r>
+          </a:p>
+        </p:txBody>
+      </p:sp>
+      <p:sp>
+        <p:nvSpPr>
+          <p:cNvPr id="16" name="TextBox 15"/>
+          <p:cNvSpPr txBox="1"/>
+          <p:nvPr/>
+        </p:nvSpPr>
+        <p:spPr>
+          <a:xfrm>
+            <a:off x="4672584" y="3730752"/>
+            <a:ext cx="3017520" cy="457200"/>
+          </a:xfrm>
+          <a:prstGeom prst="rect">
+            <a:avLst/>
+          </a:prstGeom>
+          <a:noFill/>
+        </p:spPr>
+        <p:txBody>
+          <a:bodyPr wrap="square" anchor="t">
+            <a:spAutoFit/>
+          </a:bodyPr>
+          <a:lstStyle/>
+          <a:p>
+            <a:pPr algn="l">
+              <a:lnSpc>
+                <a:spcPct val="105000"/>
+              </a:lnSpc>
+              <a:spcBef>
+                <a:spcPts val="0"/>
+              </a:spcBef>
+              <a:spcAft>
+                <a:spcPts val="0"/>
+              </a:spcAft>
+            </a:pPr>
+            <a:r>
+              <a:rPr sz="1200" b="1">
+                <a:solidFill>
+                  <a:srgbClr val="C2410C"/>
+                </a:solidFill>
+                <a:latin typeface="Calibri"/>
+              </a:rPr>
+              <a:t>•  </a:t>
+            </a:r>
+            <a:r>
+              <a:rPr sz="1250" b="0">
+                <a:solidFill>
+                  <a:srgbClr val="5A616E"/>
+                </a:solidFill>
+                <a:latin typeface="Calibri"/>
+              </a:rPr>
+              <a:t>Auto-joins Zoom / Teams / Meet</a:t>
+            </a:r>
+          </a:p>
+        </p:txBody>
+      </p:sp>
+      <p:sp>
+        <p:nvSpPr>
+          <p:cNvPr id="17" name="TextBox 16"/>
+          <p:cNvSpPr txBox="1"/>
+          <p:nvPr/>
+        </p:nvSpPr>
+        <p:spPr>
+          <a:xfrm>
+            <a:off x="4672584" y="4151376"/>
+            <a:ext cx="3017520" cy="457200"/>
+          </a:xfrm>
+          <a:prstGeom prst="rect">
+            <a:avLst/>
+          </a:prstGeom>
+          <a:noFill/>
+        </p:spPr>
+        <p:txBody>
+          <a:bodyPr wrap="square" anchor="t">
+            <a:spAutoFit/>
+          </a:bodyPr>
+          <a:lstStyle/>
+          <a:p>
+            <a:pPr algn="l">
+              <a:lnSpc>
+                <a:spcPct val="105000"/>
+              </a:lnSpc>
+              <a:spcBef>
+                <a:spcPts val="0"/>
+              </a:spcBef>
+              <a:spcAft>
+                <a:spcPts val="0"/>
+              </a:spcAft>
+            </a:pPr>
+            <a:r>
+              <a:rPr sz="1200" b="1">
+                <a:solidFill>
+                  <a:srgbClr val="C2410C"/>
+                </a:solidFill>
+                <a:latin typeface="Calibri"/>
+              </a:rPr>
+              <a:t>•  </a:t>
+            </a:r>
+            <a:r>
+              <a:rPr sz="1250" b="0">
+                <a:solidFill>
+                  <a:srgbClr val="5A616E"/>
+                </a:solidFill>
+                <a:latin typeface="Calibri"/>
+              </a:rPr>
+              <a:t>Native Gmail, Outlook, Calendar</a:t>
+            </a:r>
+          </a:p>
+        </p:txBody>
+      </p:sp>
+      <p:sp>
+        <p:nvSpPr>
+          <p:cNvPr id="18" name="Rounded Rectangle 17"/>
+          <p:cNvSpPr/>
+          <p:nvPr/>
+        </p:nvSpPr>
+        <p:spPr>
+          <a:xfrm>
+            <a:off x="8046720" y="2286000"/>
+            <a:ext cx="3429000" cy="2377440"/>
+          </a:xfrm>
+          <a:prstGeom prst="roundRect">
+            <a:avLst>
+              <a:gd name="adj" fmla="val 4500"/>
+            </a:avLst>
+          </a:prstGeom>
+          <a:solidFill>
+            <a:srgbClr val="FFFFFF"/>
+          </a:solidFill>
+          <a:ln w="12700">
+            <a:solidFill>
+              <a:srgbClr val="DEE1E7"/>
+            </a:solidFill>
+          </a:ln>
+          <a:effectLst/>
+        </p:spPr>
+        <p:style>
+          <a:lnRef idx="1">
+            <a:schemeClr val="accent1"/>
+          </a:lnRef>
+          <a:fillRef idx="3">
+            <a:schemeClr val="accent1"/>
+          </a:fillRef>
+          <a:effectRef idx="2">
+            <a:schemeClr val="accent1"/>
+          </a:effectRef>
+          <a:fontRef idx="minor">
+            <a:schemeClr val="lt1"/>
+          </a:fontRef>
+        </p:style>
+        <p:txBody>
+          <a:bodyPr rtlCol="0" anchor="ctr"/>
+          <a:lstStyle/>
+          <a:p>
+            <a:pPr algn="ctr"/>
+          </a:p>
+        </p:txBody>
+      </p:sp>
+      <p:sp>
+        <p:nvSpPr>
+          <p:cNvPr id="19" name="TextBox 18"/>
+          <p:cNvSpPr txBox="1"/>
+          <p:nvPr/>
+        </p:nvSpPr>
+        <p:spPr>
+          <a:xfrm>
+            <a:off x="8284464" y="2468880"/>
+            <a:ext cx="3017520" cy="320040"/>
+          </a:xfrm>
+          <a:prstGeom prst="rect">
+            <a:avLst/>
+          </a:prstGeom>
+          <a:noFill/>
+        </p:spPr>
+        <p:txBody>
+          <a:bodyPr wrap="square" anchor="t">
+            <a:spAutoFit/>
+          </a:bodyPr>
+          <a:lstStyle/>
+          <a:p>
+            <a:pPr algn="l">
+              <a:lnSpc>
+                <a:spcPct val="106000"/>
+              </a:lnSpc>
+              <a:spcBef>
+                <a:spcPts val="0"/>
+              </a:spcBef>
+              <a:spcAft>
+                <a:spcPts val="0"/>
+              </a:spcAft>
+            </a:pPr>
+            <a:r>
+              <a:rPr sz="1050" b="1">
+                <a:solidFill>
+                  <a:srgbClr val="C2410C"/>
+                </a:solidFill>
+                <a:latin typeface="Consolas"/>
+              </a:rPr>
+              <a:t>LATER · OWN THE OUTCOME</a:t>
+            </a:r>
+          </a:p>
+        </p:txBody>
+      </p:sp>
+      <p:sp>
+        <p:nvSpPr>
+          <p:cNvPr id="20" name="TextBox 19"/>
+          <p:cNvSpPr txBox="1"/>
+          <p:nvPr/>
+        </p:nvSpPr>
+        <p:spPr>
+          <a:xfrm>
+            <a:off x="8284464" y="2816352"/>
+            <a:ext cx="3017520" cy="411480"/>
+          </a:xfrm>
+          <a:prstGeom prst="rect">
+            <a:avLst/>
+          </a:prstGeom>
+          <a:noFill/>
+        </p:spPr>
+        <p:txBody>
+          <a:bodyPr wrap="square" anchor="t">
+            <a:spAutoFit/>
+          </a:bodyPr>
+          <a:lstStyle/>
+          <a:p>
+            <a:pPr algn="l">
+              <a:lnSpc>
+                <a:spcPct val="106000"/>
+              </a:lnSpc>
+              <a:spcBef>
+                <a:spcPts val="0"/>
+              </a:spcBef>
+              <a:spcAft>
+                <a:spcPts val="0"/>
+              </a:spcAft>
+            </a:pPr>
+            <a:r>
+              <a:rPr sz="1550" b="1">
+                <a:solidFill>
+                  <a:srgbClr val="16181F"/>
+                </a:solidFill>
+                <a:latin typeface="Calibri"/>
+              </a:rPr>
+              <a:t>Proactive follow-through</a:t>
+            </a:r>
+          </a:p>
+        </p:txBody>
+      </p:sp>
+      <p:sp>
+        <p:nvSpPr>
+          <p:cNvPr id="21" name="TextBox 20"/>
+          <p:cNvSpPr txBox="1"/>
+          <p:nvPr/>
+        </p:nvSpPr>
+        <p:spPr>
+          <a:xfrm>
+            <a:off x="8284464" y="3310128"/>
+            <a:ext cx="3017520" cy="457200"/>
+          </a:xfrm>
+          <a:prstGeom prst="rect">
+            <a:avLst/>
+          </a:prstGeom>
+          <a:noFill/>
+        </p:spPr>
+        <p:txBody>
+          <a:bodyPr wrap="square" anchor="t">
+            <a:spAutoFit/>
+          </a:bodyPr>
+          <a:lstStyle/>
+          <a:p>
+            <a:pPr algn="l">
+              <a:lnSpc>
+                <a:spcPct val="105000"/>
+              </a:lnSpc>
+              <a:spcBef>
+                <a:spcPts val="0"/>
+              </a:spcBef>
+              <a:spcAft>
+                <a:spcPts val="0"/>
+              </a:spcAft>
+            </a:pPr>
+            <a:r>
+              <a:rPr sz="1200" b="1">
+                <a:solidFill>
+                  <a:srgbClr val="C2410C"/>
+                </a:solidFill>
+                <a:latin typeface="Calibri"/>
+              </a:rPr>
+              <a:t>•  </a:t>
+            </a:r>
+            <a:r>
+              <a:rPr sz="1250" b="0">
+                <a:solidFill>
+                  <a:srgbClr val="5A616E"/>
+                </a:solidFill>
+                <a:latin typeface="Calibri"/>
+              </a:rPr>
+              <a:t>Persistence + team workspaces</a:t>
+            </a:r>
+          </a:p>
+        </p:txBody>
+      </p:sp>
+      <p:sp>
+        <p:nvSpPr>
+          <p:cNvPr id="22" name="TextBox 21"/>
+          <p:cNvSpPr txBox="1"/>
+          <p:nvPr/>
+        </p:nvSpPr>
+        <p:spPr>
+          <a:xfrm>
+            <a:off x="8284464" y="3730752"/>
+            <a:ext cx="3017520" cy="457200"/>
+          </a:xfrm>
+          <a:prstGeom prst="rect">
+            <a:avLst/>
+          </a:prstGeom>
+          <a:noFill/>
+        </p:spPr>
+        <p:txBody>
+          <a:bodyPr wrap="square" anchor="t">
+            <a:spAutoFit/>
+          </a:bodyPr>
+          <a:lstStyle/>
+          <a:p>
+            <a:pPr algn="l">
+              <a:lnSpc>
+                <a:spcPct val="105000"/>
+              </a:lnSpc>
+              <a:spcBef>
+                <a:spcPts val="0"/>
+              </a:spcBef>
+              <a:spcAft>
+                <a:spcPts val="0"/>
+              </a:spcAft>
+            </a:pPr>
+            <a:r>
+              <a:rPr sz="1200" b="1">
+                <a:solidFill>
+                  <a:srgbClr val="C2410C"/>
+                </a:solidFill>
+                <a:latin typeface="Calibri"/>
+              </a:rPr>
+              <a:t>•  </a:t>
+            </a:r>
+            <a:r>
+              <a:rPr sz="1250" b="0">
+                <a:solidFill>
+                  <a:srgbClr val="5A616E"/>
+                </a:solidFill>
+                <a:latin typeface="Calibri"/>
+              </a:rPr>
+              <a:t>Nudges: “did you ship X?”</a:t>
+            </a:r>
+          </a:p>
+        </p:txBody>
+      </p:sp>
+      <p:sp>
+        <p:nvSpPr>
+          <p:cNvPr id="23" name="TextBox 22"/>
+          <p:cNvSpPr txBox="1"/>
+          <p:nvPr/>
+        </p:nvSpPr>
+        <p:spPr>
+          <a:xfrm>
+            <a:off x="8284464" y="4151376"/>
+            <a:ext cx="3017520" cy="457200"/>
+          </a:xfrm>
+          <a:prstGeom prst="rect">
+            <a:avLst/>
+          </a:prstGeom>
+          <a:noFill/>
+        </p:spPr>
+        <p:txBody>
+          <a:bodyPr wrap="square" anchor="t">
+            <a:spAutoFit/>
+          </a:bodyPr>
+          <a:lstStyle/>
+          <a:p>
+            <a:pPr algn="l">
+              <a:lnSpc>
+                <a:spcPct val="105000"/>
+              </a:lnSpc>
+              <a:spcBef>
+                <a:spcPts val="0"/>
+              </a:spcBef>
+              <a:spcAft>
+                <a:spcPts val="0"/>
+              </a:spcAft>
+            </a:pPr>
+            <a:r>
+              <a:rPr sz="1200" b="1">
+                <a:solidFill>
+                  <a:srgbClr val="C2410C"/>
+                </a:solidFill>
+                <a:latin typeface="Calibri"/>
+              </a:rPr>
+              <a:t>•  </a:t>
+            </a:r>
+            <a:r>
+              <a:rPr sz="1250" b="0">
+                <a:solidFill>
+                  <a:srgbClr val="5A616E"/>
+                </a:solidFill>
+                <a:latin typeface="Calibri"/>
+              </a:rPr>
+              <a:t>Completion tracking → closes the loop</a:t>
+            </a:r>
+          </a:p>
+        </p:txBody>
+      </p:sp>
+      <p:sp>
+        <p:nvSpPr>
+          <p:cNvPr id="24" name="Rectangle 23"/>
+          <p:cNvSpPr/>
+          <p:nvPr/>
+        </p:nvSpPr>
+        <p:spPr>
+          <a:xfrm>
+            <a:off x="822960" y="4937760"/>
+            <a:ext cx="54864" cy="1005840"/>
+          </a:xfrm>
+          <a:prstGeom prst="rect">
+            <a:avLst/>
+          </a:prstGeom>
+          <a:solidFill>
+            <a:srgbClr val="C2410C"/>
+          </a:solidFill>
+          <a:ln>
+            <a:noFill/>
+          </a:ln>
+          <a:effectLst/>
+        </p:spPr>
+        <p:style>
+          <a:lnRef idx="1">
+            <a:schemeClr val="accent1"/>
+          </a:lnRef>
+          <a:fillRef idx="3">
+            <a:schemeClr val="accent1"/>
+          </a:fillRef>
+          <a:effectRef idx="2">
+            <a:schemeClr val="accent1"/>
+          </a:effectRef>
+          <a:fontRef idx="minor">
+            <a:schemeClr val="lt1"/>
+          </a:fontRef>
+        </p:style>
+        <p:txBody>
+          <a:bodyPr rtlCol="0" anchor="ctr"/>
+          <a:lstStyle/>
+          <a:p>
+            <a:pPr algn="ctr"/>
+          </a:p>
+        </p:txBody>
+      </p:sp>
+      <p:sp>
+        <p:nvSpPr>
+          <p:cNvPr id="25" name="TextBox 24"/>
+          <p:cNvSpPr txBox="1"/>
+          <p:nvPr/>
+        </p:nvSpPr>
+        <p:spPr>
+          <a:xfrm>
+            <a:off x="1097280" y="4992624"/>
+            <a:ext cx="10241280" cy="1005840"/>
+          </a:xfrm>
+          <a:prstGeom prst="rect">
+            <a:avLst/>
+          </a:prstGeom>
+          <a:noFill/>
+        </p:spPr>
+        <p:txBody>
+          <a:bodyPr wrap="square" anchor="t">
+            <a:spAutoFit/>
+          </a:bodyPr>
+          <a:lstStyle/>
+          <a:p>
+            <a:pPr algn="l">
+              <a:lnSpc>
+                <a:spcPct val="114000"/>
+              </a:lnSpc>
+              <a:spcBef>
+                <a:spcPts val="0"/>
+              </a:spcBef>
+              <a:spcAft>
+                <a:spcPts val="0"/>
+              </a:spcAft>
+            </a:pPr>
+            <a:r>
+              <a:rPr sz="1700" b="0">
+                <a:solidFill>
+                  <a:srgbClr val="16181F"/>
+                </a:solidFill>
+                <a:latin typeface="Calibri"/>
+              </a:rPr>
+              <a:t>Moat = the feedback loop. Accepted &amp; edited action items become proprietary training data → accuracy that compounds with usage.</a:t>
+            </a:r>
+          </a:p>
+        </p:txBody>
+      </p:sp>
+    </p:spTree>
+  </p:cSld>
+  <p:clrMapOvr>
+    <a:masterClrMapping/>
+  </p:clrMapOvr>
+</p:sld>
+</file>
+
+<file path=ppt/slides/slide12.xml><?xml version="1.0" encoding="utf-8"?>
+<p:sld xmlns:a="http://schemas.openxmlformats.org/drawingml/2006/main" xmlns:p="http://schemas.openxmlformats.org/presentationml/2006/main" xmlns:r="http://schemas.openxmlformats.org/officeDocument/2006/relationships">
+  <p:cSld>
+    <p:spTree>
+      <p:nvGrpSpPr>
+        <p:cNvPr id="1" name=""/>
+        <p:cNvGrpSpPr/>
+        <p:nvPr/>
+      </p:nvGrpSpPr>
+      <p:grpSpPr/>
+      <p:sp>
+        <p:nvSpPr>
+          <p:cNvPr id="2" name="Rectangle 1"/>
+          <p:cNvSpPr/>
+          <p:nvPr/>
+        </p:nvSpPr>
+        <p:spPr>
+          <a:xfrm>
+            <a:off x="0" y="0"/>
+            <a:ext cx="12191695" cy="6858000"/>
+          </a:xfrm>
+          <a:prstGeom prst="rect">
+            <a:avLst/>
+          </a:prstGeom>
+          <a:solidFill>
+            <a:srgbClr val="FBFBFC"/>
+          </a:solidFill>
+          <a:ln>
+            <a:noFill/>
+          </a:ln>
+          <a:effectLst/>
+        </p:spPr>
+        <p:style>
+          <a:lnRef idx="1">
+            <a:schemeClr val="accent1"/>
+          </a:lnRef>
+          <a:fillRef idx="3">
+            <a:schemeClr val="accent1"/>
+          </a:fillRef>
+          <a:effectRef idx="2">
+            <a:schemeClr val="accent1"/>
+          </a:effectRef>
+          <a:fontRef idx="minor">
+            <a:schemeClr val="lt1"/>
+          </a:fontRef>
+        </p:style>
+        <p:txBody>
+          <a:bodyPr rtlCol="0" anchor="ctr"/>
+          <a:lstStyle/>
+          <a:p>
+            <a:pPr algn="ctr"/>
+          </a:p>
+        </p:txBody>
+      </p:sp>
+      <p:sp>
+        <p:nvSpPr>
+          <p:cNvPr id="3" name="Rectangle 2"/>
+          <p:cNvSpPr/>
+          <p:nvPr/>
+        </p:nvSpPr>
+        <p:spPr>
+          <a:xfrm>
+            <a:off x="0" y="0"/>
+            <a:ext cx="12191695" cy="82296"/>
+          </a:xfrm>
+          <a:prstGeom prst="rect">
+            <a:avLst/>
+          </a:prstGeom>
+          <a:solidFill>
+            <a:srgbClr val="C2410C"/>
+          </a:solidFill>
+          <a:ln>
+            <a:noFill/>
+          </a:ln>
+          <a:effectLst/>
+        </p:spPr>
+        <p:style>
+          <a:lnRef idx="1">
+            <a:schemeClr val="accent1"/>
+          </a:lnRef>
+          <a:fillRef idx="3">
+            <a:schemeClr val="accent1"/>
+          </a:fillRef>
+          <a:effectRef idx="2">
+            <a:schemeClr val="accent1"/>
+          </a:effectRef>
+          <a:fontRef idx="minor">
+            <a:schemeClr val="lt1"/>
+          </a:fontRef>
+        </p:style>
+        <p:txBody>
+          <a:bodyPr rtlCol="0" anchor="ctr"/>
+          <a:lstStyle/>
+          <a:p>
+            <a:pPr algn="ctr"/>
+          </a:p>
+        </p:txBody>
+      </p:sp>
+      <p:sp>
+        <p:nvSpPr>
+          <p:cNvPr id="4" name="TextBox 3"/>
+          <p:cNvSpPr txBox="1"/>
+          <p:nvPr/>
+        </p:nvSpPr>
+        <p:spPr>
+          <a:xfrm>
+            <a:off x="822960" y="566928"/>
+            <a:ext cx="10515600" cy="365760"/>
+          </a:xfrm>
+          <a:prstGeom prst="rect">
+            <a:avLst/>
+          </a:prstGeom>
+          <a:noFill/>
+        </p:spPr>
+        <p:txBody>
+          <a:bodyPr wrap="square" anchor="t">
+            <a:spAutoFit/>
+          </a:bodyPr>
+          <a:lstStyle/>
+          <a:p>
+            <a:pPr algn="l">
+              <a:lnSpc>
+                <a:spcPct val="106000"/>
+              </a:lnSpc>
+              <a:spcBef>
+                <a:spcPts val="0"/>
+              </a:spcBef>
+              <a:spcAft>
+                <a:spcPts val="0"/>
+              </a:spcAft>
+            </a:pPr>
+            <a:r>
+              <a:rPr sz="1250" b="1">
+                <a:solidFill>
+                  <a:srgbClr val="C2410C"/>
+                </a:solidFill>
+                <a:latin typeface="Consolas"/>
+              </a:rPr>
               <a:t>10 · WHY THIS MATTERS FOR THE ROLE</a:t>
             </a:r>
           </a:p>
@@ -5707,7 +6501,7 @@
                 </a:solidFill>
                 <a:latin typeface="Calibri"/>
               </a:rPr>
-              <a:t>of action items agreed in a meeting are forgotten within a week — they live in someone's notes, a Slack thread, a doc nobody reopens.</a:t>
+              <a:t>of meeting action items are never completed — they live in someone's notes, a Slack thread, a doc nobody reopens.</a:t>
             </a:r>
           </a:p>
         </p:txBody>
@@ -6022,7 +6816,7 @@
                 </a:solidFill>
                 <a:latin typeface="Calibri"/>
               </a:rPr>
-              <a:t>The 70% figure is directional — it drives the hypothesis, not proven. First PM job: validate with user research + instrumentation before over-investing.</a:t>
+              <a:t>Industry estimates range ~44–73% never completed (Fellow, Streamli9). Directional — as PM, first job is to validate with first-party instrumentation before over-investing.</a:t>
             </a:r>
           </a:p>
         </p:txBody>
@@ -7685,7 +8479,7 @@
                 </a:solidFill>
                 <a:latin typeface="Consolas"/>
               </a:rPr>
-              <a:t>04 · THE AI UNDER THE HOOD</a:t>
+              <a:t>—  SEE IT WORK</a:t>
             </a:r>
           </a:p>
         </p:txBody>
@@ -7724,99 +8518,56 @@
               </a:spcAft>
             </a:pPr>
             <a:r>
-              <a:rPr sz="3300" b="1">
+              <a:rPr sz="2800" b="1">
                 <a:solidFill>
                   <a:srgbClr val="16181F"/>
                 </a:solidFill>
                 <a:latin typeface="Calibri"/>
               </a:rPr>
-              <a:t>Reliable structure out of an unreliable medium.</a:t>
-            </a:r>
-          </a:p>
-        </p:txBody>
-      </p:sp>
-      <p:sp>
-        <p:nvSpPr>
-          <p:cNvPr id="6" name="TextBox 5"/>
-          <p:cNvSpPr txBox="1"/>
-          <p:nvPr/>
-        </p:nvSpPr>
-        <p:spPr>
-          <a:xfrm>
-            <a:off x="822960" y="2148840"/>
-            <a:ext cx="10515600" cy="457200"/>
-          </a:xfrm>
-          <a:prstGeom prst="rect">
-            <a:avLst/>
-          </a:prstGeom>
-          <a:noFill/>
-        </p:spPr>
-        <p:txBody>
-          <a:bodyPr wrap="square" anchor="t">
-            <a:spAutoFit/>
-          </a:bodyPr>
-          <a:lstStyle/>
-          <a:p>
-            <a:pPr algn="l">
-              <a:lnSpc>
-                <a:spcPct val="106000"/>
-              </a:lnSpc>
-              <a:spcBef>
-                <a:spcPts val="0"/>
-              </a:spcBef>
-              <a:spcAft>
-                <a:spcPts val="0"/>
-              </a:spcAft>
-            </a:pPr>
-            <a:r>
-              <a:rPr sz="1300" b="0">
-                <a:solidFill>
-                  <a:srgbClr val="5A616E"/>
-                </a:solidFill>
-                <a:latin typeface="Consolas"/>
-              </a:rPr>
-              <a:t>transcript  →  </a:t>
-            </a:r>
-            <a:r>
-              <a:rPr sz="1300" b="1">
-                <a:solidFill>
-                  <a:srgbClr val="C2410C"/>
-                </a:solidFill>
-                <a:latin typeface="Consolas"/>
-              </a:rPr>
-              <a:t>LLM · JSON mode</a:t>
-            </a:r>
-            <a:r>
-              <a:rPr sz="1300" b="0">
-                <a:solidFill>
-                  <a:srgbClr val="5A616E"/>
-                </a:solidFill>
-                <a:latin typeface="Consolas"/>
-              </a:rPr>
-              <a:t>  →  schema-validated JSON  →  board + prefilled links</a:t>
-            </a:r>
-          </a:p>
-        </p:txBody>
-      </p:sp>
-      <p:sp>
-        <p:nvSpPr>
-          <p:cNvPr id="7" name="Rounded Rectangle 6"/>
+              <a:t>Paste a transcript → the board writes itself.</a:t>
+            </a:r>
+          </a:p>
+        </p:txBody>
+      </p:sp>
+      <p:pic>
+        <p:nvPicPr>
+          <p:cNvPr id="6" name="Picture 5" descr="postmeet-screenshot.png"/>
+          <p:cNvPicPr>
+            <a:picLocks noChangeAspect="1"/>
+          </p:cNvPicPr>
+          <p:nvPr/>
+        </p:nvPicPr>
+        <p:blipFill>
+          <a:blip r:embed="rId2"/>
+          <a:stretch>
+            <a:fillRect/>
+          </a:stretch>
+        </p:blipFill>
+        <p:spPr>
+          <a:xfrm>
+            <a:off x="3013488" y="1645920"/>
+            <a:ext cx="6164719" cy="4709160"/>
+          </a:xfrm>
+          <a:prstGeom prst="rect">
+            <a:avLst/>
+          </a:prstGeom>
+        </p:spPr>
+      </p:pic>
+      <p:sp>
+        <p:nvSpPr>
+          <p:cNvPr id="7" name="Rectangle 6"/>
           <p:cNvSpPr/>
           <p:nvPr/>
         </p:nvSpPr>
         <p:spPr>
           <a:xfrm>
-            <a:off x="822960" y="2880360"/>
-            <a:ext cx="3429000" cy="2377440"/>
-          </a:xfrm>
-          <a:prstGeom prst="roundRect">
-            <a:avLst>
-              <a:gd name="adj" fmla="val 4500"/>
-            </a:avLst>
-          </a:prstGeom>
-          <a:solidFill>
-            <a:srgbClr val="FFFFFF"/>
-          </a:solidFill>
+            <a:off x="3013488" y="1645920"/>
+            <a:ext cx="6164718" cy="4709160"/>
+          </a:xfrm>
+          <a:prstGeom prst="rect">
+            <a:avLst/>
+          </a:prstGeom>
+          <a:noFill/>
           <a:ln w="12700">
             <a:solidFill>
               <a:srgbClr val="DEE1E7"/>
@@ -7854,8 +8605,8 @@
         </p:nvSpPr>
         <p:spPr>
           <a:xfrm>
-            <a:off x="1078992" y="3108960"/>
-            <a:ext cx="2971800" cy="457200"/>
+            <a:off x="822960" y="6419088"/>
+            <a:ext cx="10515600" cy="320040"/>
           </a:xfrm>
           <a:prstGeom prst="rect">
             <a:avLst/>
@@ -7880,334 +8631,13 @@
               </a:spcAft>
             </a:pPr>
             <a:r>
-              <a:rPr sz="1650" b="1">
-                <a:solidFill>
-                  <a:srgbClr val="16181F"/>
+              <a:rPr sz="1050" b="0">
+                <a:solidFill>
+                  <a:srgbClr val="8B919D"/>
                 </a:solidFill>
                 <a:latin typeface="Calibri"/>
               </a:rPr>
-              <a:t>Structured output</a:t>
-            </a:r>
-          </a:p>
-        </p:txBody>
-      </p:sp>
-      <p:sp>
-        <p:nvSpPr>
-          <p:cNvPr id="9" name="TextBox 8"/>
-          <p:cNvSpPr txBox="1"/>
-          <p:nvPr/>
-        </p:nvSpPr>
-        <p:spPr>
-          <a:xfrm>
-            <a:off x="1078992" y="3657600"/>
-            <a:ext cx="2971800" cy="1463040"/>
-          </a:xfrm>
-          <a:prstGeom prst="rect">
-            <a:avLst/>
-          </a:prstGeom>
-          <a:noFill/>
-        </p:spPr>
-        <p:txBody>
-          <a:bodyPr wrap="square" anchor="t">
-            <a:spAutoFit/>
-          </a:bodyPr>
-          <a:lstStyle/>
-          <a:p>
-            <a:pPr algn="l">
-              <a:lnSpc>
-                <a:spcPct val="114000"/>
-              </a:lnSpc>
-              <a:spcBef>
-                <a:spcPts val="0"/>
-              </a:spcBef>
-              <a:spcAft>
-                <a:spcPts val="0"/>
-              </a:spcAft>
-            </a:pPr>
-            <a:r>
-              <a:rPr sz="1300" b="0">
-                <a:solidFill>
-                  <a:srgbClr val="5A616E"/>
-                </a:solidFill>
-                <a:latin typeface="Calibri"/>
-              </a:rPr>
-              <a:t>A fixed JSON contract (summary / decisions / action items), pinned in the system prompt and decoded by a tolerant parser. One call, no retry loop.</a:t>
-            </a:r>
-          </a:p>
-        </p:txBody>
-      </p:sp>
-      <p:sp>
-        <p:nvSpPr>
-          <p:cNvPr id="10" name="Rounded Rectangle 9"/>
-          <p:cNvSpPr/>
-          <p:nvPr/>
-        </p:nvSpPr>
-        <p:spPr>
-          <a:xfrm>
-            <a:off x="4434840" y="2880360"/>
-            <a:ext cx="3429000" cy="2377440"/>
-          </a:xfrm>
-          <a:prstGeom prst="roundRect">
-            <a:avLst>
-              <a:gd name="adj" fmla="val 4500"/>
-            </a:avLst>
-          </a:prstGeom>
-          <a:solidFill>
-            <a:srgbClr val="FFFFFF"/>
-          </a:solidFill>
-          <a:ln w="12700">
-            <a:solidFill>
-              <a:srgbClr val="DEE1E7"/>
-            </a:solidFill>
-          </a:ln>
-          <a:effectLst/>
-        </p:spPr>
-        <p:style>
-          <a:lnRef idx="1">
-            <a:schemeClr val="accent1"/>
-          </a:lnRef>
-          <a:fillRef idx="3">
-            <a:schemeClr val="accent1"/>
-          </a:fillRef>
-          <a:effectRef idx="2">
-            <a:schemeClr val="accent1"/>
-          </a:effectRef>
-          <a:fontRef idx="minor">
-            <a:schemeClr val="lt1"/>
-          </a:fontRef>
-        </p:style>
-        <p:txBody>
-          <a:bodyPr rtlCol="0" anchor="ctr"/>
-          <a:lstStyle/>
-          <a:p>
-            <a:pPr algn="ctr"/>
-          </a:p>
-        </p:txBody>
-      </p:sp>
-      <p:sp>
-        <p:nvSpPr>
-          <p:cNvPr id="11" name="TextBox 10"/>
-          <p:cNvSpPr txBox="1"/>
-          <p:nvPr/>
-        </p:nvSpPr>
-        <p:spPr>
-          <a:xfrm>
-            <a:off x="4690872" y="3108960"/>
-            <a:ext cx="2971800" cy="457200"/>
-          </a:xfrm>
-          <a:prstGeom prst="rect">
-            <a:avLst/>
-          </a:prstGeom>
-          <a:noFill/>
-        </p:spPr>
-        <p:txBody>
-          <a:bodyPr wrap="square" anchor="t">
-            <a:spAutoFit/>
-          </a:bodyPr>
-          <a:lstStyle/>
-          <a:p>
-            <a:pPr algn="l">
-              <a:lnSpc>
-                <a:spcPct val="106000"/>
-              </a:lnSpc>
-              <a:spcBef>
-                <a:spcPts val="0"/>
-              </a:spcBef>
-              <a:spcAft>
-                <a:spcPts val="0"/>
-              </a:spcAft>
-            </a:pPr>
-            <a:r>
-              <a:rPr sz="1650" b="1">
-                <a:solidFill>
-                  <a:srgbClr val="16181F"/>
-                </a:solidFill>
-                <a:latin typeface="Calibri"/>
-              </a:rPr>
-              <a:t>Guardrails</a:t>
-            </a:r>
-          </a:p>
-        </p:txBody>
-      </p:sp>
-      <p:sp>
-        <p:nvSpPr>
-          <p:cNvPr id="12" name="TextBox 11"/>
-          <p:cNvSpPr txBox="1"/>
-          <p:nvPr/>
-        </p:nvSpPr>
-        <p:spPr>
-          <a:xfrm>
-            <a:off x="4690872" y="3657600"/>
-            <a:ext cx="2971800" cy="1463040"/>
-          </a:xfrm>
-          <a:prstGeom prst="rect">
-            <a:avLst/>
-          </a:prstGeom>
-          <a:noFill/>
-        </p:spPr>
-        <p:txBody>
-          <a:bodyPr wrap="square" anchor="t">
-            <a:spAutoFit/>
-          </a:bodyPr>
-          <a:lstStyle/>
-          <a:p>
-            <a:pPr algn="l">
-              <a:lnSpc>
-                <a:spcPct val="114000"/>
-              </a:lnSpc>
-              <a:spcBef>
-                <a:spcPts val="0"/>
-              </a:spcBef>
-              <a:spcAft>
-                <a:spcPts val="0"/>
-              </a:spcAft>
-            </a:pPr>
-            <a:r>
-              <a:rPr sz="1300" b="0">
-                <a:solidFill>
-                  <a:srgbClr val="5A616E"/>
-                </a:solidFill>
-                <a:latin typeface="Calibri"/>
-              </a:rPr>
-              <a:t>Extracts only explicit commitments — no invented tasks. Empty fields when data is absent. The difference between useful and hallucinated.</a:t>
-            </a:r>
-          </a:p>
-        </p:txBody>
-      </p:sp>
-      <p:sp>
-        <p:nvSpPr>
-          <p:cNvPr id="13" name="Rounded Rectangle 12"/>
-          <p:cNvSpPr/>
-          <p:nvPr/>
-        </p:nvSpPr>
-        <p:spPr>
-          <a:xfrm>
-            <a:off x="8046720" y="2880360"/>
-            <a:ext cx="3429000" cy="2377440"/>
-          </a:xfrm>
-          <a:prstGeom prst="roundRect">
-            <a:avLst>
-              <a:gd name="adj" fmla="val 4500"/>
-            </a:avLst>
-          </a:prstGeom>
-          <a:solidFill>
-            <a:srgbClr val="FFFFFF"/>
-          </a:solidFill>
-          <a:ln w="12700">
-            <a:solidFill>
-              <a:srgbClr val="DEE1E7"/>
-            </a:solidFill>
-          </a:ln>
-          <a:effectLst/>
-        </p:spPr>
-        <p:style>
-          <a:lnRef idx="1">
-            <a:schemeClr val="accent1"/>
-          </a:lnRef>
-          <a:fillRef idx="3">
-            <a:schemeClr val="accent1"/>
-          </a:fillRef>
-          <a:effectRef idx="2">
-            <a:schemeClr val="accent1"/>
-          </a:effectRef>
-          <a:fontRef idx="minor">
-            <a:schemeClr val="lt1"/>
-          </a:fontRef>
-        </p:style>
-        <p:txBody>
-          <a:bodyPr rtlCol="0" anchor="ctr"/>
-          <a:lstStyle/>
-          <a:p>
-            <a:pPr algn="ctr"/>
-          </a:p>
-        </p:txBody>
-      </p:sp>
-      <p:sp>
-        <p:nvSpPr>
-          <p:cNvPr id="14" name="TextBox 13"/>
-          <p:cNvSpPr txBox="1"/>
-          <p:nvPr/>
-        </p:nvSpPr>
-        <p:spPr>
-          <a:xfrm>
-            <a:off x="8302752" y="3108960"/>
-            <a:ext cx="2971800" cy="457200"/>
-          </a:xfrm>
-          <a:prstGeom prst="rect">
-            <a:avLst/>
-          </a:prstGeom>
-          <a:noFill/>
-        </p:spPr>
-        <p:txBody>
-          <a:bodyPr wrap="square" anchor="t">
-            <a:spAutoFit/>
-          </a:bodyPr>
-          <a:lstStyle/>
-          <a:p>
-            <a:pPr algn="l">
-              <a:lnSpc>
-                <a:spcPct val="106000"/>
-              </a:lnSpc>
-              <a:spcBef>
-                <a:spcPts val="0"/>
-              </a:spcBef>
-              <a:spcAft>
-                <a:spcPts val="0"/>
-              </a:spcAft>
-            </a:pPr>
-            <a:r>
-              <a:rPr sz="1650" b="1">
-                <a:solidFill>
-                  <a:srgbClr val="16181F"/>
-                </a:solidFill>
-                <a:latin typeface="Calibri"/>
-              </a:rPr>
-              <a:t>Graceful degradation</a:t>
-            </a:r>
-          </a:p>
-        </p:txBody>
-      </p:sp>
-      <p:sp>
-        <p:nvSpPr>
-          <p:cNvPr id="15" name="TextBox 14"/>
-          <p:cNvSpPr txBox="1"/>
-          <p:nvPr/>
-        </p:nvSpPr>
-        <p:spPr>
-          <a:xfrm>
-            <a:off x="8302752" y="3657600"/>
-            <a:ext cx="2971800" cy="1463040"/>
-          </a:xfrm>
-          <a:prstGeom prst="rect">
-            <a:avLst/>
-          </a:prstGeom>
-          <a:noFill/>
-        </p:spPr>
-        <p:txBody>
-          <a:bodyPr wrap="square" anchor="t">
-            <a:spAutoFit/>
-          </a:bodyPr>
-          <a:lstStyle/>
-          <a:p>
-            <a:pPr algn="l">
-              <a:lnSpc>
-                <a:spcPct val="114000"/>
-              </a:lnSpc>
-              <a:spcBef>
-                <a:spcPts val="0"/>
-              </a:spcBef>
-              <a:spcAft>
-                <a:spcPts val="0"/>
-              </a:spcAft>
-            </a:pPr>
-            <a:r>
-              <a:rPr sz="1300" b="0">
-                <a:solidFill>
-                  <a:srgbClr val="5A616E"/>
-                </a:solidFill>
-                <a:latin typeface="Calibri"/>
-              </a:rPr>
-              <a:t>A model fallback chain: if the primary is cold or errors, it drops to a backup so the request still succeeds.</a:t>
+              <a:t>Real output from the live app — extracted in ~2.8s: summary, decisions, and one column per owner, each card one click from a prefilled Calendar event or Gmail draft.</a:t>
             </a:r>
           </a:p>
         </p:txBody>
@@ -8358,7 +8788,7 @@
                 </a:solidFill>
                 <a:latin typeface="Consolas"/>
               </a:rPr>
-              <a:t>05 · THE DEFINING DECISION</a:t>
+              <a:t>04 · THE AI UNDER THE HOOD</a:t>
             </a:r>
           </a:p>
         </p:txBody>
@@ -8403,21 +8833,84 @@
                 </a:solidFill>
                 <a:latin typeface="Calibri"/>
               </a:rPr>
-              <a:t>I shipped the smaller model on purpose.</a:t>
-            </a:r>
-          </a:p>
-        </p:txBody>
-      </p:sp>
-      <p:sp>
-        <p:nvSpPr>
-          <p:cNvPr id="6" name="Rounded Rectangle 5"/>
+              <a:t>Reliable structure out of an unreliable medium.</a:t>
+            </a:r>
+          </a:p>
+        </p:txBody>
+      </p:sp>
+      <p:sp>
+        <p:nvSpPr>
+          <p:cNvPr id="6" name="TextBox 5"/>
+          <p:cNvSpPr txBox="1"/>
+          <p:nvPr/>
+        </p:nvSpPr>
+        <p:spPr>
+          <a:xfrm>
+            <a:off x="822960" y="2148840"/>
+            <a:ext cx="10515600" cy="457200"/>
+          </a:xfrm>
+          <a:prstGeom prst="rect">
+            <a:avLst/>
+          </a:prstGeom>
+          <a:noFill/>
+        </p:spPr>
+        <p:txBody>
+          <a:bodyPr wrap="square" anchor="t">
+            <a:spAutoFit/>
+          </a:bodyPr>
+          <a:lstStyle/>
+          <a:p>
+            <a:pPr algn="l">
+              <a:lnSpc>
+                <a:spcPct val="106000"/>
+              </a:lnSpc>
+              <a:spcBef>
+                <a:spcPts val="0"/>
+              </a:spcBef>
+              <a:spcAft>
+                <a:spcPts val="0"/>
+              </a:spcAft>
+            </a:pPr>
+            <a:r>
+              <a:rPr sz="1300" b="0">
+                <a:solidFill>
+                  <a:srgbClr val="5A616E"/>
+                </a:solidFill>
+                <a:latin typeface="Consolas"/>
+              </a:rPr>
+              <a:t>transcript  →  </a:t>
+            </a:r>
+            <a:r>
+              <a:rPr sz="1300" b="1">
+                <a:solidFill>
+                  <a:srgbClr val="C2410C"/>
+                </a:solidFill>
+                <a:latin typeface="Consolas"/>
+              </a:rPr>
+              <a:t>LLM · JSON mode</a:t>
+            </a:r>
+            <a:r>
+              <a:rPr sz="1300" b="0">
+                <a:solidFill>
+                  <a:srgbClr val="5A616E"/>
+                </a:solidFill>
+                <a:latin typeface="Consolas"/>
+              </a:rPr>
+              <a:t>  →  schema-validated JSON  →  board + prefilled links</a:t>
+            </a:r>
+          </a:p>
+        </p:txBody>
+      </p:sp>
+      <p:sp>
+        <p:nvSpPr>
+          <p:cNvPr id="7" name="Rounded Rectangle 6"/>
           <p:cNvSpPr/>
           <p:nvPr/>
         </p:nvSpPr>
         <p:spPr>
           <a:xfrm>
-            <a:off x="822960" y="2194560"/>
-            <a:ext cx="5120640" cy="1965960"/>
+            <a:off x="822960" y="2880360"/>
+            <a:ext cx="3429000" cy="2377440"/>
           </a:xfrm>
           <a:prstGeom prst="roundRect">
             <a:avLst>
@@ -8458,14 +8951,14 @@
       </p:sp>
       <p:sp>
         <p:nvSpPr>
-          <p:cNvPr id="7" name="TextBox 6"/>
-          <p:cNvSpPr txBox="1"/>
-          <p:nvPr/>
-        </p:nvSpPr>
-        <p:spPr>
-          <a:xfrm>
-            <a:off x="1097280" y="2377440"/>
-            <a:ext cx="4572000" cy="320040"/>
+          <p:cNvPr id="8" name="TextBox 7"/>
+          <p:cNvSpPr txBox="1"/>
+          <p:nvPr/>
+        </p:nvSpPr>
+        <p:spPr>
+          <a:xfrm>
+            <a:off x="1078992" y="3108960"/>
+            <a:ext cx="2971800" cy="457200"/>
           </a:xfrm>
           <a:prstGeom prst="rect">
             <a:avLst/>
@@ -8490,58 +8983,13 @@
               </a:spcAft>
             </a:pPr>
             <a:r>
-              <a:rPr sz="1050" b="1">
-                <a:solidFill>
-                  <a:srgbClr val="8B919D"/>
-                </a:solidFill>
-                <a:latin typeface="Consolas"/>
-              </a:rPr>
-              <a:t>REJECTED AS PRIMARY</a:t>
-            </a:r>
-          </a:p>
-        </p:txBody>
-      </p:sp>
-      <p:sp>
-        <p:nvSpPr>
-          <p:cNvPr id="8" name="TextBox 7"/>
-          <p:cNvSpPr txBox="1"/>
-          <p:nvPr/>
-        </p:nvSpPr>
-        <p:spPr>
-          <a:xfrm>
-            <a:off x="1097280" y="2724912"/>
-            <a:ext cx="4572000" cy="457200"/>
-          </a:xfrm>
-          <a:prstGeom prst="rect">
-            <a:avLst/>
-          </a:prstGeom>
-          <a:noFill/>
-        </p:spPr>
-        <p:txBody>
-          <a:bodyPr wrap="square" anchor="t">
-            <a:spAutoFit/>
-          </a:bodyPr>
-          <a:lstStyle/>
-          <a:p>
-            <a:pPr algn="l">
-              <a:lnSpc>
-                <a:spcPct val="106000"/>
-              </a:lnSpc>
-              <a:spcBef>
-                <a:spcPts val="0"/>
-              </a:spcBef>
-              <a:spcAft>
-                <a:spcPts val="0"/>
-              </a:spcAft>
-            </a:pPr>
-            <a:r>
-              <a:rPr sz="2000" b="1">
+              <a:rPr sz="1650" b="1">
                 <a:solidFill>
                   <a:srgbClr val="16181F"/>
                 </a:solidFill>
-                <a:latin typeface="Consolas"/>
-              </a:rPr>
-              <a:t>Llama 3.1 70B</a:t>
+                <a:latin typeface="Calibri"/>
+              </a:rPr>
+              <a:t>Structured output</a:t>
             </a:r>
           </a:p>
         </p:txBody>
@@ -8554,278 +9002,53 @@
         </p:nvSpPr>
         <p:spPr>
           <a:xfrm>
-            <a:off x="1097280" y="3291840"/>
-            <a:ext cx="1463040" cy="320040"/>
-          </a:xfrm>
-          <a:prstGeom prst="rect">
-            <a:avLst/>
-          </a:prstGeom>
-          <a:noFill/>
-        </p:spPr>
-        <p:txBody>
-          <a:bodyPr wrap="square" anchor="t">
-            <a:spAutoFit/>
-          </a:bodyPr>
-          <a:lstStyle/>
-          <a:p>
-            <a:pPr algn="l">
-              <a:lnSpc>
-                <a:spcPct val="106000"/>
-              </a:lnSpc>
-              <a:spcBef>
-                <a:spcPts val="0"/>
-              </a:spcBef>
-              <a:spcAft>
-                <a:spcPts val="0"/>
-              </a:spcAft>
-            </a:pPr>
-            <a:r>
-              <a:rPr sz="1150" b="0">
-                <a:solidFill>
-                  <a:srgbClr val="8B919D"/>
-                </a:solidFill>
-                <a:latin typeface="Consolas"/>
-              </a:rPr>
-              <a:t>latency</a:t>
-            </a:r>
-          </a:p>
-        </p:txBody>
-      </p:sp>
-      <p:sp>
-        <p:nvSpPr>
-          <p:cNvPr id="10" name="TextBox 9"/>
-          <p:cNvSpPr txBox="1"/>
-          <p:nvPr/>
-        </p:nvSpPr>
-        <p:spPr>
-          <a:xfrm>
-            <a:off x="2560320" y="3291840"/>
-            <a:ext cx="3108960" cy="320040"/>
-          </a:xfrm>
-          <a:prstGeom prst="rect">
-            <a:avLst/>
-          </a:prstGeom>
-          <a:noFill/>
-        </p:spPr>
-        <p:txBody>
-          <a:bodyPr wrap="square" anchor="t">
-            <a:spAutoFit/>
-          </a:bodyPr>
-          <a:lstStyle/>
-          <a:p>
-            <a:pPr algn="r">
-              <a:lnSpc>
-                <a:spcPct val="106000"/>
-              </a:lnSpc>
-              <a:spcBef>
-                <a:spcPts val="0"/>
-              </a:spcBef>
-              <a:spcAft>
-                <a:spcPts val="0"/>
-              </a:spcAft>
-            </a:pPr>
-            <a:r>
-              <a:rPr sz="1300" b="1">
-                <a:solidFill>
-                  <a:srgbClr val="16181F"/>
+            <a:off x="1078992" y="3657600"/>
+            <a:ext cx="2971800" cy="1463040"/>
+          </a:xfrm>
+          <a:prstGeom prst="rect">
+            <a:avLst/>
+          </a:prstGeom>
+          <a:noFill/>
+        </p:spPr>
+        <p:txBody>
+          <a:bodyPr wrap="square" anchor="t">
+            <a:spAutoFit/>
+          </a:bodyPr>
+          <a:lstStyle/>
+          <a:p>
+            <a:pPr algn="l">
+              <a:lnSpc>
+                <a:spcPct val="114000"/>
+              </a:lnSpc>
+              <a:spcBef>
+                <a:spcPts val="0"/>
+              </a:spcBef>
+              <a:spcAft>
+                <a:spcPts val="0"/>
+              </a:spcAft>
+            </a:pPr>
+            <a:r>
+              <a:rPr sz="1300" b="0">
+                <a:solidFill>
+                  <a:srgbClr val="5A616E"/>
                 </a:solidFill>
                 <a:latin typeface="Calibri"/>
               </a:rPr>
-              <a:t>9s–46s, inconsistent</a:t>
-            </a:r>
-          </a:p>
-        </p:txBody>
-      </p:sp>
-      <p:sp>
-        <p:nvSpPr>
-          <p:cNvPr id="11" name="TextBox 10"/>
-          <p:cNvSpPr txBox="1"/>
-          <p:nvPr/>
-        </p:nvSpPr>
-        <p:spPr>
-          <a:xfrm>
-            <a:off x="1097280" y="3602736"/>
-            <a:ext cx="1463040" cy="320040"/>
-          </a:xfrm>
-          <a:prstGeom prst="rect">
-            <a:avLst/>
-          </a:prstGeom>
-          <a:noFill/>
-        </p:spPr>
-        <p:txBody>
-          <a:bodyPr wrap="square" anchor="t">
-            <a:spAutoFit/>
-          </a:bodyPr>
-          <a:lstStyle/>
-          <a:p>
-            <a:pPr algn="l">
-              <a:lnSpc>
-                <a:spcPct val="106000"/>
-              </a:lnSpc>
-              <a:spcBef>
-                <a:spcPts val="0"/>
-              </a:spcBef>
-              <a:spcAft>
-                <a:spcPts val="0"/>
-              </a:spcAft>
-            </a:pPr>
-            <a:r>
-              <a:rPr sz="1150" b="0">
-                <a:solidFill>
-                  <a:srgbClr val="8B919D"/>
-                </a:solidFill>
-                <a:latin typeface="Consolas"/>
-              </a:rPr>
-              <a:t>reliability</a:t>
-            </a:r>
-          </a:p>
-        </p:txBody>
-      </p:sp>
-      <p:sp>
-        <p:nvSpPr>
-          <p:cNvPr id="12" name="TextBox 11"/>
-          <p:cNvSpPr txBox="1"/>
-          <p:nvPr/>
-        </p:nvSpPr>
-        <p:spPr>
-          <a:xfrm>
-            <a:off x="2560320" y="3602736"/>
-            <a:ext cx="3108960" cy="320040"/>
-          </a:xfrm>
-          <a:prstGeom prst="rect">
-            <a:avLst/>
-          </a:prstGeom>
-          <a:noFill/>
-        </p:spPr>
-        <p:txBody>
-          <a:bodyPr wrap="square" anchor="t">
-            <a:spAutoFit/>
-          </a:bodyPr>
-          <a:lstStyle/>
-          <a:p>
-            <a:pPr algn="r">
-              <a:lnSpc>
-                <a:spcPct val="106000"/>
-              </a:lnSpc>
-              <a:spcBef>
-                <a:spcPts val="0"/>
-              </a:spcBef>
-              <a:spcAft>
-                <a:spcPts val="0"/>
-              </a:spcAft>
-            </a:pPr>
-            <a:r>
-              <a:rPr sz="1300" b="1">
-                <a:solidFill>
-                  <a:srgbClr val="16181F"/>
-                </a:solidFill>
-                <a:latin typeface="Calibri"/>
-              </a:rPr>
-              <a:t>cold-starts, timeouts</a:t>
-            </a:r>
-          </a:p>
-        </p:txBody>
-      </p:sp>
-      <p:sp>
-        <p:nvSpPr>
-          <p:cNvPr id="13" name="TextBox 12"/>
-          <p:cNvSpPr txBox="1"/>
-          <p:nvPr/>
-        </p:nvSpPr>
-        <p:spPr>
-          <a:xfrm>
-            <a:off x="1097280" y="3913632"/>
-            <a:ext cx="1463040" cy="320040"/>
-          </a:xfrm>
-          <a:prstGeom prst="rect">
-            <a:avLst/>
-          </a:prstGeom>
-          <a:noFill/>
-        </p:spPr>
-        <p:txBody>
-          <a:bodyPr wrap="square" anchor="t">
-            <a:spAutoFit/>
-          </a:bodyPr>
-          <a:lstStyle/>
-          <a:p>
-            <a:pPr algn="l">
-              <a:lnSpc>
-                <a:spcPct val="106000"/>
-              </a:lnSpc>
-              <a:spcBef>
-                <a:spcPts val="0"/>
-              </a:spcBef>
-              <a:spcAft>
-                <a:spcPts val="0"/>
-              </a:spcAft>
-            </a:pPr>
-            <a:r>
-              <a:rPr sz="1150" b="0">
-                <a:solidFill>
-                  <a:srgbClr val="8B919D"/>
-                </a:solidFill>
-                <a:latin typeface="Consolas"/>
-              </a:rPr>
-              <a:t>quality</a:t>
-            </a:r>
-          </a:p>
-        </p:txBody>
-      </p:sp>
-      <p:sp>
-        <p:nvSpPr>
-          <p:cNvPr id="14" name="TextBox 13"/>
-          <p:cNvSpPr txBox="1"/>
-          <p:nvPr/>
-        </p:nvSpPr>
-        <p:spPr>
-          <a:xfrm>
-            <a:off x="2560320" y="3913632"/>
-            <a:ext cx="3108960" cy="320040"/>
-          </a:xfrm>
-          <a:prstGeom prst="rect">
-            <a:avLst/>
-          </a:prstGeom>
-          <a:noFill/>
-        </p:spPr>
-        <p:txBody>
-          <a:bodyPr wrap="square" anchor="t">
-            <a:spAutoFit/>
-          </a:bodyPr>
-          <a:lstStyle/>
-          <a:p>
-            <a:pPr algn="r">
-              <a:lnSpc>
-                <a:spcPct val="106000"/>
-              </a:lnSpc>
-              <a:spcBef>
-                <a:spcPts val="0"/>
-              </a:spcBef>
-              <a:spcAft>
-                <a:spcPts val="0"/>
-              </a:spcAft>
-            </a:pPr>
-            <a:r>
-              <a:rPr sz="1300" b="1">
-                <a:solidFill>
-                  <a:srgbClr val="16181F"/>
-                </a:solidFill>
-                <a:latin typeface="Calibri"/>
-              </a:rPr>
-              <a:t>marginally higher</a:t>
-            </a:r>
-          </a:p>
-        </p:txBody>
-      </p:sp>
-      <p:sp>
-        <p:nvSpPr>
-          <p:cNvPr id="15" name="Rounded Rectangle 14"/>
+              <a:t>A fixed JSON contract (summary / decisions / action items), pinned in the system prompt and decoded by a tolerant parser. One call, no retry loop.</a:t>
+            </a:r>
+          </a:p>
+        </p:txBody>
+      </p:sp>
+      <p:sp>
+        <p:nvSpPr>
+          <p:cNvPr id="10" name="Rounded Rectangle 9"/>
           <p:cNvSpPr/>
           <p:nvPr/>
         </p:nvSpPr>
         <p:spPr>
           <a:xfrm>
-            <a:off x="6263640" y="2194560"/>
-            <a:ext cx="5120640" cy="1965960"/>
+            <a:off x="4434840" y="2880360"/>
+            <a:ext cx="3429000" cy="2377440"/>
           </a:xfrm>
           <a:prstGeom prst="roundRect">
             <a:avLst>
@@ -8833,11 +9056,11 @@
             </a:avLst>
           </a:prstGeom>
           <a:solidFill>
-            <a:srgbClr val="FBEFEA"/>
+            <a:srgbClr val="FFFFFF"/>
           </a:solidFill>
-          <a:ln w="17780">
+          <a:ln w="12700">
             <a:solidFill>
-              <a:srgbClr val="C2410C"/>
+              <a:srgbClr val="DEE1E7"/>
             </a:solidFill>
           </a:ln>
           <a:effectLst/>
@@ -8866,14 +9089,14 @@
       </p:sp>
       <p:sp>
         <p:nvSpPr>
-          <p:cNvPr id="16" name="TextBox 15"/>
-          <p:cNvSpPr txBox="1"/>
-          <p:nvPr/>
-        </p:nvSpPr>
-        <p:spPr>
-          <a:xfrm>
-            <a:off x="6537959" y="2377440"/>
-            <a:ext cx="4572000" cy="320040"/>
+          <p:cNvPr id="11" name="TextBox 10"/>
+          <p:cNvSpPr txBox="1"/>
+          <p:nvPr/>
+        </p:nvSpPr>
+        <p:spPr>
+          <a:xfrm>
+            <a:off x="4690872" y="3108960"/>
+            <a:ext cx="2971800" cy="457200"/>
           </a:xfrm>
           <a:prstGeom prst="rect">
             <a:avLst/>
@@ -8898,351 +9121,85 @@
               </a:spcAft>
             </a:pPr>
             <a:r>
-              <a:rPr sz="1050" b="1">
-                <a:solidFill>
-                  <a:srgbClr val="C2410C"/>
-                </a:solidFill>
-                <a:latin typeface="Consolas"/>
-              </a:rPr>
-              <a:t>SHIPPED AS PRIMARY</a:t>
-            </a:r>
-          </a:p>
-        </p:txBody>
-      </p:sp>
-      <p:sp>
-        <p:nvSpPr>
-          <p:cNvPr id="17" name="TextBox 16"/>
-          <p:cNvSpPr txBox="1"/>
-          <p:nvPr/>
-        </p:nvSpPr>
-        <p:spPr>
-          <a:xfrm>
-            <a:off x="6537959" y="2724912"/>
-            <a:ext cx="4572000" cy="457200"/>
-          </a:xfrm>
-          <a:prstGeom prst="rect">
-            <a:avLst/>
-          </a:prstGeom>
-          <a:noFill/>
-        </p:spPr>
-        <p:txBody>
-          <a:bodyPr wrap="square" anchor="t">
-            <a:spAutoFit/>
-          </a:bodyPr>
-          <a:lstStyle/>
-          <a:p>
-            <a:pPr algn="l">
-              <a:lnSpc>
-                <a:spcPct val="106000"/>
-              </a:lnSpc>
-              <a:spcBef>
-                <a:spcPts val="0"/>
-              </a:spcBef>
-              <a:spcAft>
-                <a:spcPts val="0"/>
-              </a:spcAft>
-            </a:pPr>
-            <a:r>
-              <a:rPr sz="2000" b="1">
+              <a:rPr sz="1650" b="1">
                 <a:solidFill>
                   <a:srgbClr val="16181F"/>
                 </a:solidFill>
-                <a:latin typeface="Consolas"/>
-              </a:rPr>
-              <a:t>Llama 3.1 8B</a:t>
-            </a:r>
-          </a:p>
-        </p:txBody>
-      </p:sp>
-      <p:sp>
-        <p:nvSpPr>
-          <p:cNvPr id="18" name="TextBox 17"/>
-          <p:cNvSpPr txBox="1"/>
-          <p:nvPr/>
-        </p:nvSpPr>
-        <p:spPr>
-          <a:xfrm>
-            <a:off x="6537959" y="3291840"/>
-            <a:ext cx="1463040" cy="320040"/>
-          </a:xfrm>
-          <a:prstGeom prst="rect">
-            <a:avLst/>
-          </a:prstGeom>
-          <a:noFill/>
-        </p:spPr>
-        <p:txBody>
-          <a:bodyPr wrap="square" anchor="t">
-            <a:spAutoFit/>
-          </a:bodyPr>
-          <a:lstStyle/>
-          <a:p>
-            <a:pPr algn="l">
-              <a:lnSpc>
-                <a:spcPct val="106000"/>
-              </a:lnSpc>
-              <a:spcBef>
-                <a:spcPts val="0"/>
-              </a:spcBef>
-              <a:spcAft>
-                <a:spcPts val="0"/>
-              </a:spcAft>
-            </a:pPr>
-            <a:r>
-              <a:rPr sz="1150" b="0">
-                <a:solidFill>
-                  <a:srgbClr val="8B919D"/>
-                </a:solidFill>
-                <a:latin typeface="Consolas"/>
-              </a:rPr>
-              <a:t>latency</a:t>
-            </a:r>
-          </a:p>
-        </p:txBody>
-      </p:sp>
-      <p:sp>
-        <p:nvSpPr>
-          <p:cNvPr id="19" name="TextBox 18"/>
-          <p:cNvSpPr txBox="1"/>
-          <p:nvPr/>
-        </p:nvSpPr>
-        <p:spPr>
-          <a:xfrm>
-            <a:off x="8001000" y="3291840"/>
-            <a:ext cx="3108960" cy="320040"/>
-          </a:xfrm>
-          <a:prstGeom prst="rect">
-            <a:avLst/>
-          </a:prstGeom>
-          <a:noFill/>
-        </p:spPr>
-        <p:txBody>
-          <a:bodyPr wrap="square" anchor="t">
-            <a:spAutoFit/>
-          </a:bodyPr>
-          <a:lstStyle/>
-          <a:p>
-            <a:pPr algn="r">
-              <a:lnSpc>
-                <a:spcPct val="106000"/>
-              </a:lnSpc>
-              <a:spcBef>
-                <a:spcPts val="0"/>
-              </a:spcBef>
-              <a:spcAft>
-                <a:spcPts val="0"/>
-              </a:spcAft>
-            </a:pPr>
-            <a:r>
-              <a:rPr sz="1300" b="1">
-                <a:solidFill>
-                  <a:srgbClr val="16181F"/>
-                </a:solidFill>
                 <a:latin typeface="Calibri"/>
               </a:rPr>
-              <a:t>~2.5s, consistent</a:t>
-            </a:r>
-          </a:p>
-        </p:txBody>
-      </p:sp>
-      <p:sp>
-        <p:nvSpPr>
-          <p:cNvPr id="20" name="TextBox 19"/>
-          <p:cNvSpPr txBox="1"/>
-          <p:nvPr/>
-        </p:nvSpPr>
-        <p:spPr>
-          <a:xfrm>
-            <a:off x="6537959" y="3602736"/>
-            <a:ext cx="1463040" cy="320040"/>
-          </a:xfrm>
-          <a:prstGeom prst="rect">
-            <a:avLst/>
-          </a:prstGeom>
-          <a:noFill/>
-        </p:spPr>
-        <p:txBody>
-          <a:bodyPr wrap="square" anchor="t">
-            <a:spAutoFit/>
-          </a:bodyPr>
-          <a:lstStyle/>
-          <a:p>
-            <a:pPr algn="l">
-              <a:lnSpc>
-                <a:spcPct val="106000"/>
-              </a:lnSpc>
-              <a:spcBef>
-                <a:spcPts val="0"/>
-              </a:spcBef>
-              <a:spcAft>
-                <a:spcPts val="0"/>
-              </a:spcAft>
-            </a:pPr>
-            <a:r>
-              <a:rPr sz="1150" b="0">
-                <a:solidFill>
-                  <a:srgbClr val="8B919D"/>
-                </a:solidFill>
-                <a:latin typeface="Consolas"/>
-              </a:rPr>
-              <a:t>reliability</a:t>
-            </a:r>
-          </a:p>
-        </p:txBody>
-      </p:sp>
-      <p:sp>
-        <p:nvSpPr>
-          <p:cNvPr id="21" name="TextBox 20"/>
-          <p:cNvSpPr txBox="1"/>
-          <p:nvPr/>
-        </p:nvSpPr>
-        <p:spPr>
-          <a:xfrm>
-            <a:off x="8001000" y="3602736"/>
-            <a:ext cx="3108960" cy="320040"/>
-          </a:xfrm>
-          <a:prstGeom prst="rect">
-            <a:avLst/>
-          </a:prstGeom>
-          <a:noFill/>
-        </p:spPr>
-        <p:txBody>
-          <a:bodyPr wrap="square" anchor="t">
-            <a:spAutoFit/>
-          </a:bodyPr>
-          <a:lstStyle/>
-          <a:p>
-            <a:pPr algn="r">
-              <a:lnSpc>
-                <a:spcPct val="106000"/>
-              </a:lnSpc>
-              <a:spcBef>
-                <a:spcPts val="0"/>
-              </a:spcBef>
-              <a:spcAft>
-                <a:spcPts val="0"/>
-              </a:spcAft>
-            </a:pPr>
-            <a:r>
-              <a:rPr sz="1300" b="1">
-                <a:solidFill>
-                  <a:srgbClr val="16181F"/>
+              <a:t>Guardrails</a:t>
+            </a:r>
+          </a:p>
+        </p:txBody>
+      </p:sp>
+      <p:sp>
+        <p:nvSpPr>
+          <p:cNvPr id="12" name="TextBox 11"/>
+          <p:cNvSpPr txBox="1"/>
+          <p:nvPr/>
+        </p:nvSpPr>
+        <p:spPr>
+          <a:xfrm>
+            <a:off x="4690872" y="3657600"/>
+            <a:ext cx="2971800" cy="1463040"/>
+          </a:xfrm>
+          <a:prstGeom prst="rect">
+            <a:avLst/>
+          </a:prstGeom>
+          <a:noFill/>
+        </p:spPr>
+        <p:txBody>
+          <a:bodyPr wrap="square" anchor="t">
+            <a:spAutoFit/>
+          </a:bodyPr>
+          <a:lstStyle/>
+          <a:p>
+            <a:pPr algn="l">
+              <a:lnSpc>
+                <a:spcPct val="114000"/>
+              </a:lnSpc>
+              <a:spcBef>
+                <a:spcPts val="0"/>
+              </a:spcBef>
+              <a:spcAft>
+                <a:spcPts val="0"/>
+              </a:spcAft>
+            </a:pPr>
+            <a:r>
+              <a:rPr sz="1300" b="0">
+                <a:solidFill>
+                  <a:srgbClr val="5A616E"/>
                 </a:solidFill>
                 <a:latin typeface="Calibri"/>
               </a:rPr>
-              <a:t>steady across runs</a:t>
-            </a:r>
-          </a:p>
-        </p:txBody>
-      </p:sp>
-      <p:sp>
-        <p:nvSpPr>
-          <p:cNvPr id="22" name="TextBox 21"/>
-          <p:cNvSpPr txBox="1"/>
-          <p:nvPr/>
-        </p:nvSpPr>
-        <p:spPr>
-          <a:xfrm>
-            <a:off x="6537959" y="3913632"/>
-            <a:ext cx="1463040" cy="320040"/>
-          </a:xfrm>
-          <a:prstGeom prst="rect">
-            <a:avLst/>
-          </a:prstGeom>
-          <a:noFill/>
-        </p:spPr>
-        <p:txBody>
-          <a:bodyPr wrap="square" anchor="t">
-            <a:spAutoFit/>
-          </a:bodyPr>
-          <a:lstStyle/>
-          <a:p>
-            <a:pPr algn="l">
-              <a:lnSpc>
-                <a:spcPct val="106000"/>
-              </a:lnSpc>
-              <a:spcBef>
-                <a:spcPts val="0"/>
-              </a:spcBef>
-              <a:spcAft>
-                <a:spcPts val="0"/>
-              </a:spcAft>
-            </a:pPr>
-            <a:r>
-              <a:rPr sz="1150" b="0">
-                <a:solidFill>
-                  <a:srgbClr val="8B919D"/>
-                </a:solidFill>
-                <a:latin typeface="Consolas"/>
-              </a:rPr>
-              <a:t>quality</a:t>
-            </a:r>
-          </a:p>
-        </p:txBody>
-      </p:sp>
-      <p:sp>
-        <p:nvSpPr>
-          <p:cNvPr id="23" name="TextBox 22"/>
-          <p:cNvSpPr txBox="1"/>
-          <p:nvPr/>
-        </p:nvSpPr>
-        <p:spPr>
-          <a:xfrm>
-            <a:off x="8001000" y="3913632"/>
-            <a:ext cx="3108960" cy="320040"/>
-          </a:xfrm>
-          <a:prstGeom prst="rect">
-            <a:avLst/>
-          </a:prstGeom>
-          <a:noFill/>
-        </p:spPr>
-        <p:txBody>
-          <a:bodyPr wrap="square" anchor="t">
-            <a:spAutoFit/>
-          </a:bodyPr>
-          <a:lstStyle/>
-          <a:p>
-            <a:pPr algn="r">
-              <a:lnSpc>
-                <a:spcPct val="106000"/>
-              </a:lnSpc>
-              <a:spcBef>
-                <a:spcPts val="0"/>
-              </a:spcBef>
-              <a:spcAft>
-                <a:spcPts val="0"/>
-              </a:spcAft>
-            </a:pPr>
-            <a:r>
-              <a:rPr sz="1300" b="1">
-                <a:solidFill>
-                  <a:srgbClr val="16181F"/>
-                </a:solidFill>
-                <a:latin typeface="Calibri"/>
-              </a:rPr>
-              <a:t>comparable</a:t>
-            </a:r>
-          </a:p>
-        </p:txBody>
-      </p:sp>
-      <p:sp>
-        <p:nvSpPr>
-          <p:cNvPr id="24" name="Rectangle 23"/>
+              <a:t>Extracts only explicit commitments — no invented tasks. Empty fields when data is absent. The difference between useful and hallucinated.</a:t>
+            </a:r>
+          </a:p>
+        </p:txBody>
+      </p:sp>
+      <p:sp>
+        <p:nvSpPr>
+          <p:cNvPr id="13" name="Rounded Rectangle 12"/>
           <p:cNvSpPr/>
           <p:nvPr/>
         </p:nvSpPr>
         <p:spPr>
           <a:xfrm>
-            <a:off x="822960" y="4617720"/>
-            <a:ext cx="54864" cy="1371600"/>
-          </a:xfrm>
-          <a:prstGeom prst="rect">
-            <a:avLst/>
+            <a:off x="8046720" y="2880360"/>
+            <a:ext cx="3429000" cy="2377440"/>
+          </a:xfrm>
+          <a:prstGeom prst="roundRect">
+            <a:avLst>
+              <a:gd name="adj" fmla="val 4500"/>
+            </a:avLst>
           </a:prstGeom>
           <a:solidFill>
-            <a:srgbClr val="C2410C"/>
+            <a:srgbClr val="FFFFFF"/>
           </a:solidFill>
-          <a:ln>
-            <a:noFill/>
+          <a:ln w="12700">
+            <a:solidFill>
+              <a:srgbClr val="DEE1E7"/>
+            </a:solidFill>
           </a:ln>
           <a:effectLst/>
         </p:spPr>
@@ -9270,63 +9227,90 @@
       </p:sp>
       <p:sp>
         <p:nvSpPr>
-          <p:cNvPr id="25" name="TextBox 24"/>
-          <p:cNvSpPr txBox="1"/>
-          <p:nvPr/>
-        </p:nvSpPr>
-        <p:spPr>
-          <a:xfrm>
-            <a:off x="1097280" y="4681728"/>
-            <a:ext cx="10241280" cy="1371600"/>
-          </a:xfrm>
-          <a:prstGeom prst="rect">
-            <a:avLst/>
-          </a:prstGeom>
-          <a:noFill/>
-        </p:spPr>
-        <p:txBody>
-          <a:bodyPr wrap="square" anchor="t">
-            <a:spAutoFit/>
-          </a:bodyPr>
-          <a:lstStyle/>
-          <a:p>
-            <a:pPr algn="l">
-              <a:lnSpc>
-                <a:spcPct val="116000"/>
-              </a:lnSpc>
-              <a:spcBef>
-                <a:spcPts val="0"/>
-              </a:spcBef>
-              <a:spcAft>
-                <a:spcPts val="0"/>
-              </a:spcAft>
-            </a:pPr>
-            <a:r>
-              <a:rPr sz="1800" b="0">
+          <p:cNvPr id="14" name="TextBox 13"/>
+          <p:cNvSpPr txBox="1"/>
+          <p:nvPr/>
+        </p:nvSpPr>
+        <p:spPr>
+          <a:xfrm>
+            <a:off x="8302752" y="3108960"/>
+            <a:ext cx="2971800" cy="457200"/>
+          </a:xfrm>
+          <a:prstGeom prst="rect">
+            <a:avLst/>
+          </a:prstGeom>
+          <a:noFill/>
+        </p:spPr>
+        <p:txBody>
+          <a:bodyPr wrap="square" anchor="t">
+            <a:spAutoFit/>
+          </a:bodyPr>
+          <a:lstStyle/>
+          <a:p>
+            <a:pPr algn="l">
+              <a:lnSpc>
+                <a:spcPct val="106000"/>
+              </a:lnSpc>
+              <a:spcBef>
+                <a:spcPts val="0"/>
+              </a:spcBef>
+              <a:spcAft>
+                <a:spcPts val="0"/>
+              </a:spcAft>
+            </a:pPr>
+            <a:r>
+              <a:rPr sz="1650" b="1">
                 <a:solidFill>
                   <a:srgbClr val="16181F"/>
                 </a:solidFill>
                 <a:latin typeface="Calibri"/>
               </a:rPr>
-              <a:t>Model quality is an </a:t>
-            </a:r>
-            <a:r>
-              <a:rPr sz="1800" b="1">
-                <a:solidFill>
-                  <a:srgbClr val="C2410C"/>
+              <a:t>Graceful degradation</a:t>
+            </a:r>
+          </a:p>
+        </p:txBody>
+      </p:sp>
+      <p:sp>
+        <p:nvSpPr>
+          <p:cNvPr id="15" name="TextBox 14"/>
+          <p:cNvSpPr txBox="1"/>
+          <p:nvPr/>
+        </p:nvSpPr>
+        <p:spPr>
+          <a:xfrm>
+            <a:off x="8302752" y="3657600"/>
+            <a:ext cx="2971800" cy="1463040"/>
+          </a:xfrm>
+          <a:prstGeom prst="rect">
+            <a:avLst/>
+          </a:prstGeom>
+          <a:noFill/>
+        </p:spPr>
+        <p:txBody>
+          <a:bodyPr wrap="square" anchor="t">
+            <a:spAutoFit/>
+          </a:bodyPr>
+          <a:lstStyle/>
+          <a:p>
+            <a:pPr algn="l">
+              <a:lnSpc>
+                <a:spcPct val="114000"/>
+              </a:lnSpc>
+              <a:spcBef>
+                <a:spcPts val="0"/>
+              </a:spcBef>
+              <a:spcAft>
+                <a:spcPts val="0"/>
+              </a:spcAft>
+            </a:pPr>
+            <a:r>
+              <a:rPr sz="1300" b="0">
+                <a:solidFill>
+                  <a:srgbClr val="5A616E"/>
                 </a:solidFill>
                 <a:latin typeface="Calibri"/>
               </a:rPr>
-              <a:t>input</a:t>
-            </a:r>
-            <a:r>
-              <a:rPr sz="1800" b="0">
-                <a:solidFill>
-                  <a:srgbClr val="16181F"/>
-                </a:solidFill>
-                <a:latin typeface="Calibri"/>
-              </a:rPr>
-              <a:t> to product value, not the goal. A demo that always works in two seconds beats a “smarter” one that sometimes hangs — reliability builds trust faster than marginal accuracy.</a:t>
+              <a:t>A model fallback chain: if the primary is cold or errors, it drops to a backup so the request still succeeds.</a:t>
             </a:r>
           </a:p>
         </p:txBody>
@@ -9477,7 +9461,7 @@
                 </a:solidFill>
                 <a:latin typeface="Consolas"/>
               </a:rPr>
-              <a:t>06 · HOW I'D MEASURE SUCCESS</a:t>
+              <a:t>05 · THE DEFINING DECISION</a:t>
             </a:r>
           </a:p>
         </p:txBody>
@@ -9522,7 +9506,7 @@
                 </a:solidFill>
                 <a:latin typeface="Calibri"/>
               </a:rPr>
-              <a:t>One north star, a funnel beneath it, guardrails around it.</a:t>
+              <a:t>I shipped the smaller model on purpose.</a:t>
             </a:r>
           </a:p>
         </p:txBody>
@@ -9536,7 +9520,415 @@
         <p:spPr>
           <a:xfrm>
             <a:off x="822960" y="2194560"/>
-            <a:ext cx="10561320" cy="1143000"/>
+            <a:ext cx="5120640" cy="1965960"/>
+          </a:xfrm>
+          <a:prstGeom prst="roundRect">
+            <a:avLst>
+              <a:gd name="adj" fmla="val 4500"/>
+            </a:avLst>
+          </a:prstGeom>
+          <a:solidFill>
+            <a:srgbClr val="FFFFFF"/>
+          </a:solidFill>
+          <a:ln w="12700">
+            <a:solidFill>
+              <a:srgbClr val="DEE1E7"/>
+            </a:solidFill>
+          </a:ln>
+          <a:effectLst/>
+        </p:spPr>
+        <p:style>
+          <a:lnRef idx="1">
+            <a:schemeClr val="accent1"/>
+          </a:lnRef>
+          <a:fillRef idx="3">
+            <a:schemeClr val="accent1"/>
+          </a:fillRef>
+          <a:effectRef idx="2">
+            <a:schemeClr val="accent1"/>
+          </a:effectRef>
+          <a:fontRef idx="minor">
+            <a:schemeClr val="lt1"/>
+          </a:fontRef>
+        </p:style>
+        <p:txBody>
+          <a:bodyPr rtlCol="0" anchor="ctr"/>
+          <a:lstStyle/>
+          <a:p>
+            <a:pPr algn="ctr"/>
+          </a:p>
+        </p:txBody>
+      </p:sp>
+      <p:sp>
+        <p:nvSpPr>
+          <p:cNvPr id="7" name="TextBox 6"/>
+          <p:cNvSpPr txBox="1"/>
+          <p:nvPr/>
+        </p:nvSpPr>
+        <p:spPr>
+          <a:xfrm>
+            <a:off x="1097280" y="2377440"/>
+            <a:ext cx="4572000" cy="320040"/>
+          </a:xfrm>
+          <a:prstGeom prst="rect">
+            <a:avLst/>
+          </a:prstGeom>
+          <a:noFill/>
+        </p:spPr>
+        <p:txBody>
+          <a:bodyPr wrap="square" anchor="t">
+            <a:spAutoFit/>
+          </a:bodyPr>
+          <a:lstStyle/>
+          <a:p>
+            <a:pPr algn="l">
+              <a:lnSpc>
+                <a:spcPct val="106000"/>
+              </a:lnSpc>
+              <a:spcBef>
+                <a:spcPts val="0"/>
+              </a:spcBef>
+              <a:spcAft>
+                <a:spcPts val="0"/>
+              </a:spcAft>
+            </a:pPr>
+            <a:r>
+              <a:rPr sz="1050" b="1">
+                <a:solidFill>
+                  <a:srgbClr val="8B919D"/>
+                </a:solidFill>
+                <a:latin typeface="Consolas"/>
+              </a:rPr>
+              <a:t>REJECTED AS PRIMARY</a:t>
+            </a:r>
+          </a:p>
+        </p:txBody>
+      </p:sp>
+      <p:sp>
+        <p:nvSpPr>
+          <p:cNvPr id="8" name="TextBox 7"/>
+          <p:cNvSpPr txBox="1"/>
+          <p:nvPr/>
+        </p:nvSpPr>
+        <p:spPr>
+          <a:xfrm>
+            <a:off x="1097280" y="2724912"/>
+            <a:ext cx="4572000" cy="457200"/>
+          </a:xfrm>
+          <a:prstGeom prst="rect">
+            <a:avLst/>
+          </a:prstGeom>
+          <a:noFill/>
+        </p:spPr>
+        <p:txBody>
+          <a:bodyPr wrap="square" anchor="t">
+            <a:spAutoFit/>
+          </a:bodyPr>
+          <a:lstStyle/>
+          <a:p>
+            <a:pPr algn="l">
+              <a:lnSpc>
+                <a:spcPct val="106000"/>
+              </a:lnSpc>
+              <a:spcBef>
+                <a:spcPts val="0"/>
+              </a:spcBef>
+              <a:spcAft>
+                <a:spcPts val="0"/>
+              </a:spcAft>
+            </a:pPr>
+            <a:r>
+              <a:rPr sz="2000" b="1">
+                <a:solidFill>
+                  <a:srgbClr val="16181F"/>
+                </a:solidFill>
+                <a:latin typeface="Consolas"/>
+              </a:rPr>
+              <a:t>Llama 3.1 70B</a:t>
+            </a:r>
+          </a:p>
+        </p:txBody>
+      </p:sp>
+      <p:sp>
+        <p:nvSpPr>
+          <p:cNvPr id="9" name="TextBox 8"/>
+          <p:cNvSpPr txBox="1"/>
+          <p:nvPr/>
+        </p:nvSpPr>
+        <p:spPr>
+          <a:xfrm>
+            <a:off x="1097280" y="3291840"/>
+            <a:ext cx="1463040" cy="320040"/>
+          </a:xfrm>
+          <a:prstGeom prst="rect">
+            <a:avLst/>
+          </a:prstGeom>
+          <a:noFill/>
+        </p:spPr>
+        <p:txBody>
+          <a:bodyPr wrap="square" anchor="t">
+            <a:spAutoFit/>
+          </a:bodyPr>
+          <a:lstStyle/>
+          <a:p>
+            <a:pPr algn="l">
+              <a:lnSpc>
+                <a:spcPct val="106000"/>
+              </a:lnSpc>
+              <a:spcBef>
+                <a:spcPts val="0"/>
+              </a:spcBef>
+              <a:spcAft>
+                <a:spcPts val="0"/>
+              </a:spcAft>
+            </a:pPr>
+            <a:r>
+              <a:rPr sz="1150" b="0">
+                <a:solidFill>
+                  <a:srgbClr val="8B919D"/>
+                </a:solidFill>
+                <a:latin typeface="Consolas"/>
+              </a:rPr>
+              <a:t>latency</a:t>
+            </a:r>
+          </a:p>
+        </p:txBody>
+      </p:sp>
+      <p:sp>
+        <p:nvSpPr>
+          <p:cNvPr id="10" name="TextBox 9"/>
+          <p:cNvSpPr txBox="1"/>
+          <p:nvPr/>
+        </p:nvSpPr>
+        <p:spPr>
+          <a:xfrm>
+            <a:off x="2560320" y="3291840"/>
+            <a:ext cx="3108960" cy="320040"/>
+          </a:xfrm>
+          <a:prstGeom prst="rect">
+            <a:avLst/>
+          </a:prstGeom>
+          <a:noFill/>
+        </p:spPr>
+        <p:txBody>
+          <a:bodyPr wrap="square" anchor="t">
+            <a:spAutoFit/>
+          </a:bodyPr>
+          <a:lstStyle/>
+          <a:p>
+            <a:pPr algn="r">
+              <a:lnSpc>
+                <a:spcPct val="106000"/>
+              </a:lnSpc>
+              <a:spcBef>
+                <a:spcPts val="0"/>
+              </a:spcBef>
+              <a:spcAft>
+                <a:spcPts val="0"/>
+              </a:spcAft>
+            </a:pPr>
+            <a:r>
+              <a:rPr sz="1300" b="1">
+                <a:solidFill>
+                  <a:srgbClr val="16181F"/>
+                </a:solidFill>
+                <a:latin typeface="Calibri"/>
+              </a:rPr>
+              <a:t>9s–46s, inconsistent</a:t>
+            </a:r>
+          </a:p>
+        </p:txBody>
+      </p:sp>
+      <p:sp>
+        <p:nvSpPr>
+          <p:cNvPr id="11" name="TextBox 10"/>
+          <p:cNvSpPr txBox="1"/>
+          <p:nvPr/>
+        </p:nvSpPr>
+        <p:spPr>
+          <a:xfrm>
+            <a:off x="1097280" y="3602736"/>
+            <a:ext cx="1463040" cy="320040"/>
+          </a:xfrm>
+          <a:prstGeom prst="rect">
+            <a:avLst/>
+          </a:prstGeom>
+          <a:noFill/>
+        </p:spPr>
+        <p:txBody>
+          <a:bodyPr wrap="square" anchor="t">
+            <a:spAutoFit/>
+          </a:bodyPr>
+          <a:lstStyle/>
+          <a:p>
+            <a:pPr algn="l">
+              <a:lnSpc>
+                <a:spcPct val="106000"/>
+              </a:lnSpc>
+              <a:spcBef>
+                <a:spcPts val="0"/>
+              </a:spcBef>
+              <a:spcAft>
+                <a:spcPts val="0"/>
+              </a:spcAft>
+            </a:pPr>
+            <a:r>
+              <a:rPr sz="1150" b="0">
+                <a:solidFill>
+                  <a:srgbClr val="8B919D"/>
+                </a:solidFill>
+                <a:latin typeface="Consolas"/>
+              </a:rPr>
+              <a:t>reliability</a:t>
+            </a:r>
+          </a:p>
+        </p:txBody>
+      </p:sp>
+      <p:sp>
+        <p:nvSpPr>
+          <p:cNvPr id="12" name="TextBox 11"/>
+          <p:cNvSpPr txBox="1"/>
+          <p:nvPr/>
+        </p:nvSpPr>
+        <p:spPr>
+          <a:xfrm>
+            <a:off x="2560320" y="3602736"/>
+            <a:ext cx="3108960" cy="320040"/>
+          </a:xfrm>
+          <a:prstGeom prst="rect">
+            <a:avLst/>
+          </a:prstGeom>
+          <a:noFill/>
+        </p:spPr>
+        <p:txBody>
+          <a:bodyPr wrap="square" anchor="t">
+            <a:spAutoFit/>
+          </a:bodyPr>
+          <a:lstStyle/>
+          <a:p>
+            <a:pPr algn="r">
+              <a:lnSpc>
+                <a:spcPct val="106000"/>
+              </a:lnSpc>
+              <a:spcBef>
+                <a:spcPts val="0"/>
+              </a:spcBef>
+              <a:spcAft>
+                <a:spcPts val="0"/>
+              </a:spcAft>
+            </a:pPr>
+            <a:r>
+              <a:rPr sz="1300" b="1">
+                <a:solidFill>
+                  <a:srgbClr val="16181F"/>
+                </a:solidFill>
+                <a:latin typeface="Calibri"/>
+              </a:rPr>
+              <a:t>cold-starts, timeouts</a:t>
+            </a:r>
+          </a:p>
+        </p:txBody>
+      </p:sp>
+      <p:sp>
+        <p:nvSpPr>
+          <p:cNvPr id="13" name="TextBox 12"/>
+          <p:cNvSpPr txBox="1"/>
+          <p:nvPr/>
+        </p:nvSpPr>
+        <p:spPr>
+          <a:xfrm>
+            <a:off x="1097280" y="3913632"/>
+            <a:ext cx="1463040" cy="320040"/>
+          </a:xfrm>
+          <a:prstGeom prst="rect">
+            <a:avLst/>
+          </a:prstGeom>
+          <a:noFill/>
+        </p:spPr>
+        <p:txBody>
+          <a:bodyPr wrap="square" anchor="t">
+            <a:spAutoFit/>
+          </a:bodyPr>
+          <a:lstStyle/>
+          <a:p>
+            <a:pPr algn="l">
+              <a:lnSpc>
+                <a:spcPct val="106000"/>
+              </a:lnSpc>
+              <a:spcBef>
+                <a:spcPts val="0"/>
+              </a:spcBef>
+              <a:spcAft>
+                <a:spcPts val="0"/>
+              </a:spcAft>
+            </a:pPr>
+            <a:r>
+              <a:rPr sz="1150" b="0">
+                <a:solidFill>
+                  <a:srgbClr val="8B919D"/>
+                </a:solidFill>
+                <a:latin typeface="Consolas"/>
+              </a:rPr>
+              <a:t>quality</a:t>
+            </a:r>
+          </a:p>
+        </p:txBody>
+      </p:sp>
+      <p:sp>
+        <p:nvSpPr>
+          <p:cNvPr id="14" name="TextBox 13"/>
+          <p:cNvSpPr txBox="1"/>
+          <p:nvPr/>
+        </p:nvSpPr>
+        <p:spPr>
+          <a:xfrm>
+            <a:off x="2560320" y="3913632"/>
+            <a:ext cx="3108960" cy="320040"/>
+          </a:xfrm>
+          <a:prstGeom prst="rect">
+            <a:avLst/>
+          </a:prstGeom>
+          <a:noFill/>
+        </p:spPr>
+        <p:txBody>
+          <a:bodyPr wrap="square" anchor="t">
+            <a:spAutoFit/>
+          </a:bodyPr>
+          <a:lstStyle/>
+          <a:p>
+            <a:pPr algn="r">
+              <a:lnSpc>
+                <a:spcPct val="106000"/>
+              </a:lnSpc>
+              <a:spcBef>
+                <a:spcPts val="0"/>
+              </a:spcBef>
+              <a:spcAft>
+                <a:spcPts val="0"/>
+              </a:spcAft>
+            </a:pPr>
+            <a:r>
+              <a:rPr sz="1300" b="1">
+                <a:solidFill>
+                  <a:srgbClr val="16181F"/>
+                </a:solidFill>
+                <a:latin typeface="Calibri"/>
+              </a:rPr>
+              <a:t>marginally higher</a:t>
+            </a:r>
+          </a:p>
+        </p:txBody>
+      </p:sp>
+      <p:sp>
+        <p:nvSpPr>
+          <p:cNvPr id="15" name="Rounded Rectangle 14"/>
+          <p:cNvSpPr/>
+          <p:nvPr/>
+        </p:nvSpPr>
+        <p:spPr>
+          <a:xfrm>
+            <a:off x="6263640" y="2194560"/>
+            <a:ext cx="5120640" cy="1965960"/>
           </a:xfrm>
           <a:prstGeom prst="roundRect">
             <a:avLst>
@@ -9577,14 +9969,14 @@
       </p:sp>
       <p:sp>
         <p:nvSpPr>
-          <p:cNvPr id="7" name="TextBox 6"/>
-          <p:cNvSpPr txBox="1"/>
-          <p:nvPr/>
-        </p:nvSpPr>
-        <p:spPr>
-          <a:xfrm>
-            <a:off x="1097280" y="2331720"/>
-            <a:ext cx="10058400" cy="320040"/>
+          <p:cNvPr id="16" name="TextBox 15"/>
+          <p:cNvSpPr txBox="1"/>
+          <p:nvPr/>
+        </p:nvSpPr>
+        <p:spPr>
+          <a:xfrm>
+            <a:off x="6537959" y="2377440"/>
+            <a:ext cx="4572000" cy="320040"/>
           </a:xfrm>
           <a:prstGeom prst="rect">
             <a:avLst/>
@@ -9609,27 +10001,27 @@
               </a:spcAft>
             </a:pPr>
             <a:r>
-              <a:rPr sz="1100" b="1">
+              <a:rPr sz="1050" b="1">
                 <a:solidFill>
                   <a:srgbClr val="C2410C"/>
                 </a:solidFill>
                 <a:latin typeface="Consolas"/>
               </a:rPr>
-              <a:t>NORTH-STAR METRIC</a:t>
-            </a:r>
-          </a:p>
-        </p:txBody>
-      </p:sp>
-      <p:sp>
-        <p:nvSpPr>
-          <p:cNvPr id="8" name="TextBox 7"/>
-          <p:cNvSpPr txBox="1"/>
-          <p:nvPr/>
-        </p:nvSpPr>
-        <p:spPr>
-          <a:xfrm>
-            <a:off x="1097280" y="2651760"/>
-            <a:ext cx="10058400" cy="457200"/>
+              <a:t>SHIPPED AS PRIMARY</a:t>
+            </a:r>
+          </a:p>
+        </p:txBody>
+      </p:sp>
+      <p:sp>
+        <p:nvSpPr>
+          <p:cNvPr id="17" name="TextBox 16"/>
+          <p:cNvSpPr txBox="1"/>
+          <p:nvPr/>
+        </p:nvSpPr>
+        <p:spPr>
+          <a:xfrm>
+            <a:off x="6537959" y="2724912"/>
+            <a:ext cx="4572000" cy="457200"/>
           </a:xfrm>
           <a:prstGeom prst="rect">
             <a:avLst/>
@@ -9654,27 +10046,117 @@
               </a:spcAft>
             </a:pPr>
             <a:r>
-              <a:rPr sz="2100" b="1">
+              <a:rPr sz="2000" b="1">
                 <a:solidFill>
                   <a:srgbClr val="16181F"/>
                 </a:solidFill>
+                <a:latin typeface="Consolas"/>
+              </a:rPr>
+              <a:t>Llama 3.1 8B</a:t>
+            </a:r>
+          </a:p>
+        </p:txBody>
+      </p:sp>
+      <p:sp>
+        <p:nvSpPr>
+          <p:cNvPr id="18" name="TextBox 17"/>
+          <p:cNvSpPr txBox="1"/>
+          <p:nvPr/>
+        </p:nvSpPr>
+        <p:spPr>
+          <a:xfrm>
+            <a:off x="6537959" y="3291840"/>
+            <a:ext cx="1463040" cy="320040"/>
+          </a:xfrm>
+          <a:prstGeom prst="rect">
+            <a:avLst/>
+          </a:prstGeom>
+          <a:noFill/>
+        </p:spPr>
+        <p:txBody>
+          <a:bodyPr wrap="square" anchor="t">
+            <a:spAutoFit/>
+          </a:bodyPr>
+          <a:lstStyle/>
+          <a:p>
+            <a:pPr algn="l">
+              <a:lnSpc>
+                <a:spcPct val="106000"/>
+              </a:lnSpc>
+              <a:spcBef>
+                <a:spcPts val="0"/>
+              </a:spcBef>
+              <a:spcAft>
+                <a:spcPts val="0"/>
+              </a:spcAft>
+            </a:pPr>
+            <a:r>
+              <a:rPr sz="1150" b="0">
+                <a:solidFill>
+                  <a:srgbClr val="8B919D"/>
+                </a:solidFill>
+                <a:latin typeface="Consolas"/>
+              </a:rPr>
+              <a:t>latency</a:t>
+            </a:r>
+          </a:p>
+        </p:txBody>
+      </p:sp>
+      <p:sp>
+        <p:nvSpPr>
+          <p:cNvPr id="19" name="TextBox 18"/>
+          <p:cNvSpPr txBox="1"/>
+          <p:nvPr/>
+        </p:nvSpPr>
+        <p:spPr>
+          <a:xfrm>
+            <a:off x="8001000" y="3291840"/>
+            <a:ext cx="3108960" cy="320040"/>
+          </a:xfrm>
+          <a:prstGeom prst="rect">
+            <a:avLst/>
+          </a:prstGeom>
+          <a:noFill/>
+        </p:spPr>
+        <p:txBody>
+          <a:bodyPr wrap="square" anchor="t">
+            <a:spAutoFit/>
+          </a:bodyPr>
+          <a:lstStyle/>
+          <a:p>
+            <a:pPr algn="r">
+              <a:lnSpc>
+                <a:spcPct val="106000"/>
+              </a:lnSpc>
+              <a:spcBef>
+                <a:spcPts val="0"/>
+              </a:spcBef>
+              <a:spcAft>
+                <a:spcPts val="0"/>
+              </a:spcAft>
+            </a:pPr>
+            <a:r>
+              <a:rPr sz="1300" b="1">
+                <a:solidFill>
+                  <a:srgbClr val="16181F"/>
+                </a:solidFill>
                 <a:latin typeface="Calibri"/>
               </a:rPr>
-              <a:t>Commitment Completion Rate</a:t>
-            </a:r>
-          </a:p>
-        </p:txBody>
-      </p:sp>
-      <p:sp>
-        <p:nvSpPr>
-          <p:cNvPr id="9" name="TextBox 8"/>
-          <p:cNvSpPr txBox="1"/>
-          <p:nvPr/>
-        </p:nvSpPr>
-        <p:spPr>
-          <a:xfrm>
-            <a:off x="1097280" y="3090672"/>
-            <a:ext cx="10058400" cy="274320"/>
+              <a:t>~2.5s, consistent</a:t>
+            </a:r>
+          </a:p>
+        </p:txBody>
+      </p:sp>
+      <p:sp>
+        <p:nvSpPr>
+          <p:cNvPr id="20" name="TextBox 19"/>
+          <p:cNvSpPr txBox="1"/>
+          <p:nvPr/>
+        </p:nvSpPr>
+        <p:spPr>
+          <a:xfrm>
+            <a:off x="6537959" y="3602736"/>
+            <a:ext cx="1463040" cy="320040"/>
           </a:xfrm>
           <a:prstGeom prst="rect">
             <a:avLst/>
@@ -9699,27 +10181,72 @@
               </a:spcAft>
             </a:pPr>
             <a:r>
-              <a:rPr sz="1300" b="0">
-                <a:solidFill>
-                  <a:srgbClr val="5A616E"/>
+              <a:rPr sz="1150" b="0">
+                <a:solidFill>
+                  <a:srgbClr val="8B919D"/>
+                </a:solidFill>
+                <a:latin typeface="Consolas"/>
+              </a:rPr>
+              <a:t>reliability</a:t>
+            </a:r>
+          </a:p>
+        </p:txBody>
+      </p:sp>
+      <p:sp>
+        <p:nvSpPr>
+          <p:cNvPr id="21" name="TextBox 20"/>
+          <p:cNvSpPr txBox="1"/>
+          <p:nvPr/>
+        </p:nvSpPr>
+        <p:spPr>
+          <a:xfrm>
+            <a:off x="8001000" y="3602736"/>
+            <a:ext cx="3108960" cy="320040"/>
+          </a:xfrm>
+          <a:prstGeom prst="rect">
+            <a:avLst/>
+          </a:prstGeom>
+          <a:noFill/>
+        </p:spPr>
+        <p:txBody>
+          <a:bodyPr wrap="square" anchor="t">
+            <a:spAutoFit/>
+          </a:bodyPr>
+          <a:lstStyle/>
+          <a:p>
+            <a:pPr algn="r">
+              <a:lnSpc>
+                <a:spcPct val="106000"/>
+              </a:lnSpc>
+              <a:spcBef>
+                <a:spcPts val="0"/>
+              </a:spcBef>
+              <a:spcAft>
+                <a:spcPts val="0"/>
+              </a:spcAft>
+            </a:pPr>
+            <a:r>
+              <a:rPr sz="1300" b="1">
+                <a:solidFill>
+                  <a:srgbClr val="16181F"/>
                 </a:solidFill>
                 <a:latin typeface="Calibri"/>
               </a:rPr>
-              <a:t>Of the action items surfaced, what share actually get done? Everything else is a proxy.</a:t>
-            </a:r>
-          </a:p>
-        </p:txBody>
-      </p:sp>
-      <p:sp>
-        <p:nvSpPr>
-          <p:cNvPr id="10" name="TextBox 9"/>
-          <p:cNvSpPr txBox="1"/>
-          <p:nvPr/>
-        </p:nvSpPr>
-        <p:spPr>
-          <a:xfrm>
-            <a:off x="822960" y="3611880"/>
-            <a:ext cx="5852160" cy="365760"/>
+              <a:t>steady across runs</a:t>
+            </a:r>
+          </a:p>
+        </p:txBody>
+      </p:sp>
+      <p:sp>
+        <p:nvSpPr>
+          <p:cNvPr id="22" name="TextBox 21"/>
+          <p:cNvSpPr txBox="1"/>
+          <p:nvPr/>
+        </p:nvSpPr>
+        <p:spPr>
+          <a:xfrm>
+            <a:off x="6537959" y="3913632"/>
+            <a:ext cx="1463040" cy="320040"/>
           </a:xfrm>
           <a:prstGeom prst="rect">
             <a:avLst/>
@@ -9744,40 +10271,40 @@
               </a:spcAft>
             </a:pPr>
             <a:r>
-              <a:rPr sz="1100" b="1">
+              <a:rPr sz="1150" b="0">
                 <a:solidFill>
                   <a:srgbClr val="8B919D"/>
                 </a:solidFill>
                 <a:latin typeface="Consolas"/>
               </a:rPr>
-              <a:t>INPUT METRICS — THE FUNNEL</a:t>
-            </a:r>
-          </a:p>
-        </p:txBody>
-      </p:sp>
-      <p:sp>
-        <p:nvSpPr>
-          <p:cNvPr id="11" name="TextBox 10"/>
-          <p:cNvSpPr txBox="1"/>
-          <p:nvPr/>
-        </p:nvSpPr>
-        <p:spPr>
-          <a:xfrm>
-            <a:off x="822960" y="3977639"/>
-            <a:ext cx="5669280" cy="365760"/>
-          </a:xfrm>
-          <a:prstGeom prst="rect">
-            <a:avLst/>
-          </a:prstGeom>
-          <a:noFill/>
-        </p:spPr>
-        <p:txBody>
-          <a:bodyPr wrap="square" anchor="t">
-            <a:spAutoFit/>
-          </a:bodyPr>
-          <a:lstStyle/>
-          <a:p>
-            <a:pPr algn="l">
+              <a:t>quality</a:t>
+            </a:r>
+          </a:p>
+        </p:txBody>
+      </p:sp>
+      <p:sp>
+        <p:nvSpPr>
+          <p:cNvPr id="23" name="TextBox 22"/>
+          <p:cNvSpPr txBox="1"/>
+          <p:nvPr/>
+        </p:nvSpPr>
+        <p:spPr>
+          <a:xfrm>
+            <a:off x="8001000" y="3913632"/>
+            <a:ext cx="3108960" cy="320040"/>
+          </a:xfrm>
+          <a:prstGeom prst="rect">
+            <a:avLst/>
+          </a:prstGeom>
+          <a:noFill/>
+        </p:spPr>
+        <p:txBody>
+          <a:bodyPr wrap="square" anchor="t">
+            <a:spAutoFit/>
+          </a:bodyPr>
+          <a:lstStyle/>
+          <a:p>
+            <a:pPr algn="r">
               <a:lnSpc>
                 <a:spcPct val="106000"/>
               </a:lnSpc>
@@ -9791,389 +10318,118 @@
             <a:r>
               <a:rPr sz="1300" b="1">
                 <a:solidFill>
+                  <a:srgbClr val="16181F"/>
+                </a:solidFill>
+                <a:latin typeface="Calibri"/>
+              </a:rPr>
+              <a:t>comparable</a:t>
+            </a:r>
+          </a:p>
+        </p:txBody>
+      </p:sp>
+      <p:sp>
+        <p:nvSpPr>
+          <p:cNvPr id="24" name="Rectangle 23"/>
+          <p:cNvSpPr/>
+          <p:nvPr/>
+        </p:nvSpPr>
+        <p:spPr>
+          <a:xfrm>
+            <a:off x="822960" y="4617720"/>
+            <a:ext cx="54864" cy="1371600"/>
+          </a:xfrm>
+          <a:prstGeom prst="rect">
+            <a:avLst/>
+          </a:prstGeom>
+          <a:solidFill>
+            <a:srgbClr val="C2410C"/>
+          </a:solidFill>
+          <a:ln>
+            <a:noFill/>
+          </a:ln>
+          <a:effectLst/>
+        </p:spPr>
+        <p:style>
+          <a:lnRef idx="1">
+            <a:schemeClr val="accent1"/>
+          </a:lnRef>
+          <a:fillRef idx="3">
+            <a:schemeClr val="accent1"/>
+          </a:fillRef>
+          <a:effectRef idx="2">
+            <a:schemeClr val="accent1"/>
+          </a:effectRef>
+          <a:fontRef idx="minor">
+            <a:schemeClr val="lt1"/>
+          </a:fontRef>
+        </p:style>
+        <p:txBody>
+          <a:bodyPr rtlCol="0" anchor="ctr"/>
+          <a:lstStyle/>
+          <a:p>
+            <a:pPr algn="ctr"/>
+          </a:p>
+        </p:txBody>
+      </p:sp>
+      <p:sp>
+        <p:nvSpPr>
+          <p:cNvPr id="25" name="TextBox 24"/>
+          <p:cNvSpPr txBox="1"/>
+          <p:nvPr/>
+        </p:nvSpPr>
+        <p:spPr>
+          <a:xfrm>
+            <a:off x="1097280" y="4681728"/>
+            <a:ext cx="10241280" cy="1371600"/>
+          </a:xfrm>
+          <a:prstGeom prst="rect">
+            <a:avLst/>
+          </a:prstGeom>
+          <a:noFill/>
+        </p:spPr>
+        <p:txBody>
+          <a:bodyPr wrap="square" anchor="t">
+            <a:spAutoFit/>
+          </a:bodyPr>
+          <a:lstStyle/>
+          <a:p>
+            <a:pPr algn="l">
+              <a:lnSpc>
+                <a:spcPct val="116000"/>
+              </a:lnSpc>
+              <a:spcBef>
+                <a:spcPts val="0"/>
+              </a:spcBef>
+              <a:spcAft>
+                <a:spcPts val="0"/>
+              </a:spcAft>
+            </a:pPr>
+            <a:r>
+              <a:rPr sz="1800" b="0">
+                <a:solidFill>
+                  <a:srgbClr val="16181F"/>
+                </a:solidFill>
+                <a:latin typeface="Calibri"/>
+              </a:rPr>
+              <a:t>Model quality is an </a:t>
+            </a:r>
+            <a:r>
+              <a:rPr sz="1800" b="1">
+                <a:solidFill>
                   <a:srgbClr val="C2410C"/>
                 </a:solidFill>
                 <a:latin typeface="Calibri"/>
               </a:rPr>
-              <a:t>•  </a:t>
-            </a:r>
-            <a:r>
-              <a:rPr sz="1350" b="0">
-                <a:solidFill>
-                  <a:srgbClr val="5A616E"/>
+              <a:t>input</a:t>
+            </a:r>
+            <a:r>
+              <a:rPr sz="1800" b="0">
+                <a:solidFill>
+                  <a:srgbClr val="16181F"/>
                 </a:solidFill>
                 <a:latin typeface="Calibri"/>
               </a:rPr>
-              <a:t>Activation: % sessions that extract → distribute ≥1 item</a:t>
-            </a:r>
-          </a:p>
-        </p:txBody>
-      </p:sp>
-      <p:sp>
-        <p:nvSpPr>
-          <p:cNvPr id="12" name="TextBox 11"/>
-          <p:cNvSpPr txBox="1"/>
-          <p:nvPr/>
-        </p:nvSpPr>
-        <p:spPr>
-          <a:xfrm>
-            <a:off x="822960" y="4361688"/>
-            <a:ext cx="5669280" cy="365760"/>
-          </a:xfrm>
-          <a:prstGeom prst="rect">
-            <a:avLst/>
-          </a:prstGeom>
-          <a:noFill/>
-        </p:spPr>
-        <p:txBody>
-          <a:bodyPr wrap="square" anchor="t">
-            <a:spAutoFit/>
-          </a:bodyPr>
-          <a:lstStyle/>
-          <a:p>
-            <a:pPr algn="l">
-              <a:lnSpc>
-                <a:spcPct val="106000"/>
-              </a:lnSpc>
-              <a:spcBef>
-                <a:spcPts val="0"/>
-              </a:spcBef>
-              <a:spcAft>
-                <a:spcPts val="0"/>
-              </a:spcAft>
-            </a:pPr>
-            <a:r>
-              <a:rPr sz="1300" b="1">
-                <a:solidFill>
-                  <a:srgbClr val="C2410C"/>
-                </a:solidFill>
-                <a:latin typeface="Calibri"/>
-              </a:rPr>
-              <a:t>•  </a:t>
-            </a:r>
-            <a:r>
-              <a:rPr sz="1350" b="0">
-                <a:solidFill>
-                  <a:srgbClr val="5A616E"/>
-                </a:solidFill>
-                <a:latin typeface="Calibri"/>
-              </a:rPr>
-              <a:t>Time-to-value: seconds paste → first send</a:t>
-            </a:r>
-          </a:p>
-        </p:txBody>
-      </p:sp>
-      <p:sp>
-        <p:nvSpPr>
-          <p:cNvPr id="13" name="TextBox 12"/>
-          <p:cNvSpPr txBox="1"/>
-          <p:nvPr/>
-        </p:nvSpPr>
-        <p:spPr>
-          <a:xfrm>
-            <a:off x="822960" y="4745736"/>
-            <a:ext cx="5669280" cy="365760"/>
-          </a:xfrm>
-          <a:prstGeom prst="rect">
-            <a:avLst/>
-          </a:prstGeom>
-          <a:noFill/>
-        </p:spPr>
-        <p:txBody>
-          <a:bodyPr wrap="square" anchor="t">
-            <a:spAutoFit/>
-          </a:bodyPr>
-          <a:lstStyle/>
-          <a:p>
-            <a:pPr algn="l">
-              <a:lnSpc>
-                <a:spcPct val="106000"/>
-              </a:lnSpc>
-              <a:spcBef>
-                <a:spcPts val="0"/>
-              </a:spcBef>
-              <a:spcAft>
-                <a:spcPts val="0"/>
-              </a:spcAft>
-            </a:pPr>
-            <a:r>
-              <a:rPr sz="1300" b="1">
-                <a:solidFill>
-                  <a:srgbClr val="C2410C"/>
-                </a:solidFill>
-                <a:latin typeface="Calibri"/>
-              </a:rPr>
-              <a:t>•  </a:t>
-            </a:r>
-            <a:r>
-              <a:rPr sz="1350" b="0">
-                <a:solidFill>
-                  <a:srgbClr val="5A616E"/>
-                </a:solidFill>
-                <a:latin typeface="Calibri"/>
-              </a:rPr>
-              <a:t>Extraction quality: precision / recall vs. eval set</a:t>
-            </a:r>
-          </a:p>
-        </p:txBody>
-      </p:sp>
-      <p:sp>
-        <p:nvSpPr>
-          <p:cNvPr id="14" name="TextBox 13"/>
-          <p:cNvSpPr txBox="1"/>
-          <p:nvPr/>
-        </p:nvSpPr>
-        <p:spPr>
-          <a:xfrm>
-            <a:off x="822960" y="5129783"/>
-            <a:ext cx="5669280" cy="365760"/>
-          </a:xfrm>
-          <a:prstGeom prst="rect">
-            <a:avLst/>
-          </a:prstGeom>
-          <a:noFill/>
-        </p:spPr>
-        <p:txBody>
-          <a:bodyPr wrap="square" anchor="t">
-            <a:spAutoFit/>
-          </a:bodyPr>
-          <a:lstStyle/>
-          <a:p>
-            <a:pPr algn="l">
-              <a:lnSpc>
-                <a:spcPct val="106000"/>
-              </a:lnSpc>
-              <a:spcBef>
-                <a:spcPts val="0"/>
-              </a:spcBef>
-              <a:spcAft>
-                <a:spcPts val="0"/>
-              </a:spcAft>
-            </a:pPr>
-            <a:r>
-              <a:rPr sz="1300" b="1">
-                <a:solidFill>
-                  <a:srgbClr val="C2410C"/>
-                </a:solidFill>
-                <a:latin typeface="Calibri"/>
-              </a:rPr>
-              <a:t>•  </a:t>
-            </a:r>
-            <a:r>
-              <a:rPr sz="1350" b="0">
-                <a:solidFill>
-                  <a:srgbClr val="5A616E"/>
-                </a:solidFill>
-                <a:latin typeface="Calibri"/>
-              </a:rPr>
-              <a:t>Retention: repeat use / week</a:t>
-            </a:r>
-          </a:p>
-        </p:txBody>
-      </p:sp>
-      <p:sp>
-        <p:nvSpPr>
-          <p:cNvPr id="15" name="TextBox 14"/>
-          <p:cNvSpPr txBox="1"/>
-          <p:nvPr/>
-        </p:nvSpPr>
-        <p:spPr>
-          <a:xfrm>
-            <a:off x="6949440" y="3611880"/>
-            <a:ext cx="4389120" cy="365760"/>
-          </a:xfrm>
-          <a:prstGeom prst="rect">
-            <a:avLst/>
-          </a:prstGeom>
-          <a:noFill/>
-        </p:spPr>
-        <p:txBody>
-          <a:bodyPr wrap="square" anchor="t">
-            <a:spAutoFit/>
-          </a:bodyPr>
-          <a:lstStyle/>
-          <a:p>
-            <a:pPr algn="l">
-              <a:lnSpc>
-                <a:spcPct val="106000"/>
-              </a:lnSpc>
-              <a:spcBef>
-                <a:spcPts val="0"/>
-              </a:spcBef>
-              <a:spcAft>
-                <a:spcPts val="0"/>
-              </a:spcAft>
-            </a:pPr>
-            <a:r>
-              <a:rPr sz="1100" b="1">
-                <a:solidFill>
-                  <a:srgbClr val="8B919D"/>
-                </a:solidFill>
-                <a:latin typeface="Consolas"/>
-              </a:rPr>
-              <a:t>GUARDRAIL METRICS</a:t>
-            </a:r>
-          </a:p>
-        </p:txBody>
-      </p:sp>
-      <p:sp>
-        <p:nvSpPr>
-          <p:cNvPr id="16" name="TextBox 15"/>
-          <p:cNvSpPr txBox="1"/>
-          <p:nvPr/>
-        </p:nvSpPr>
-        <p:spPr>
-          <a:xfrm>
-            <a:off x="6949440" y="3977639"/>
-            <a:ext cx="4389120" cy="365760"/>
-          </a:xfrm>
-          <a:prstGeom prst="rect">
-            <a:avLst/>
-          </a:prstGeom>
-          <a:noFill/>
-        </p:spPr>
-        <p:txBody>
-          <a:bodyPr wrap="square" anchor="t">
-            <a:spAutoFit/>
-          </a:bodyPr>
-          <a:lstStyle/>
-          <a:p>
-            <a:pPr algn="l">
-              <a:lnSpc>
-                <a:spcPct val="106000"/>
-              </a:lnSpc>
-              <a:spcBef>
-                <a:spcPts val="0"/>
-              </a:spcBef>
-              <a:spcAft>
-                <a:spcPts val="0"/>
-              </a:spcAft>
-            </a:pPr>
-            <a:r>
-              <a:rPr sz="1300" b="1">
-                <a:solidFill>
-                  <a:srgbClr val="C2410C"/>
-                </a:solidFill>
-                <a:latin typeface="Calibri"/>
-              </a:rPr>
-              <a:t>•  </a:t>
-            </a:r>
-            <a:r>
-              <a:rPr sz="1350" b="0">
-                <a:solidFill>
-                  <a:srgbClr val="5A616E"/>
-                </a:solidFill>
-                <a:latin typeface="Calibri"/>
-              </a:rPr>
-              <a:t>Hallucination rate (invented items)</a:t>
-            </a:r>
-          </a:p>
-        </p:txBody>
-      </p:sp>
-      <p:sp>
-        <p:nvSpPr>
-          <p:cNvPr id="17" name="TextBox 16"/>
-          <p:cNvSpPr txBox="1"/>
-          <p:nvPr/>
-        </p:nvSpPr>
-        <p:spPr>
-          <a:xfrm>
-            <a:off x="6949440" y="4361688"/>
-            <a:ext cx="4389120" cy="365760"/>
-          </a:xfrm>
-          <a:prstGeom prst="rect">
-            <a:avLst/>
-          </a:prstGeom>
-          <a:noFill/>
-        </p:spPr>
-        <p:txBody>
-          <a:bodyPr wrap="square" anchor="t">
-            <a:spAutoFit/>
-          </a:bodyPr>
-          <a:lstStyle/>
-          <a:p>
-            <a:pPr algn="l">
-              <a:lnSpc>
-                <a:spcPct val="106000"/>
-              </a:lnSpc>
-              <a:spcBef>
-                <a:spcPts val="0"/>
-              </a:spcBef>
-              <a:spcAft>
-                <a:spcPts val="0"/>
-              </a:spcAft>
-            </a:pPr>
-            <a:r>
-              <a:rPr sz="1300" b="1">
-                <a:solidFill>
-                  <a:srgbClr val="C2410C"/>
-                </a:solidFill>
-                <a:latin typeface="Calibri"/>
-              </a:rPr>
-              <a:t>•  </a:t>
-            </a:r>
-            <a:r>
-              <a:rPr sz="1350" b="0">
-                <a:solidFill>
-                  <a:srgbClr val="5A616E"/>
-                </a:solidFill>
-                <a:latin typeface="Calibri"/>
-              </a:rPr>
-              <a:t>Edit rate (proxy for accuracy)</a:t>
-            </a:r>
-          </a:p>
-        </p:txBody>
-      </p:sp>
-      <p:sp>
-        <p:nvSpPr>
-          <p:cNvPr id="18" name="TextBox 17"/>
-          <p:cNvSpPr txBox="1"/>
-          <p:nvPr/>
-        </p:nvSpPr>
-        <p:spPr>
-          <a:xfrm>
-            <a:off x="6949440" y="4745736"/>
-            <a:ext cx="4389120" cy="365760"/>
-          </a:xfrm>
-          <a:prstGeom prst="rect">
-            <a:avLst/>
-          </a:prstGeom>
-          <a:noFill/>
-        </p:spPr>
-        <p:txBody>
-          <a:bodyPr wrap="square" anchor="t">
-            <a:spAutoFit/>
-          </a:bodyPr>
-          <a:lstStyle/>
-          <a:p>
-            <a:pPr algn="l">
-              <a:lnSpc>
-                <a:spcPct val="106000"/>
-              </a:lnSpc>
-              <a:spcBef>
-                <a:spcPts val="0"/>
-              </a:spcBef>
-              <a:spcAft>
-                <a:spcPts val="0"/>
-              </a:spcAft>
-            </a:pPr>
-            <a:r>
-              <a:rPr sz="1300" b="1">
-                <a:solidFill>
-                  <a:srgbClr val="C2410C"/>
-                </a:solidFill>
-                <a:latin typeface="Calibri"/>
-              </a:rPr>
-              <a:t>•  </a:t>
-            </a:r>
-            <a:r>
-              <a:rPr sz="1350" b="0">
-                <a:solidFill>
-                  <a:srgbClr val="5A616E"/>
-                </a:solidFill>
-                <a:latin typeface="Calibri"/>
-              </a:rPr>
-              <a:t>Error / failure rate</a:t>
+              <a:t> to product value, not the goal. A demo that always works in two seconds beats a “smarter” one that sometimes hangs — reliability builds trust faster than marginal accuracy.</a:t>
             </a:r>
           </a:p>
         </p:txBody>
@@ -10324,7 +10580,7 @@
                 </a:solidFill>
                 <a:latin typeface="Consolas"/>
               </a:rPr>
-              <a:t>07 · MAKING AI DECISIONS RIGOROUSLY</a:t>
+              <a:t>06 · HOW I'D MEASURE SUCCESS</a:t>
             </a:r>
           </a:p>
         </p:txBody>
@@ -10369,291 +10625,21 @@
                 </a:solidFill>
                 <a:latin typeface="Calibri"/>
               </a:rPr>
-              <a:t>Vibes don't scale. Evals do.</a:t>
-            </a:r>
-          </a:p>
-        </p:txBody>
-      </p:sp>
-      <p:sp>
-        <p:nvSpPr>
-          <p:cNvPr id="6" name="TextBox 5"/>
-          <p:cNvSpPr txBox="1"/>
-          <p:nvPr/>
-        </p:nvSpPr>
-        <p:spPr>
-          <a:xfrm>
-            <a:off x="822960" y="2377440"/>
-            <a:ext cx="914400" cy="365760"/>
-          </a:xfrm>
-          <a:prstGeom prst="rect">
-            <a:avLst/>
-          </a:prstGeom>
-          <a:noFill/>
-        </p:spPr>
-        <p:txBody>
-          <a:bodyPr wrap="square" anchor="t">
-            <a:spAutoFit/>
-          </a:bodyPr>
-          <a:lstStyle/>
-          <a:p>
-            <a:pPr algn="l">
-              <a:lnSpc>
-                <a:spcPct val="106000"/>
-              </a:lnSpc>
-              <a:spcBef>
-                <a:spcPts val="0"/>
-              </a:spcBef>
-              <a:spcAft>
-                <a:spcPts val="0"/>
-              </a:spcAft>
-            </a:pPr>
-            <a:r>
-              <a:rPr sz="1250" b="1">
-                <a:solidFill>
-                  <a:srgbClr val="C2410C"/>
-                </a:solidFill>
-                <a:latin typeface="Consolas"/>
-              </a:rPr>
-              <a:t>set</a:t>
-            </a:r>
-          </a:p>
-        </p:txBody>
-      </p:sp>
-      <p:sp>
-        <p:nvSpPr>
-          <p:cNvPr id="7" name="TextBox 6"/>
-          <p:cNvSpPr txBox="1"/>
-          <p:nvPr/>
-        </p:nvSpPr>
-        <p:spPr>
-          <a:xfrm>
-            <a:off x="1737360" y="2359152"/>
-            <a:ext cx="4480560" cy="914400"/>
-          </a:xfrm>
-          <a:prstGeom prst="rect">
-            <a:avLst/>
-          </a:prstGeom>
-          <a:noFill/>
-        </p:spPr>
-        <p:txBody>
-          <a:bodyPr wrap="square" anchor="t">
-            <a:spAutoFit/>
-          </a:bodyPr>
-          <a:lstStyle/>
-          <a:p>
-            <a:pPr algn="l">
-              <a:lnSpc>
-                <a:spcPct val="114000"/>
-              </a:lnSpc>
-              <a:spcBef>
-                <a:spcPts val="0"/>
-              </a:spcBef>
-              <a:spcAft>
-                <a:spcPts val="0"/>
-              </a:spcAft>
-            </a:pPr>
-            <a:r>
-              <a:rPr sz="1500" b="0">
-                <a:solidFill>
-                  <a:srgbClr val="5A616E"/>
-                </a:solidFill>
-                <a:latin typeface="Calibri"/>
-              </a:rPr>
-              <a:t>Build a golden eval set: labelled transcripts with the “true” decisions and action items.</a:t>
-            </a:r>
-          </a:p>
-        </p:txBody>
-      </p:sp>
-      <p:sp>
-        <p:nvSpPr>
-          <p:cNvPr id="8" name="TextBox 7"/>
-          <p:cNvSpPr txBox="1"/>
-          <p:nvPr/>
-        </p:nvSpPr>
-        <p:spPr>
-          <a:xfrm>
-            <a:off x="822960" y="3474720"/>
-            <a:ext cx="914400" cy="365760"/>
-          </a:xfrm>
-          <a:prstGeom prst="rect">
-            <a:avLst/>
-          </a:prstGeom>
-          <a:noFill/>
-        </p:spPr>
-        <p:txBody>
-          <a:bodyPr wrap="square" anchor="t">
-            <a:spAutoFit/>
-          </a:bodyPr>
-          <a:lstStyle/>
-          <a:p>
-            <a:pPr algn="l">
-              <a:lnSpc>
-                <a:spcPct val="106000"/>
-              </a:lnSpc>
-              <a:spcBef>
-                <a:spcPts val="0"/>
-              </a:spcBef>
-              <a:spcAft>
-                <a:spcPts val="0"/>
-              </a:spcAft>
-            </a:pPr>
-            <a:r>
-              <a:rPr sz="1250" b="1">
-                <a:solidFill>
-                  <a:srgbClr val="C2410C"/>
-                </a:solidFill>
-                <a:latin typeface="Consolas"/>
-              </a:rPr>
-              <a:t>score</a:t>
-            </a:r>
-          </a:p>
-        </p:txBody>
-      </p:sp>
-      <p:sp>
-        <p:nvSpPr>
-          <p:cNvPr id="9" name="TextBox 8"/>
-          <p:cNvSpPr txBox="1"/>
-          <p:nvPr/>
-        </p:nvSpPr>
-        <p:spPr>
-          <a:xfrm>
-            <a:off x="1737360" y="3456432"/>
-            <a:ext cx="4480560" cy="914400"/>
-          </a:xfrm>
-          <a:prstGeom prst="rect">
-            <a:avLst/>
-          </a:prstGeom>
-          <a:noFill/>
-        </p:spPr>
-        <p:txBody>
-          <a:bodyPr wrap="square" anchor="t">
-            <a:spAutoFit/>
-          </a:bodyPr>
-          <a:lstStyle/>
-          <a:p>
-            <a:pPr algn="l">
-              <a:lnSpc>
-                <a:spcPct val="114000"/>
-              </a:lnSpc>
-              <a:spcBef>
-                <a:spcPts val="0"/>
-              </a:spcBef>
-              <a:spcAft>
-                <a:spcPts val="0"/>
-              </a:spcAft>
-            </a:pPr>
-            <a:r>
-              <a:rPr sz="1500" b="0">
-                <a:solidFill>
-                  <a:srgbClr val="5A616E"/>
-                </a:solidFill>
-                <a:latin typeface="Calibri"/>
-              </a:rPr>
-              <a:t>Measure precision (did we invent tasks?), recall (did we miss commitments?), and field accuracy.</a:t>
-            </a:r>
-          </a:p>
-        </p:txBody>
-      </p:sp>
-      <p:sp>
-        <p:nvSpPr>
-          <p:cNvPr id="10" name="TextBox 9"/>
-          <p:cNvSpPr txBox="1"/>
-          <p:nvPr/>
-        </p:nvSpPr>
-        <p:spPr>
-          <a:xfrm>
-            <a:off x="822960" y="4572000"/>
-            <a:ext cx="914400" cy="365760"/>
-          </a:xfrm>
-          <a:prstGeom prst="rect">
-            <a:avLst/>
-          </a:prstGeom>
-          <a:noFill/>
-        </p:spPr>
-        <p:txBody>
-          <a:bodyPr wrap="square" anchor="t">
-            <a:spAutoFit/>
-          </a:bodyPr>
-          <a:lstStyle/>
-          <a:p>
-            <a:pPr algn="l">
-              <a:lnSpc>
-                <a:spcPct val="106000"/>
-              </a:lnSpc>
-              <a:spcBef>
-                <a:spcPts val="0"/>
-              </a:spcBef>
-              <a:spcAft>
-                <a:spcPts val="0"/>
-              </a:spcAft>
-            </a:pPr>
-            <a:r>
-              <a:rPr sz="1250" b="1">
-                <a:solidFill>
-                  <a:srgbClr val="C2410C"/>
-                </a:solidFill>
-                <a:latin typeface="Consolas"/>
-              </a:rPr>
-              <a:t>use</a:t>
-            </a:r>
-          </a:p>
-        </p:txBody>
-      </p:sp>
-      <p:sp>
-        <p:nvSpPr>
-          <p:cNvPr id="11" name="TextBox 10"/>
-          <p:cNvSpPr txBox="1"/>
-          <p:nvPr/>
-        </p:nvSpPr>
-        <p:spPr>
-          <a:xfrm>
-            <a:off x="1737360" y="4553712"/>
-            <a:ext cx="4480560" cy="914400"/>
-          </a:xfrm>
-          <a:prstGeom prst="rect">
-            <a:avLst/>
-          </a:prstGeom>
-          <a:noFill/>
-        </p:spPr>
-        <p:txBody>
-          <a:bodyPr wrap="square" anchor="t">
-            <a:spAutoFit/>
-          </a:bodyPr>
-          <a:lstStyle/>
-          <a:p>
-            <a:pPr algn="l">
-              <a:lnSpc>
-                <a:spcPct val="114000"/>
-              </a:lnSpc>
-              <a:spcBef>
-                <a:spcPts val="0"/>
-              </a:spcBef>
-              <a:spcAft>
-                <a:spcPts val="0"/>
-              </a:spcAft>
-            </a:pPr>
-            <a:r>
-              <a:rPr sz="1500" b="0">
-                <a:solidFill>
-                  <a:srgbClr val="5A616E"/>
-                </a:solidFill>
-                <a:latin typeface="Calibri"/>
-              </a:rPr>
-              <a:t>That's how I'd choose 8B vs 70B, catch regressions, and set a launch quality bar — not by gut.</a:t>
-            </a:r>
-          </a:p>
-        </p:txBody>
-      </p:sp>
-      <p:sp>
-        <p:nvSpPr>
-          <p:cNvPr id="12" name="Rounded Rectangle 11"/>
+              <a:t>One north star, a funnel beneath it, guardrails around it.</a:t>
+            </a:r>
+          </a:p>
+        </p:txBody>
+      </p:sp>
+      <p:sp>
+        <p:nvSpPr>
+          <p:cNvPr id="6" name="Rounded Rectangle 5"/>
           <p:cNvSpPr/>
           <p:nvPr/>
         </p:nvSpPr>
         <p:spPr>
           <a:xfrm>
-            <a:off x="6537960" y="2331720"/>
-            <a:ext cx="4846320" cy="3200400"/>
+            <a:off x="822960" y="2194560"/>
+            <a:ext cx="10561320" cy="1143000"/>
           </a:xfrm>
           <a:prstGeom prst="roundRect">
             <a:avLst>
@@ -10661,11 +10647,11 @@
             </a:avLst>
           </a:prstGeom>
           <a:solidFill>
-            <a:srgbClr val="FFFFFF"/>
+            <a:srgbClr val="FBEFEA"/>
           </a:solidFill>
-          <a:ln w="12700">
+          <a:ln w="17780">
             <a:solidFill>
-              <a:srgbClr val="DEE1E7"/>
+              <a:srgbClr val="C2410C"/>
             </a:solidFill>
           </a:ln>
           <a:effectLst/>
@@ -10694,14 +10680,302 @@
       </p:sp>
       <p:sp>
         <p:nvSpPr>
+          <p:cNvPr id="7" name="TextBox 6"/>
+          <p:cNvSpPr txBox="1"/>
+          <p:nvPr/>
+        </p:nvSpPr>
+        <p:spPr>
+          <a:xfrm>
+            <a:off x="1097280" y="2331720"/>
+            <a:ext cx="10058400" cy="320040"/>
+          </a:xfrm>
+          <a:prstGeom prst="rect">
+            <a:avLst/>
+          </a:prstGeom>
+          <a:noFill/>
+        </p:spPr>
+        <p:txBody>
+          <a:bodyPr wrap="square" anchor="t">
+            <a:spAutoFit/>
+          </a:bodyPr>
+          <a:lstStyle/>
+          <a:p>
+            <a:pPr algn="l">
+              <a:lnSpc>
+                <a:spcPct val="106000"/>
+              </a:lnSpc>
+              <a:spcBef>
+                <a:spcPts val="0"/>
+              </a:spcBef>
+              <a:spcAft>
+                <a:spcPts val="0"/>
+              </a:spcAft>
+            </a:pPr>
+            <a:r>
+              <a:rPr sz="1100" b="1">
+                <a:solidFill>
+                  <a:srgbClr val="C2410C"/>
+                </a:solidFill>
+                <a:latin typeface="Consolas"/>
+              </a:rPr>
+              <a:t>NORTH-STAR METRIC</a:t>
+            </a:r>
+          </a:p>
+        </p:txBody>
+      </p:sp>
+      <p:sp>
+        <p:nvSpPr>
+          <p:cNvPr id="8" name="TextBox 7"/>
+          <p:cNvSpPr txBox="1"/>
+          <p:nvPr/>
+        </p:nvSpPr>
+        <p:spPr>
+          <a:xfrm>
+            <a:off x="1097280" y="2651760"/>
+            <a:ext cx="10058400" cy="457200"/>
+          </a:xfrm>
+          <a:prstGeom prst="rect">
+            <a:avLst/>
+          </a:prstGeom>
+          <a:noFill/>
+        </p:spPr>
+        <p:txBody>
+          <a:bodyPr wrap="square" anchor="t">
+            <a:spAutoFit/>
+          </a:bodyPr>
+          <a:lstStyle/>
+          <a:p>
+            <a:pPr algn="l">
+              <a:lnSpc>
+                <a:spcPct val="106000"/>
+              </a:lnSpc>
+              <a:spcBef>
+                <a:spcPts val="0"/>
+              </a:spcBef>
+              <a:spcAft>
+                <a:spcPts val="0"/>
+              </a:spcAft>
+            </a:pPr>
+            <a:r>
+              <a:rPr sz="2100" b="1">
+                <a:solidFill>
+                  <a:srgbClr val="16181F"/>
+                </a:solidFill>
+                <a:latin typeface="Calibri"/>
+              </a:rPr>
+              <a:t>Commitment Completion Rate</a:t>
+            </a:r>
+          </a:p>
+        </p:txBody>
+      </p:sp>
+      <p:sp>
+        <p:nvSpPr>
+          <p:cNvPr id="9" name="TextBox 8"/>
+          <p:cNvSpPr txBox="1"/>
+          <p:nvPr/>
+        </p:nvSpPr>
+        <p:spPr>
+          <a:xfrm>
+            <a:off x="1097280" y="3090672"/>
+            <a:ext cx="10058400" cy="274320"/>
+          </a:xfrm>
+          <a:prstGeom prst="rect">
+            <a:avLst/>
+          </a:prstGeom>
+          <a:noFill/>
+        </p:spPr>
+        <p:txBody>
+          <a:bodyPr wrap="square" anchor="t">
+            <a:spAutoFit/>
+          </a:bodyPr>
+          <a:lstStyle/>
+          <a:p>
+            <a:pPr algn="l">
+              <a:lnSpc>
+                <a:spcPct val="106000"/>
+              </a:lnSpc>
+              <a:spcBef>
+                <a:spcPts val="0"/>
+              </a:spcBef>
+              <a:spcAft>
+                <a:spcPts val="0"/>
+              </a:spcAft>
+            </a:pPr>
+            <a:r>
+              <a:rPr sz="1300" b="0">
+                <a:solidFill>
+                  <a:srgbClr val="5A616E"/>
+                </a:solidFill>
+                <a:latin typeface="Calibri"/>
+              </a:rPr>
+              <a:t>Of the action items surfaced, what share actually get done? Everything else is a proxy.</a:t>
+            </a:r>
+          </a:p>
+        </p:txBody>
+      </p:sp>
+      <p:sp>
+        <p:nvSpPr>
+          <p:cNvPr id="10" name="TextBox 9"/>
+          <p:cNvSpPr txBox="1"/>
+          <p:nvPr/>
+        </p:nvSpPr>
+        <p:spPr>
+          <a:xfrm>
+            <a:off x="822960" y="3611880"/>
+            <a:ext cx="5852160" cy="365760"/>
+          </a:xfrm>
+          <a:prstGeom prst="rect">
+            <a:avLst/>
+          </a:prstGeom>
+          <a:noFill/>
+        </p:spPr>
+        <p:txBody>
+          <a:bodyPr wrap="square" anchor="t">
+            <a:spAutoFit/>
+          </a:bodyPr>
+          <a:lstStyle/>
+          <a:p>
+            <a:pPr algn="l">
+              <a:lnSpc>
+                <a:spcPct val="106000"/>
+              </a:lnSpc>
+              <a:spcBef>
+                <a:spcPts val="0"/>
+              </a:spcBef>
+              <a:spcAft>
+                <a:spcPts val="0"/>
+              </a:spcAft>
+            </a:pPr>
+            <a:r>
+              <a:rPr sz="1100" b="1">
+                <a:solidFill>
+                  <a:srgbClr val="8B919D"/>
+                </a:solidFill>
+                <a:latin typeface="Consolas"/>
+              </a:rPr>
+              <a:t>INPUT METRICS — THE FUNNEL</a:t>
+            </a:r>
+          </a:p>
+        </p:txBody>
+      </p:sp>
+      <p:sp>
+        <p:nvSpPr>
+          <p:cNvPr id="11" name="TextBox 10"/>
+          <p:cNvSpPr txBox="1"/>
+          <p:nvPr/>
+        </p:nvSpPr>
+        <p:spPr>
+          <a:xfrm>
+            <a:off x="822960" y="3977639"/>
+            <a:ext cx="5669280" cy="365760"/>
+          </a:xfrm>
+          <a:prstGeom prst="rect">
+            <a:avLst/>
+          </a:prstGeom>
+          <a:noFill/>
+        </p:spPr>
+        <p:txBody>
+          <a:bodyPr wrap="square" anchor="t">
+            <a:spAutoFit/>
+          </a:bodyPr>
+          <a:lstStyle/>
+          <a:p>
+            <a:pPr algn="l">
+              <a:lnSpc>
+                <a:spcPct val="106000"/>
+              </a:lnSpc>
+              <a:spcBef>
+                <a:spcPts val="0"/>
+              </a:spcBef>
+              <a:spcAft>
+                <a:spcPts val="0"/>
+              </a:spcAft>
+            </a:pPr>
+            <a:r>
+              <a:rPr sz="1300" b="1">
+                <a:solidFill>
+                  <a:srgbClr val="C2410C"/>
+                </a:solidFill>
+                <a:latin typeface="Calibri"/>
+              </a:rPr>
+              <a:t>•  </a:t>
+            </a:r>
+            <a:r>
+              <a:rPr sz="1350" b="0">
+                <a:solidFill>
+                  <a:srgbClr val="5A616E"/>
+                </a:solidFill>
+                <a:latin typeface="Calibri"/>
+              </a:rPr>
+              <a:t>Activation: % sessions that extract → distribute ≥1 item</a:t>
+            </a:r>
+          </a:p>
+        </p:txBody>
+      </p:sp>
+      <p:sp>
+        <p:nvSpPr>
+          <p:cNvPr id="12" name="TextBox 11"/>
+          <p:cNvSpPr txBox="1"/>
+          <p:nvPr/>
+        </p:nvSpPr>
+        <p:spPr>
+          <a:xfrm>
+            <a:off x="822960" y="4361688"/>
+            <a:ext cx="5669280" cy="365760"/>
+          </a:xfrm>
+          <a:prstGeom prst="rect">
+            <a:avLst/>
+          </a:prstGeom>
+          <a:noFill/>
+        </p:spPr>
+        <p:txBody>
+          <a:bodyPr wrap="square" anchor="t">
+            <a:spAutoFit/>
+          </a:bodyPr>
+          <a:lstStyle/>
+          <a:p>
+            <a:pPr algn="l">
+              <a:lnSpc>
+                <a:spcPct val="106000"/>
+              </a:lnSpc>
+              <a:spcBef>
+                <a:spcPts val="0"/>
+              </a:spcBef>
+              <a:spcAft>
+                <a:spcPts val="0"/>
+              </a:spcAft>
+            </a:pPr>
+            <a:r>
+              <a:rPr sz="1300" b="1">
+                <a:solidFill>
+                  <a:srgbClr val="C2410C"/>
+                </a:solidFill>
+                <a:latin typeface="Calibri"/>
+              </a:rPr>
+              <a:t>•  </a:t>
+            </a:r>
+            <a:r>
+              <a:rPr sz="1350" b="0">
+                <a:solidFill>
+                  <a:srgbClr val="5A616E"/>
+                </a:solidFill>
+                <a:latin typeface="Calibri"/>
+              </a:rPr>
+              <a:t>Time-to-value: seconds paste → first send</a:t>
+            </a:r>
+          </a:p>
+        </p:txBody>
+      </p:sp>
+      <p:sp>
+        <p:nvSpPr>
           <p:cNvPr id="13" name="TextBox 12"/>
           <p:cNvSpPr txBox="1"/>
           <p:nvPr/>
         </p:nvSpPr>
         <p:spPr>
           <a:xfrm>
-            <a:off x="6812280" y="2542032"/>
-            <a:ext cx="4297680" cy="320040"/>
+            <a:off x="822960" y="4745736"/>
+            <a:ext cx="5669280" cy="365760"/>
           </a:xfrm>
           <a:prstGeom prst="rect">
             <a:avLst/>
@@ -10726,27 +11000,189 @@
               </a:spcAft>
             </a:pPr>
             <a:r>
+              <a:rPr sz="1300" b="1">
+                <a:solidFill>
+                  <a:srgbClr val="C2410C"/>
+                </a:solidFill>
+                <a:latin typeface="Calibri"/>
+              </a:rPr>
+              <a:t>•  </a:t>
+            </a:r>
+            <a:r>
+              <a:rPr sz="1350" b="0">
+                <a:solidFill>
+                  <a:srgbClr val="5A616E"/>
+                </a:solidFill>
+                <a:latin typeface="Calibri"/>
+              </a:rPr>
+              <a:t>Extraction quality: precision / recall vs. eval set</a:t>
+            </a:r>
+          </a:p>
+        </p:txBody>
+      </p:sp>
+      <p:sp>
+        <p:nvSpPr>
+          <p:cNvPr id="14" name="TextBox 13"/>
+          <p:cNvSpPr txBox="1"/>
+          <p:nvPr/>
+        </p:nvSpPr>
+        <p:spPr>
+          <a:xfrm>
+            <a:off x="822960" y="5129783"/>
+            <a:ext cx="5669280" cy="365760"/>
+          </a:xfrm>
+          <a:prstGeom prst="rect">
+            <a:avLst/>
+          </a:prstGeom>
+          <a:noFill/>
+        </p:spPr>
+        <p:txBody>
+          <a:bodyPr wrap="square" anchor="t">
+            <a:spAutoFit/>
+          </a:bodyPr>
+          <a:lstStyle/>
+          <a:p>
+            <a:pPr algn="l">
+              <a:lnSpc>
+                <a:spcPct val="106000"/>
+              </a:lnSpc>
+              <a:spcBef>
+                <a:spcPts val="0"/>
+              </a:spcBef>
+              <a:spcAft>
+                <a:spcPts val="0"/>
+              </a:spcAft>
+            </a:pPr>
+            <a:r>
+              <a:rPr sz="1300" b="1">
+                <a:solidFill>
+                  <a:srgbClr val="C2410C"/>
+                </a:solidFill>
+                <a:latin typeface="Calibri"/>
+              </a:rPr>
+              <a:t>•  </a:t>
+            </a:r>
+            <a:r>
+              <a:rPr sz="1350" b="0">
+                <a:solidFill>
+                  <a:srgbClr val="5A616E"/>
+                </a:solidFill>
+                <a:latin typeface="Calibri"/>
+              </a:rPr>
+              <a:t>Retention: repeat use / week</a:t>
+            </a:r>
+          </a:p>
+        </p:txBody>
+      </p:sp>
+      <p:sp>
+        <p:nvSpPr>
+          <p:cNvPr id="15" name="TextBox 14"/>
+          <p:cNvSpPr txBox="1"/>
+          <p:nvPr/>
+        </p:nvSpPr>
+        <p:spPr>
+          <a:xfrm>
+            <a:off x="6949440" y="3611880"/>
+            <a:ext cx="4389120" cy="365760"/>
+          </a:xfrm>
+          <a:prstGeom prst="rect">
+            <a:avLst/>
+          </a:prstGeom>
+          <a:noFill/>
+        </p:spPr>
+        <p:txBody>
+          <a:bodyPr wrap="square" anchor="t">
+            <a:spAutoFit/>
+          </a:bodyPr>
+          <a:lstStyle/>
+          <a:p>
+            <a:pPr algn="l">
+              <a:lnSpc>
+                <a:spcPct val="106000"/>
+              </a:lnSpc>
+              <a:spcBef>
+                <a:spcPts val="0"/>
+              </a:spcBef>
+              <a:spcAft>
+                <a:spcPts val="0"/>
+              </a:spcAft>
+            </a:pPr>
+            <a:r>
               <a:rPr sz="1100" b="1">
                 <a:solidFill>
+                  <a:srgbClr val="8B919D"/>
+                </a:solidFill>
+                <a:latin typeface="Consolas"/>
+              </a:rPr>
+              <a:t>GUARDRAIL METRICS</a:t>
+            </a:r>
+          </a:p>
+        </p:txBody>
+      </p:sp>
+      <p:sp>
+        <p:nvSpPr>
+          <p:cNvPr id="16" name="TextBox 15"/>
+          <p:cNvSpPr txBox="1"/>
+          <p:nvPr/>
+        </p:nvSpPr>
+        <p:spPr>
+          <a:xfrm>
+            <a:off x="6949440" y="3977639"/>
+            <a:ext cx="4389120" cy="365760"/>
+          </a:xfrm>
+          <a:prstGeom prst="rect">
+            <a:avLst/>
+          </a:prstGeom>
+          <a:noFill/>
+        </p:spPr>
+        <p:txBody>
+          <a:bodyPr wrap="square" anchor="t">
+            <a:spAutoFit/>
+          </a:bodyPr>
+          <a:lstStyle/>
+          <a:p>
+            <a:pPr algn="l">
+              <a:lnSpc>
+                <a:spcPct val="106000"/>
+              </a:lnSpc>
+              <a:spcBef>
+                <a:spcPts val="0"/>
+              </a:spcBef>
+              <a:spcAft>
+                <a:spcPts val="0"/>
+              </a:spcAft>
+            </a:pPr>
+            <a:r>
+              <a:rPr sz="1300" b="1">
+                <a:solidFill>
                   <a:srgbClr val="C2410C"/>
                 </a:solidFill>
-                <a:latin typeface="Consolas"/>
-              </a:rPr>
-              <a:t>THE COMPOUNDING LOOP</a:t>
-            </a:r>
-          </a:p>
-        </p:txBody>
-      </p:sp>
-      <p:sp>
-        <p:nvSpPr>
-          <p:cNvPr id="14" name="TextBox 13"/>
-          <p:cNvSpPr txBox="1"/>
-          <p:nvPr/>
-        </p:nvSpPr>
-        <p:spPr>
-          <a:xfrm>
-            <a:off x="6812280" y="2907792"/>
-            <a:ext cx="4297680" cy="457200"/>
+                <a:latin typeface="Calibri"/>
+              </a:rPr>
+              <a:t>•  </a:t>
+            </a:r>
+            <a:r>
+              <a:rPr sz="1350" b="0">
+                <a:solidFill>
+                  <a:srgbClr val="5A616E"/>
+                </a:solidFill>
+                <a:latin typeface="Calibri"/>
+              </a:rPr>
+              <a:t>Hallucination rate (invented items)</a:t>
+            </a:r>
+          </a:p>
+        </p:txBody>
+      </p:sp>
+      <p:sp>
+        <p:nvSpPr>
+          <p:cNvPr id="17" name="TextBox 16"/>
+          <p:cNvSpPr txBox="1"/>
+          <p:nvPr/>
+        </p:nvSpPr>
+        <p:spPr>
+          <a:xfrm>
+            <a:off x="6949440" y="4361688"/>
+            <a:ext cx="4389120" cy="365760"/>
           </a:xfrm>
           <a:prstGeom prst="rect">
             <a:avLst/>
@@ -10771,58 +11207,76 @@
               </a:spcAft>
             </a:pPr>
             <a:r>
-              <a:rPr sz="1800" b="1">
-                <a:solidFill>
-                  <a:srgbClr val="16181F"/>
+              <a:rPr sz="1300" b="1">
+                <a:solidFill>
+                  <a:srgbClr val="C2410C"/>
                 </a:solidFill>
                 <a:latin typeface="Calibri"/>
               </a:rPr>
-              <a:t>Every edit is a label</a:t>
-            </a:r>
-          </a:p>
-        </p:txBody>
-      </p:sp>
-      <p:sp>
-        <p:nvSpPr>
-          <p:cNvPr id="15" name="TextBox 14"/>
-          <p:cNvSpPr txBox="1"/>
-          <p:nvPr/>
-        </p:nvSpPr>
-        <p:spPr>
-          <a:xfrm>
-            <a:off x="6812280" y="3474720"/>
-            <a:ext cx="4297680" cy="1828800"/>
-          </a:xfrm>
-          <a:prstGeom prst="rect">
-            <a:avLst/>
-          </a:prstGeom>
-          <a:noFill/>
-        </p:spPr>
-        <p:txBody>
-          <a:bodyPr wrap="square" anchor="t">
-            <a:spAutoFit/>
-          </a:bodyPr>
-          <a:lstStyle/>
-          <a:p>
-            <a:pPr algn="l">
-              <a:lnSpc>
-                <a:spcPct val="116000"/>
-              </a:lnSpc>
-              <a:spcBef>
-                <a:spcPts val="0"/>
-              </a:spcBef>
-              <a:spcAft>
-                <a:spcPts val="0"/>
-              </a:spcAft>
-            </a:pPr>
-            <a:r>
-              <a:rPr sz="1400" b="0">
+              <a:t>•  </a:t>
+            </a:r>
+            <a:r>
+              <a:rPr sz="1350" b="0">
                 <a:solidFill>
                   <a:srgbClr val="5A616E"/>
                 </a:solidFill>
                 <a:latin typeface="Calibri"/>
               </a:rPr>
-              <a:t>Users correct the extracted items before sending. Those corrections are free, in-domain training data → fine-tune on accepted output → org-specific accuracy competitors can't match without the same data. The eval loop becomes the moat.</a:t>
+              <a:t>Edit rate (proxy for accuracy)</a:t>
+            </a:r>
+          </a:p>
+        </p:txBody>
+      </p:sp>
+      <p:sp>
+        <p:nvSpPr>
+          <p:cNvPr id="18" name="TextBox 17"/>
+          <p:cNvSpPr txBox="1"/>
+          <p:nvPr/>
+        </p:nvSpPr>
+        <p:spPr>
+          <a:xfrm>
+            <a:off x="6949440" y="4745736"/>
+            <a:ext cx="4389120" cy="365760"/>
+          </a:xfrm>
+          <a:prstGeom prst="rect">
+            <a:avLst/>
+          </a:prstGeom>
+          <a:noFill/>
+        </p:spPr>
+        <p:txBody>
+          <a:bodyPr wrap="square" anchor="t">
+            <a:spAutoFit/>
+          </a:bodyPr>
+          <a:lstStyle/>
+          <a:p>
+            <a:pPr algn="l">
+              <a:lnSpc>
+                <a:spcPct val="106000"/>
+              </a:lnSpc>
+              <a:spcBef>
+                <a:spcPts val="0"/>
+              </a:spcBef>
+              <a:spcAft>
+                <a:spcPts val="0"/>
+              </a:spcAft>
+            </a:pPr>
+            <a:r>
+              <a:rPr sz="1300" b="1">
+                <a:solidFill>
+                  <a:srgbClr val="C2410C"/>
+                </a:solidFill>
+                <a:latin typeface="Calibri"/>
+              </a:rPr>
+              <a:t>•  </a:t>
+            </a:r>
+            <a:r>
+              <a:rPr sz="1350" b="0">
+                <a:solidFill>
+                  <a:srgbClr val="5A616E"/>
+                </a:solidFill>
+                <a:latin typeface="Calibri"/>
+              </a:rPr>
+              <a:t>Error / failure rate</a:t>
             </a:r>
           </a:p>
         </p:txBody>
@@ -10973,7 +11427,7 @@
                 </a:solidFill>
                 <a:latin typeface="Consolas"/>
               </a:rPr>
-              <a:t>08 · PRIORITIZATION</a:t>
+              <a:t>07 · MAKING AI DECISIONS RIGOROUSLY</a:t>
             </a:r>
           </a:p>
         </p:txBody>
@@ -11018,7 +11472,7 @@
                 </a:solidFill>
                 <a:latin typeface="Calibri"/>
               </a:rPr>
-              <a:t>What I deliberately left out — and why that's the point.</a:t>
+              <a:t>Vibes don't scale. Evals do.</a:t>
             </a:r>
           </a:p>
         </p:txBody>
@@ -11031,8 +11485,53 @@
         </p:nvSpPr>
         <p:spPr>
           <a:xfrm>
-            <a:off x="822960" y="2011680"/>
-            <a:ext cx="10424160" cy="640080"/>
+            <a:off x="822960" y="2377440"/>
+            <a:ext cx="914400" cy="365760"/>
+          </a:xfrm>
+          <a:prstGeom prst="rect">
+            <a:avLst/>
+          </a:prstGeom>
+          <a:noFill/>
+        </p:spPr>
+        <p:txBody>
+          <a:bodyPr wrap="square" anchor="t">
+            <a:spAutoFit/>
+          </a:bodyPr>
+          <a:lstStyle/>
+          <a:p>
+            <a:pPr algn="l">
+              <a:lnSpc>
+                <a:spcPct val="106000"/>
+              </a:lnSpc>
+              <a:spcBef>
+                <a:spcPts val="0"/>
+              </a:spcBef>
+              <a:spcAft>
+                <a:spcPts val="0"/>
+              </a:spcAft>
+            </a:pPr>
+            <a:r>
+              <a:rPr sz="1250" b="1">
+                <a:solidFill>
+                  <a:srgbClr val="C2410C"/>
+                </a:solidFill>
+                <a:latin typeface="Consolas"/>
+              </a:rPr>
+              <a:t>set</a:t>
+            </a:r>
+          </a:p>
+        </p:txBody>
+      </p:sp>
+      <p:sp>
+        <p:nvSpPr>
+          <p:cNvPr id="7" name="TextBox 6"/>
+          <p:cNvSpPr txBox="1"/>
+          <p:nvPr/>
+        </p:nvSpPr>
+        <p:spPr>
+          <a:xfrm>
+            <a:off x="1737360" y="2359152"/>
+            <a:ext cx="4480560" cy="914400"/>
           </a:xfrm>
           <a:prstGeom prst="rect">
             <a:avLst/>
@@ -11057,27 +11556,207 @@
               </a:spcAft>
             </a:pPr>
             <a:r>
-              <a:rPr sz="1550" b="0">
+              <a:rPr sz="1500" b="0">
                 <a:solidFill>
                   <a:srgbClr val="5A616E"/>
                 </a:solidFill>
                 <a:latin typeface="Calibri"/>
               </a:rPr>
-              <a:t>MVP scope is a hypothesis test, not a feature checklist. I cut everything not needed to validate one thing: will people extract, then actually distribute?</a:t>
-            </a:r>
-          </a:p>
-        </p:txBody>
-      </p:sp>
-      <p:sp>
-        <p:nvSpPr>
-          <p:cNvPr id="7" name="Rounded Rectangle 6"/>
+              <a:t>Build a golden eval set: labelled transcripts with the “true” decisions and action items.</a:t>
+            </a:r>
+          </a:p>
+        </p:txBody>
+      </p:sp>
+      <p:sp>
+        <p:nvSpPr>
+          <p:cNvPr id="8" name="TextBox 7"/>
+          <p:cNvSpPr txBox="1"/>
+          <p:nvPr/>
+        </p:nvSpPr>
+        <p:spPr>
+          <a:xfrm>
+            <a:off x="822960" y="3474720"/>
+            <a:ext cx="914400" cy="365760"/>
+          </a:xfrm>
+          <a:prstGeom prst="rect">
+            <a:avLst/>
+          </a:prstGeom>
+          <a:noFill/>
+        </p:spPr>
+        <p:txBody>
+          <a:bodyPr wrap="square" anchor="t">
+            <a:spAutoFit/>
+          </a:bodyPr>
+          <a:lstStyle/>
+          <a:p>
+            <a:pPr algn="l">
+              <a:lnSpc>
+                <a:spcPct val="106000"/>
+              </a:lnSpc>
+              <a:spcBef>
+                <a:spcPts val="0"/>
+              </a:spcBef>
+              <a:spcAft>
+                <a:spcPts val="0"/>
+              </a:spcAft>
+            </a:pPr>
+            <a:r>
+              <a:rPr sz="1250" b="1">
+                <a:solidFill>
+                  <a:srgbClr val="C2410C"/>
+                </a:solidFill>
+                <a:latin typeface="Consolas"/>
+              </a:rPr>
+              <a:t>score</a:t>
+            </a:r>
+          </a:p>
+        </p:txBody>
+      </p:sp>
+      <p:sp>
+        <p:nvSpPr>
+          <p:cNvPr id="9" name="TextBox 8"/>
+          <p:cNvSpPr txBox="1"/>
+          <p:nvPr/>
+        </p:nvSpPr>
+        <p:spPr>
+          <a:xfrm>
+            <a:off x="1737360" y="3456432"/>
+            <a:ext cx="4480560" cy="914400"/>
+          </a:xfrm>
+          <a:prstGeom prst="rect">
+            <a:avLst/>
+          </a:prstGeom>
+          <a:noFill/>
+        </p:spPr>
+        <p:txBody>
+          <a:bodyPr wrap="square" anchor="t">
+            <a:spAutoFit/>
+          </a:bodyPr>
+          <a:lstStyle/>
+          <a:p>
+            <a:pPr algn="l">
+              <a:lnSpc>
+                <a:spcPct val="114000"/>
+              </a:lnSpc>
+              <a:spcBef>
+                <a:spcPts val="0"/>
+              </a:spcBef>
+              <a:spcAft>
+                <a:spcPts val="0"/>
+              </a:spcAft>
+            </a:pPr>
+            <a:r>
+              <a:rPr sz="1500" b="0">
+                <a:solidFill>
+                  <a:srgbClr val="5A616E"/>
+                </a:solidFill>
+                <a:latin typeface="Calibri"/>
+              </a:rPr>
+              <a:t>Measure precision (did we invent tasks?), recall (did we miss commitments?), and field accuracy.</a:t>
+            </a:r>
+          </a:p>
+        </p:txBody>
+      </p:sp>
+      <p:sp>
+        <p:nvSpPr>
+          <p:cNvPr id="10" name="TextBox 9"/>
+          <p:cNvSpPr txBox="1"/>
+          <p:nvPr/>
+        </p:nvSpPr>
+        <p:spPr>
+          <a:xfrm>
+            <a:off x="822960" y="4572000"/>
+            <a:ext cx="914400" cy="365760"/>
+          </a:xfrm>
+          <a:prstGeom prst="rect">
+            <a:avLst/>
+          </a:prstGeom>
+          <a:noFill/>
+        </p:spPr>
+        <p:txBody>
+          <a:bodyPr wrap="square" anchor="t">
+            <a:spAutoFit/>
+          </a:bodyPr>
+          <a:lstStyle/>
+          <a:p>
+            <a:pPr algn="l">
+              <a:lnSpc>
+                <a:spcPct val="106000"/>
+              </a:lnSpc>
+              <a:spcBef>
+                <a:spcPts val="0"/>
+              </a:spcBef>
+              <a:spcAft>
+                <a:spcPts val="0"/>
+              </a:spcAft>
+            </a:pPr>
+            <a:r>
+              <a:rPr sz="1250" b="1">
+                <a:solidFill>
+                  <a:srgbClr val="C2410C"/>
+                </a:solidFill>
+                <a:latin typeface="Consolas"/>
+              </a:rPr>
+              <a:t>use</a:t>
+            </a:r>
+          </a:p>
+        </p:txBody>
+      </p:sp>
+      <p:sp>
+        <p:nvSpPr>
+          <p:cNvPr id="11" name="TextBox 10"/>
+          <p:cNvSpPr txBox="1"/>
+          <p:nvPr/>
+        </p:nvSpPr>
+        <p:spPr>
+          <a:xfrm>
+            <a:off x="1737360" y="4553712"/>
+            <a:ext cx="4480560" cy="914400"/>
+          </a:xfrm>
+          <a:prstGeom prst="rect">
+            <a:avLst/>
+          </a:prstGeom>
+          <a:noFill/>
+        </p:spPr>
+        <p:txBody>
+          <a:bodyPr wrap="square" anchor="t">
+            <a:spAutoFit/>
+          </a:bodyPr>
+          <a:lstStyle/>
+          <a:p>
+            <a:pPr algn="l">
+              <a:lnSpc>
+                <a:spcPct val="114000"/>
+              </a:lnSpc>
+              <a:spcBef>
+                <a:spcPts val="0"/>
+              </a:spcBef>
+              <a:spcAft>
+                <a:spcPts val="0"/>
+              </a:spcAft>
+            </a:pPr>
+            <a:r>
+              <a:rPr sz="1500" b="0">
+                <a:solidFill>
+                  <a:srgbClr val="5A616E"/>
+                </a:solidFill>
+                <a:latin typeface="Calibri"/>
+              </a:rPr>
+              <a:t>That's how I'd choose 8B vs 70B, catch regressions, and set a launch quality bar — not by gut.</a:t>
+            </a:r>
+          </a:p>
+        </p:txBody>
+      </p:sp>
+      <p:sp>
+        <p:nvSpPr>
+          <p:cNvPr id="12" name="Rounded Rectangle 11"/>
           <p:cNvSpPr/>
           <p:nvPr/>
         </p:nvSpPr>
         <p:spPr>
           <a:xfrm>
-            <a:off x="822960" y="2926080"/>
-            <a:ext cx="5120640" cy="1463040"/>
+            <a:off x="6537960" y="2331720"/>
+            <a:ext cx="4846320" cy="3200400"/>
           </a:xfrm>
           <a:prstGeom prst="roundRect">
             <a:avLst>
@@ -11118,14 +11797,14 @@
       </p:sp>
       <p:sp>
         <p:nvSpPr>
-          <p:cNvPr id="8" name="TextBox 7"/>
-          <p:cNvSpPr txBox="1"/>
-          <p:nvPr/>
-        </p:nvSpPr>
-        <p:spPr>
-          <a:xfrm>
-            <a:off x="1078992" y="3090672"/>
-            <a:ext cx="4572000" cy="320040"/>
+          <p:cNvPr id="13" name="TextBox 12"/>
+          <p:cNvSpPr txBox="1"/>
+          <p:nvPr/>
+        </p:nvSpPr>
+        <p:spPr>
+          <a:xfrm>
+            <a:off x="6812280" y="2542032"/>
+            <a:ext cx="4297680" cy="320040"/>
           </a:xfrm>
           <a:prstGeom prst="rect">
             <a:avLst/>
@@ -11156,466 +11835,97 @@
                 </a:solidFill>
                 <a:latin typeface="Consolas"/>
               </a:rPr>
-              <a:t>CUT · PERSISTENCE</a:t>
-            </a:r>
-          </a:p>
-        </p:txBody>
-      </p:sp>
-      <p:sp>
-        <p:nvSpPr>
-          <p:cNvPr id="9" name="TextBox 8"/>
-          <p:cNvSpPr txBox="1"/>
-          <p:nvPr/>
-        </p:nvSpPr>
-        <p:spPr>
-          <a:xfrm>
-            <a:off x="1078992" y="3429000"/>
-            <a:ext cx="4617720" cy="868680"/>
-          </a:xfrm>
-          <a:prstGeom prst="rect">
-            <a:avLst/>
-          </a:prstGeom>
-          <a:noFill/>
-        </p:spPr>
-        <p:txBody>
-          <a:bodyPr wrap="square" anchor="t">
-            <a:spAutoFit/>
-          </a:bodyPr>
-          <a:lstStyle/>
-          <a:p>
-            <a:pPr algn="l">
-              <a:lnSpc>
-                <a:spcPct val="112000"/>
-              </a:lnSpc>
-              <a:spcBef>
-                <a:spcPts val="0"/>
-              </a:spcBef>
-              <a:spcAft>
-                <a:spcPts val="0"/>
-              </a:spcAft>
-            </a:pPr>
-            <a:r>
-              <a:rPr sz="1300" b="0">
+              <a:t>THE COMPOUNDING LOOP</a:t>
+            </a:r>
+          </a:p>
+        </p:txBody>
+      </p:sp>
+      <p:sp>
+        <p:nvSpPr>
+          <p:cNvPr id="14" name="TextBox 13"/>
+          <p:cNvSpPr txBox="1"/>
+          <p:nvPr/>
+        </p:nvSpPr>
+        <p:spPr>
+          <a:xfrm>
+            <a:off x="6812280" y="2907792"/>
+            <a:ext cx="4297680" cy="457200"/>
+          </a:xfrm>
+          <a:prstGeom prst="rect">
+            <a:avLst/>
+          </a:prstGeom>
+          <a:noFill/>
+        </p:spPr>
+        <p:txBody>
+          <a:bodyPr wrap="square" anchor="t">
+            <a:spAutoFit/>
+          </a:bodyPr>
+          <a:lstStyle/>
+          <a:p>
+            <a:pPr algn="l">
+              <a:lnSpc>
+                <a:spcPct val="106000"/>
+              </a:lnSpc>
+              <a:spcBef>
+                <a:spcPts val="0"/>
+              </a:spcBef>
+              <a:spcAft>
+                <a:spcPts val="0"/>
+              </a:spcAft>
+            </a:pPr>
+            <a:r>
+              <a:rPr sz="1800" b="1">
+                <a:solidFill>
+                  <a:srgbClr val="16181F"/>
+                </a:solidFill>
+                <a:latin typeface="Calibri"/>
+              </a:rPr>
+              <a:t>Every edit is a label</a:t>
+            </a:r>
+          </a:p>
+        </p:txBody>
+      </p:sp>
+      <p:sp>
+        <p:nvSpPr>
+          <p:cNvPr id="15" name="TextBox 14"/>
+          <p:cNvSpPr txBox="1"/>
+          <p:nvPr/>
+        </p:nvSpPr>
+        <p:spPr>
+          <a:xfrm>
+            <a:off x="6812280" y="3474720"/>
+            <a:ext cx="4297680" cy="1828800"/>
+          </a:xfrm>
+          <a:prstGeom prst="rect">
+            <a:avLst/>
+          </a:prstGeom>
+          <a:noFill/>
+        </p:spPr>
+        <p:txBody>
+          <a:bodyPr wrap="square" anchor="t">
+            <a:spAutoFit/>
+          </a:bodyPr>
+          <a:lstStyle/>
+          <a:p>
+            <a:pPr algn="l">
+              <a:lnSpc>
+                <a:spcPct val="116000"/>
+              </a:lnSpc>
+              <a:spcBef>
+                <a:spcPts val="0"/>
+              </a:spcBef>
+              <a:spcAft>
+                <a:spcPts val="0"/>
+              </a:spcAft>
+            </a:pPr>
+            <a:r>
+              <a:rPr sz="1400" b="0">
                 <a:solidFill>
                   <a:srgbClr val="5A616E"/>
                 </a:solidFill>
                 <a:latin typeface="Calibri"/>
               </a:rPr>
-              <a:t>No database. A refresh clears everything — and “no data stored” removes privacy friction for testers.</a:t>
-            </a:r>
-          </a:p>
-        </p:txBody>
-      </p:sp>
-      <p:sp>
-        <p:nvSpPr>
-          <p:cNvPr id="10" name="Rounded Rectangle 9"/>
-          <p:cNvSpPr/>
-          <p:nvPr/>
-        </p:nvSpPr>
-        <p:spPr>
-          <a:xfrm>
-            <a:off x="6263640" y="2926080"/>
-            <a:ext cx="5120640" cy="1463040"/>
-          </a:xfrm>
-          <a:prstGeom prst="roundRect">
-            <a:avLst>
-              <a:gd name="adj" fmla="val 4500"/>
-            </a:avLst>
-          </a:prstGeom>
-          <a:solidFill>
-            <a:srgbClr val="FFFFFF"/>
-          </a:solidFill>
-          <a:ln w="12700">
-            <a:solidFill>
-              <a:srgbClr val="DEE1E7"/>
-            </a:solidFill>
-          </a:ln>
-          <a:effectLst/>
-        </p:spPr>
-        <p:style>
-          <a:lnRef idx="1">
-            <a:schemeClr val="accent1"/>
-          </a:lnRef>
-          <a:fillRef idx="3">
-            <a:schemeClr val="accent1"/>
-          </a:fillRef>
-          <a:effectRef idx="2">
-            <a:schemeClr val="accent1"/>
-          </a:effectRef>
-          <a:fontRef idx="minor">
-            <a:schemeClr val="lt1"/>
-          </a:fontRef>
-        </p:style>
-        <p:txBody>
-          <a:bodyPr rtlCol="0" anchor="ctr"/>
-          <a:lstStyle/>
-          <a:p>
-            <a:pPr algn="ctr"/>
-          </a:p>
-        </p:txBody>
-      </p:sp>
-      <p:sp>
-        <p:nvSpPr>
-          <p:cNvPr id="11" name="TextBox 10"/>
-          <p:cNvSpPr txBox="1"/>
-          <p:nvPr/>
-        </p:nvSpPr>
-        <p:spPr>
-          <a:xfrm>
-            <a:off x="6519672" y="3090672"/>
-            <a:ext cx="4572000" cy="320040"/>
-          </a:xfrm>
-          <a:prstGeom prst="rect">
-            <a:avLst/>
-          </a:prstGeom>
-          <a:noFill/>
-        </p:spPr>
-        <p:txBody>
-          <a:bodyPr wrap="square" anchor="t">
-            <a:spAutoFit/>
-          </a:bodyPr>
-          <a:lstStyle/>
-          <a:p>
-            <a:pPr algn="l">
-              <a:lnSpc>
-                <a:spcPct val="106000"/>
-              </a:lnSpc>
-              <a:spcBef>
-                <a:spcPts val="0"/>
-              </a:spcBef>
-              <a:spcAft>
-                <a:spcPts val="0"/>
-              </a:spcAft>
-            </a:pPr>
-            <a:r>
-              <a:rPr sz="1100" b="1">
-                <a:solidFill>
-                  <a:srgbClr val="C2410C"/>
-                </a:solidFill>
-                <a:latin typeface="Consolas"/>
-              </a:rPr>
-              <a:t>CUT · REAL INTEGRATIONS</a:t>
-            </a:r>
-          </a:p>
-        </p:txBody>
-      </p:sp>
-      <p:sp>
-        <p:nvSpPr>
-          <p:cNvPr id="12" name="TextBox 11"/>
-          <p:cNvSpPr txBox="1"/>
-          <p:nvPr/>
-        </p:nvSpPr>
-        <p:spPr>
-          <a:xfrm>
-            <a:off x="6519672" y="3429000"/>
-            <a:ext cx="4617720" cy="868680"/>
-          </a:xfrm>
-          <a:prstGeom prst="rect">
-            <a:avLst/>
-          </a:prstGeom>
-          <a:noFill/>
-        </p:spPr>
-        <p:txBody>
-          <a:bodyPr wrap="square" anchor="t">
-            <a:spAutoFit/>
-          </a:bodyPr>
-          <a:lstStyle/>
-          <a:p>
-            <a:pPr algn="l">
-              <a:lnSpc>
-                <a:spcPct val="112000"/>
-              </a:lnSpc>
-              <a:spcBef>
-                <a:spcPts val="0"/>
-              </a:spcBef>
-              <a:spcAft>
-                <a:spcPts val="0"/>
-              </a:spcAft>
-            </a:pPr>
-            <a:r>
-              <a:rPr sz="1300" b="0">
-                <a:solidFill>
-                  <a:srgbClr val="5A616E"/>
-                </a:solidFill>
-                <a:latin typeface="Calibri"/>
-              </a:rPr>
-              <a:t>The URL-prefill trick proves value without OAuth. Real APIs are a scaling investment, made once the loop is proven.</a:t>
-            </a:r>
-          </a:p>
-        </p:txBody>
-      </p:sp>
-      <p:sp>
-        <p:nvSpPr>
-          <p:cNvPr id="13" name="Rounded Rectangle 12"/>
-          <p:cNvSpPr/>
-          <p:nvPr/>
-        </p:nvSpPr>
-        <p:spPr>
-          <a:xfrm>
-            <a:off x="822960" y="4526280"/>
-            <a:ext cx="5120640" cy="1463040"/>
-          </a:xfrm>
-          <a:prstGeom prst="roundRect">
-            <a:avLst>
-              <a:gd name="adj" fmla="val 4500"/>
-            </a:avLst>
-          </a:prstGeom>
-          <a:solidFill>
-            <a:srgbClr val="FFFFFF"/>
-          </a:solidFill>
-          <a:ln w="12700">
-            <a:solidFill>
-              <a:srgbClr val="DEE1E7"/>
-            </a:solidFill>
-          </a:ln>
-          <a:effectLst/>
-        </p:spPr>
-        <p:style>
-          <a:lnRef idx="1">
-            <a:schemeClr val="accent1"/>
-          </a:lnRef>
-          <a:fillRef idx="3">
-            <a:schemeClr val="accent1"/>
-          </a:fillRef>
-          <a:effectRef idx="2">
-            <a:schemeClr val="accent1"/>
-          </a:effectRef>
-          <a:fontRef idx="minor">
-            <a:schemeClr val="lt1"/>
-          </a:fontRef>
-        </p:style>
-        <p:txBody>
-          <a:bodyPr rtlCol="0" anchor="ctr"/>
-          <a:lstStyle/>
-          <a:p>
-            <a:pPr algn="ctr"/>
-          </a:p>
-        </p:txBody>
-      </p:sp>
-      <p:sp>
-        <p:nvSpPr>
-          <p:cNvPr id="14" name="TextBox 13"/>
-          <p:cNvSpPr txBox="1"/>
-          <p:nvPr/>
-        </p:nvSpPr>
-        <p:spPr>
-          <a:xfrm>
-            <a:off x="1078992" y="4690872"/>
-            <a:ext cx="4572000" cy="320040"/>
-          </a:xfrm>
-          <a:prstGeom prst="rect">
-            <a:avLst/>
-          </a:prstGeom>
-          <a:noFill/>
-        </p:spPr>
-        <p:txBody>
-          <a:bodyPr wrap="square" anchor="t">
-            <a:spAutoFit/>
-          </a:bodyPr>
-          <a:lstStyle/>
-          <a:p>
-            <a:pPr algn="l">
-              <a:lnSpc>
-                <a:spcPct val="106000"/>
-              </a:lnSpc>
-              <a:spcBef>
-                <a:spcPts val="0"/>
-              </a:spcBef>
-              <a:spcAft>
-                <a:spcPts val="0"/>
-              </a:spcAft>
-            </a:pPr>
-            <a:r>
-              <a:rPr sz="1100" b="1">
-                <a:solidFill>
-                  <a:srgbClr val="C2410C"/>
-                </a:solidFill>
-                <a:latin typeface="Consolas"/>
-              </a:rPr>
-              <a:t>CUT · ACCOUNTS &amp; TEAMS</a:t>
-            </a:r>
-          </a:p>
-        </p:txBody>
-      </p:sp>
-      <p:sp>
-        <p:nvSpPr>
-          <p:cNvPr id="15" name="TextBox 14"/>
-          <p:cNvSpPr txBox="1"/>
-          <p:nvPr/>
-        </p:nvSpPr>
-        <p:spPr>
-          <a:xfrm>
-            <a:off x="1078992" y="5029200"/>
-            <a:ext cx="4617720" cy="868680"/>
-          </a:xfrm>
-          <a:prstGeom prst="rect">
-            <a:avLst/>
-          </a:prstGeom>
-          <a:noFill/>
-        </p:spPr>
-        <p:txBody>
-          <a:bodyPr wrap="square" anchor="t">
-            <a:spAutoFit/>
-          </a:bodyPr>
-          <a:lstStyle/>
-          <a:p>
-            <a:pPr algn="l">
-              <a:lnSpc>
-                <a:spcPct val="112000"/>
-              </a:lnSpc>
-              <a:spcBef>
-                <a:spcPts val="0"/>
-              </a:spcBef>
-              <a:spcAft>
-                <a:spcPts val="0"/>
-              </a:spcAft>
-            </a:pPr>
-            <a:r>
-              <a:rPr sz="1300" b="0">
-                <a:solidFill>
-                  <a:srgbClr val="5A616E"/>
-                </a:solidFill>
-                <a:latin typeface="Calibri"/>
-              </a:rPr>
-              <a:t>Single-session, no login. Multi-user is a growth concern, not a validation one.</a:t>
-            </a:r>
-          </a:p>
-        </p:txBody>
-      </p:sp>
-      <p:sp>
-        <p:nvSpPr>
-          <p:cNvPr id="16" name="Rounded Rectangle 15"/>
-          <p:cNvSpPr/>
-          <p:nvPr/>
-        </p:nvSpPr>
-        <p:spPr>
-          <a:xfrm>
-            <a:off x="6263640" y="4526280"/>
-            <a:ext cx="5120640" cy="1463040"/>
-          </a:xfrm>
-          <a:prstGeom prst="roundRect">
-            <a:avLst>
-              <a:gd name="adj" fmla="val 4500"/>
-            </a:avLst>
-          </a:prstGeom>
-          <a:solidFill>
-            <a:srgbClr val="FFFFFF"/>
-          </a:solidFill>
-          <a:ln w="12700">
-            <a:solidFill>
-              <a:srgbClr val="DEE1E7"/>
-            </a:solidFill>
-          </a:ln>
-          <a:effectLst/>
-        </p:spPr>
-        <p:style>
-          <a:lnRef idx="1">
-            <a:schemeClr val="accent1"/>
-          </a:lnRef>
-          <a:fillRef idx="3">
-            <a:schemeClr val="accent1"/>
-          </a:fillRef>
-          <a:effectRef idx="2">
-            <a:schemeClr val="accent1"/>
-          </a:effectRef>
-          <a:fontRef idx="minor">
-            <a:schemeClr val="lt1"/>
-          </a:fontRef>
-        </p:style>
-        <p:txBody>
-          <a:bodyPr rtlCol="0" anchor="ctr"/>
-          <a:lstStyle/>
-          <a:p>
-            <a:pPr algn="ctr"/>
-          </a:p>
-        </p:txBody>
-      </p:sp>
-      <p:sp>
-        <p:nvSpPr>
-          <p:cNvPr id="17" name="TextBox 16"/>
-          <p:cNvSpPr txBox="1"/>
-          <p:nvPr/>
-        </p:nvSpPr>
-        <p:spPr>
-          <a:xfrm>
-            <a:off x="6519672" y="4690872"/>
-            <a:ext cx="4572000" cy="320040"/>
-          </a:xfrm>
-          <a:prstGeom prst="rect">
-            <a:avLst/>
-          </a:prstGeom>
-          <a:noFill/>
-        </p:spPr>
-        <p:txBody>
-          <a:bodyPr wrap="square" anchor="t">
-            <a:spAutoFit/>
-          </a:bodyPr>
-          <a:lstStyle/>
-          <a:p>
-            <a:pPr algn="l">
-              <a:lnSpc>
-                <a:spcPct val="106000"/>
-              </a:lnSpc>
-              <a:spcBef>
-                <a:spcPts val="0"/>
-              </a:spcBef>
-              <a:spcAft>
-                <a:spcPts val="0"/>
-              </a:spcAft>
-            </a:pPr>
-            <a:r>
-              <a:rPr sz="1100" b="1">
-                <a:solidFill>
-                  <a:srgbClr val="C2410C"/>
-                </a:solidFill>
-                <a:latin typeface="Consolas"/>
-              </a:rPr>
-              <a:t>KEPT · THE CORE LOOP + TRUST</a:t>
-            </a:r>
-          </a:p>
-        </p:txBody>
-      </p:sp>
-      <p:sp>
-        <p:nvSpPr>
-          <p:cNvPr id="18" name="TextBox 17"/>
-          <p:cNvSpPr txBox="1"/>
-          <p:nvPr/>
-        </p:nvSpPr>
-        <p:spPr>
-          <a:xfrm>
-            <a:off x="6519672" y="5029200"/>
-            <a:ext cx="4617720" cy="868680"/>
-          </a:xfrm>
-          <a:prstGeom prst="rect">
-            <a:avLst/>
-          </a:prstGeom>
-          <a:noFill/>
-        </p:spPr>
-        <p:txBody>
-          <a:bodyPr wrap="square" anchor="t">
-            <a:spAutoFit/>
-          </a:bodyPr>
-          <a:lstStyle/>
-          <a:p>
-            <a:pPr algn="l">
-              <a:lnSpc>
-                <a:spcPct val="112000"/>
-              </a:lnSpc>
-              <a:spcBef>
-                <a:spcPts val="0"/>
-              </a:spcBef>
-              <a:spcAft>
-                <a:spcPts val="0"/>
-              </a:spcAft>
-            </a:pPr>
-            <a:r>
-              <a:rPr sz="1300" b="0">
-                <a:solidFill>
-                  <a:srgbClr val="5A616E"/>
-                </a:solidFill>
-                <a:latin typeface="Calibri"/>
-              </a:rPr>
-              <a:t>Extraction reliability, one-click distribution, honest guardrails, 100%-tested logic.</a:t>
+              <a:t>Users correct the extracted items before sending. Those corrections are free, in-domain training data → fine-tune on accepted output → org-specific accuracy competitors can't match without the same data. The eval loop becomes the moat.</a:t>
             </a:r>
           </a:p>
         </p:txBody>

--- a/docs/postmeet-pitch.pptx
+++ b/docs/postmeet-pitch.pptx
@@ -6215,7 +6215,7 @@
                 </a:solidFill>
                 <a:latin typeface="Consolas"/>
               </a:rPr>
-              <a:t>   ·   postmeet.onrender.com   ·   github.com/Shubham-33/postmeet</a:t>
+              <a:t>   ·   postmeet.onrender.com   ·   shubham-33.github.io/postmeet/case-study/</a:t>
             </a:r>
           </a:p>
         </p:txBody>
@@ -6366,7 +6366,7 @@
                 </a:solidFill>
                 <a:latin typeface="Consolas"/>
               </a:rPr>
-              <a:t>01 · THE PROBLEM</a:t>
+              <a:t>—  SEE IT WORK</a:t>
             </a:r>
           </a:p>
         </p:txBody>
@@ -6405,27 +6405,95 @@
               </a:spcAft>
             </a:pPr>
             <a:r>
-              <a:rPr sz="3300" b="1">
+              <a:rPr sz="2800" b="1">
                 <a:solidFill>
                   <a:srgbClr val="16181F"/>
                 </a:solidFill>
                 <a:latin typeface="Calibri"/>
               </a:rPr>
-              <a:t>Meetings manufacture commitments. Then the commitments go missing.</a:t>
-            </a:r>
-          </a:p>
-        </p:txBody>
-      </p:sp>
-      <p:sp>
-        <p:nvSpPr>
-          <p:cNvPr id="6" name="TextBox 5"/>
-          <p:cNvSpPr txBox="1"/>
-          <p:nvPr/>
-        </p:nvSpPr>
-        <p:spPr>
-          <a:xfrm>
-            <a:off x="822960" y="2286000"/>
-            <a:ext cx="4023360" cy="1280160"/>
+              <a:t>Paste a transcript → the board writes itself.</a:t>
+            </a:r>
+          </a:p>
+        </p:txBody>
+      </p:sp>
+      <p:pic>
+        <p:nvPicPr>
+          <p:cNvPr id="6" name="Picture 5" descr="postmeet-screenshot.png"/>
+          <p:cNvPicPr>
+            <a:picLocks noChangeAspect="1"/>
+          </p:cNvPicPr>
+          <p:nvPr/>
+        </p:nvPicPr>
+        <p:blipFill>
+          <a:blip r:embed="rId2"/>
+          <a:stretch>
+            <a:fillRect/>
+          </a:stretch>
+        </p:blipFill>
+        <p:spPr>
+          <a:xfrm>
+            <a:off x="3013488" y="1645920"/>
+            <a:ext cx="6164719" cy="4709160"/>
+          </a:xfrm>
+          <a:prstGeom prst="rect">
+            <a:avLst/>
+          </a:prstGeom>
+        </p:spPr>
+      </p:pic>
+      <p:sp>
+        <p:nvSpPr>
+          <p:cNvPr id="7" name="Rectangle 6"/>
+          <p:cNvSpPr/>
+          <p:nvPr/>
+        </p:nvSpPr>
+        <p:spPr>
+          <a:xfrm>
+            <a:off x="3013488" y="1645920"/>
+            <a:ext cx="6164718" cy="4709160"/>
+          </a:xfrm>
+          <a:prstGeom prst="rect">
+            <a:avLst/>
+          </a:prstGeom>
+          <a:noFill/>
+          <a:ln w="12700">
+            <a:solidFill>
+              <a:srgbClr val="DEE1E7"/>
+            </a:solidFill>
+          </a:ln>
+          <a:effectLst/>
+        </p:spPr>
+        <p:style>
+          <a:lnRef idx="1">
+            <a:schemeClr val="accent1"/>
+          </a:lnRef>
+          <a:fillRef idx="3">
+            <a:schemeClr val="accent1"/>
+          </a:fillRef>
+          <a:effectRef idx="2">
+            <a:schemeClr val="accent1"/>
+          </a:effectRef>
+          <a:fontRef idx="minor">
+            <a:schemeClr val="lt1"/>
+          </a:fontRef>
+        </p:style>
+        <p:txBody>
+          <a:bodyPr rtlCol="0" anchor="ctr"/>
+          <a:lstStyle/>
+          <a:p>
+            <a:pPr algn="ctr"/>
+          </a:p>
+        </p:txBody>
+      </p:sp>
+      <p:sp>
+        <p:nvSpPr>
+          <p:cNvPr id="8" name="TextBox 7"/>
+          <p:cNvSpPr txBox="1"/>
+          <p:nvPr/>
+        </p:nvSpPr>
+        <p:spPr>
+          <a:xfrm>
+            <a:off x="822960" y="6419088"/>
+            <a:ext cx="10515600" cy="320040"/>
           </a:xfrm>
           <a:prstGeom prst="rect">
             <a:avLst/>
@@ -6450,373 +6518,13 @@
               </a:spcAft>
             </a:pPr>
             <a:r>
-              <a:rPr sz="6600" b="1">
-                <a:solidFill>
-                  <a:srgbClr val="C2410C"/>
+              <a:rPr sz="1050" b="0">
+                <a:solidFill>
+                  <a:srgbClr val="8B919D"/>
                 </a:solidFill>
                 <a:latin typeface="Calibri"/>
               </a:rPr>
-              <a:t>~70%</a:t>
-            </a:r>
-          </a:p>
-        </p:txBody>
-      </p:sp>
-      <p:sp>
-        <p:nvSpPr>
-          <p:cNvPr id="7" name="TextBox 6"/>
-          <p:cNvSpPr txBox="1"/>
-          <p:nvPr/>
-        </p:nvSpPr>
-        <p:spPr>
-          <a:xfrm>
-            <a:off x="822960" y="3566160"/>
-            <a:ext cx="4480560" cy="1737360"/>
-          </a:xfrm>
-          <a:prstGeom prst="rect">
-            <a:avLst/>
-          </a:prstGeom>
-          <a:noFill/>
-        </p:spPr>
-        <p:txBody>
-          <a:bodyPr wrap="square" anchor="t">
-            <a:spAutoFit/>
-          </a:bodyPr>
-          <a:lstStyle/>
-          <a:p>
-            <a:pPr algn="l">
-              <a:lnSpc>
-                <a:spcPct val="116000"/>
-              </a:lnSpc>
-              <a:spcBef>
-                <a:spcPts val="0"/>
-              </a:spcBef>
-              <a:spcAft>
-                <a:spcPts val="0"/>
-              </a:spcAft>
-            </a:pPr>
-            <a:r>
-              <a:rPr sz="1550" b="0">
-                <a:solidFill>
-                  <a:srgbClr val="5A616E"/>
-                </a:solidFill>
-                <a:latin typeface="Calibri"/>
-              </a:rPr>
-              <a:t>of meeting action items are never completed — they live in someone's notes, a Slack thread, a doc nobody reopens.</a:t>
-            </a:r>
-          </a:p>
-        </p:txBody>
-      </p:sp>
-      <p:sp>
-        <p:nvSpPr>
-          <p:cNvPr id="8" name="TextBox 7"/>
-          <p:cNvSpPr txBox="1"/>
-          <p:nvPr/>
-        </p:nvSpPr>
-        <p:spPr>
-          <a:xfrm>
-            <a:off x="5486400" y="2331720"/>
-            <a:ext cx="914400" cy="365760"/>
-          </a:xfrm>
-          <a:prstGeom prst="rect">
-            <a:avLst/>
-          </a:prstGeom>
-          <a:noFill/>
-        </p:spPr>
-        <p:txBody>
-          <a:bodyPr wrap="square" anchor="t">
-            <a:spAutoFit/>
-          </a:bodyPr>
-          <a:lstStyle/>
-          <a:p>
-            <a:pPr algn="l">
-              <a:lnSpc>
-                <a:spcPct val="106000"/>
-              </a:lnSpc>
-              <a:spcBef>
-                <a:spcPts val="0"/>
-              </a:spcBef>
-              <a:spcAft>
-                <a:spcPts val="0"/>
-              </a:spcAft>
-            </a:pPr>
-            <a:r>
-              <a:rPr sz="1250" b="1">
-                <a:solidFill>
-                  <a:srgbClr val="C2410C"/>
-                </a:solidFill>
-                <a:latin typeface="Consolas"/>
-              </a:rPr>
-              <a:t>who</a:t>
-            </a:r>
-          </a:p>
-        </p:txBody>
-      </p:sp>
-      <p:sp>
-        <p:nvSpPr>
-          <p:cNvPr id="9" name="TextBox 8"/>
-          <p:cNvSpPr txBox="1"/>
-          <p:nvPr/>
-        </p:nvSpPr>
-        <p:spPr>
-          <a:xfrm>
-            <a:off x="6400800" y="2313432"/>
-            <a:ext cx="4937760" cy="1005840"/>
-          </a:xfrm>
-          <a:prstGeom prst="rect">
-            <a:avLst/>
-          </a:prstGeom>
-          <a:noFill/>
-        </p:spPr>
-        <p:txBody>
-          <a:bodyPr wrap="square" anchor="t">
-            <a:spAutoFit/>
-          </a:bodyPr>
-          <a:lstStyle/>
-          <a:p>
-            <a:pPr algn="l">
-              <a:lnSpc>
-                <a:spcPct val="112000"/>
-              </a:lnSpc>
-              <a:spcBef>
-                <a:spcPts val="0"/>
-              </a:spcBef>
-              <a:spcAft>
-                <a:spcPts val="0"/>
-              </a:spcAft>
-            </a:pPr>
-            <a:r>
-              <a:rPr sz="1450" b="0">
-                <a:solidFill>
-                  <a:srgbClr val="5A616E"/>
-                </a:solidFill>
-                <a:latin typeface="Calibri"/>
-              </a:rPr>
-              <a:t>Knowledge workers spend a huge share of the week in meetings — what matters is the follow-through, not the recording.</a:t>
-            </a:r>
-          </a:p>
-        </p:txBody>
-      </p:sp>
-      <p:sp>
-        <p:nvSpPr>
-          <p:cNvPr id="10" name="TextBox 9"/>
-          <p:cNvSpPr txBox="1"/>
-          <p:nvPr/>
-        </p:nvSpPr>
-        <p:spPr>
-          <a:xfrm>
-            <a:off x="5486400" y="3383279"/>
-            <a:ext cx="914400" cy="365760"/>
-          </a:xfrm>
-          <a:prstGeom prst="rect">
-            <a:avLst/>
-          </a:prstGeom>
-          <a:noFill/>
-        </p:spPr>
-        <p:txBody>
-          <a:bodyPr wrap="square" anchor="t">
-            <a:spAutoFit/>
-          </a:bodyPr>
-          <a:lstStyle/>
-          <a:p>
-            <a:pPr algn="l">
-              <a:lnSpc>
-                <a:spcPct val="106000"/>
-              </a:lnSpc>
-              <a:spcBef>
-                <a:spcPts val="0"/>
-              </a:spcBef>
-              <a:spcAft>
-                <a:spcPts val="0"/>
-              </a:spcAft>
-            </a:pPr>
-            <a:r>
-              <a:rPr sz="1250" b="1">
-                <a:solidFill>
-                  <a:srgbClr val="C2410C"/>
-                </a:solidFill>
-                <a:latin typeface="Consolas"/>
-              </a:rPr>
-              <a:t>gap</a:t>
-            </a:r>
-          </a:p>
-        </p:txBody>
-      </p:sp>
-      <p:sp>
-        <p:nvSpPr>
-          <p:cNvPr id="11" name="TextBox 10"/>
-          <p:cNvSpPr txBox="1"/>
-          <p:nvPr/>
-        </p:nvSpPr>
-        <p:spPr>
-          <a:xfrm>
-            <a:off x="6400800" y="3364991"/>
-            <a:ext cx="4937760" cy="1005840"/>
-          </a:xfrm>
-          <a:prstGeom prst="rect">
-            <a:avLst/>
-          </a:prstGeom>
-          <a:noFill/>
-        </p:spPr>
-        <p:txBody>
-          <a:bodyPr wrap="square" anchor="t">
-            <a:spAutoFit/>
-          </a:bodyPr>
-          <a:lstStyle/>
-          <a:p>
-            <a:pPr algn="l">
-              <a:lnSpc>
-                <a:spcPct val="112000"/>
-              </a:lnSpc>
-              <a:spcBef>
-                <a:spcPts val="0"/>
-              </a:spcBef>
-              <a:spcAft>
-                <a:spcPts val="0"/>
-              </a:spcAft>
-            </a:pPr>
-            <a:r>
-              <a:rPr sz="1450" b="0">
-                <a:solidFill>
-                  <a:srgbClr val="5A616E"/>
-                </a:solidFill>
-                <a:latin typeface="Calibri"/>
-              </a:rPr>
-              <a:t>The pain isn't capturing what was said. It's doing what was decided.</a:t>
-            </a:r>
-          </a:p>
-        </p:txBody>
-      </p:sp>
-      <p:sp>
-        <p:nvSpPr>
-          <p:cNvPr id="12" name="TextBox 11"/>
-          <p:cNvSpPr txBox="1"/>
-          <p:nvPr/>
-        </p:nvSpPr>
-        <p:spPr>
-          <a:xfrm>
-            <a:off x="5486400" y="4434840"/>
-            <a:ext cx="914400" cy="365760"/>
-          </a:xfrm>
-          <a:prstGeom prst="rect">
-            <a:avLst/>
-          </a:prstGeom>
-          <a:noFill/>
-        </p:spPr>
-        <p:txBody>
-          <a:bodyPr wrap="square" anchor="t">
-            <a:spAutoFit/>
-          </a:bodyPr>
-          <a:lstStyle/>
-          <a:p>
-            <a:pPr algn="l">
-              <a:lnSpc>
-                <a:spcPct val="106000"/>
-              </a:lnSpc>
-              <a:spcBef>
-                <a:spcPts val="0"/>
-              </a:spcBef>
-              <a:spcAft>
-                <a:spcPts val="0"/>
-              </a:spcAft>
-            </a:pPr>
-            <a:r>
-              <a:rPr sz="1250" b="1">
-                <a:solidFill>
-                  <a:srgbClr val="C2410C"/>
-                </a:solidFill>
-                <a:latin typeface="Consolas"/>
-              </a:rPr>
-              <a:t>cost</a:t>
-            </a:r>
-          </a:p>
-        </p:txBody>
-      </p:sp>
-      <p:sp>
-        <p:nvSpPr>
-          <p:cNvPr id="13" name="TextBox 12"/>
-          <p:cNvSpPr txBox="1"/>
-          <p:nvPr/>
-        </p:nvSpPr>
-        <p:spPr>
-          <a:xfrm>
-            <a:off x="6400800" y="4416552"/>
-            <a:ext cx="4937760" cy="1005840"/>
-          </a:xfrm>
-          <a:prstGeom prst="rect">
-            <a:avLst/>
-          </a:prstGeom>
-          <a:noFill/>
-        </p:spPr>
-        <p:txBody>
-          <a:bodyPr wrap="square" anchor="t">
-            <a:spAutoFit/>
-          </a:bodyPr>
-          <a:lstStyle/>
-          <a:p>
-            <a:pPr algn="l">
-              <a:lnSpc>
-                <a:spcPct val="112000"/>
-              </a:lnSpc>
-              <a:spcBef>
-                <a:spcPts val="0"/>
-              </a:spcBef>
-              <a:spcAft>
-                <a:spcPts val="0"/>
-              </a:spcAft>
-            </a:pPr>
-            <a:r>
-              <a:rPr sz="1450" b="0">
-                <a:solidFill>
-                  <a:srgbClr val="5A616E"/>
-                </a:solidFill>
-                <a:latin typeface="Calibri"/>
-              </a:rPr>
-              <a:t>Dropped commitments = re-work, missed deadlines, and eroded trust.</a:t>
-            </a:r>
-          </a:p>
-        </p:txBody>
-      </p:sp>
-      <p:sp>
-        <p:nvSpPr>
-          <p:cNvPr id="14" name="TextBox 13"/>
-          <p:cNvSpPr txBox="1"/>
-          <p:nvPr/>
-        </p:nvSpPr>
-        <p:spPr>
-          <a:xfrm>
-            <a:off x="822960" y="6126480"/>
-            <a:ext cx="10515600" cy="457200"/>
-          </a:xfrm>
-          <a:prstGeom prst="rect">
-            <a:avLst/>
-          </a:prstGeom>
-          <a:noFill/>
-        </p:spPr>
-        <p:txBody>
-          <a:bodyPr wrap="square" anchor="t">
-            <a:spAutoFit/>
-          </a:bodyPr>
-          <a:lstStyle/>
-          <a:p>
-            <a:pPr algn="l">
-              <a:lnSpc>
-                <a:spcPct val="110000"/>
-              </a:lnSpc>
-              <a:spcBef>
-                <a:spcPts val="0"/>
-              </a:spcBef>
-              <a:spcAft>
-                <a:spcPts val="0"/>
-              </a:spcAft>
-            </a:pPr>
-            <a:r>
-              <a:rPr sz="1150" b="0">
-                <a:solidFill>
-                  <a:srgbClr val="8B919D"/>
-                </a:solidFill>
-                <a:latin typeface="Calibri"/>
-              </a:rPr>
-              <a:t>Industry estimates range ~44–73% never completed (Fellow, Streamli9). Directional — as PM, first job is to validate with first-party instrumentation before over-investing.</a:t>
+              <a:t>Real output from the live app — extracted in ~2.8s: summary, decisions, and one column per owner, each card one click from a prefilled Calendar event or Gmail draft.</a:t>
             </a:r>
           </a:p>
         </p:txBody>
@@ -6967,7 +6675,7 @@
                 </a:solidFill>
                 <a:latin typeface="Consolas"/>
               </a:rPr>
-              <a:t>02 · THE INSIGHT</a:t>
+              <a:t>01 · THE PRODUCT</a:t>
             </a:r>
           </a:p>
         </p:txBody>
@@ -7012,7 +6720,7 @@
                 </a:solidFill>
                 <a:latin typeface="Calibri"/>
               </a:rPr>
-              <a:t>Everyone is fighting over capture. The last mile is wide open.</a:t>
+              <a:t>Paste a meeting → get owned action → distribute in one click.</a:t>
             </a:r>
           </a:p>
         </p:txBody>
@@ -7025,8 +6733,8 @@
         </p:nvSpPr>
         <p:spPr>
           <a:xfrm>
-            <a:off x="822960" y="2286000"/>
-            <a:ext cx="5257800" cy="2148840"/>
+            <a:off x="822960" y="2331720"/>
+            <a:ext cx="3429000" cy="1828800"/>
           </a:xfrm>
           <a:prstGeom prst="roundRect">
             <a:avLst>
@@ -7073,8 +6781,8 @@
         </p:nvSpPr>
         <p:spPr>
           <a:xfrm>
-            <a:off x="1097280" y="2487168"/>
-            <a:ext cx="4754880" cy="365760"/>
+            <a:off x="1078992" y="2514600"/>
+            <a:ext cx="2971800" cy="365760"/>
           </a:xfrm>
           <a:prstGeom prst="rect">
             <a:avLst/>
@@ -7101,11 +6809,11 @@
             <a:r>
               <a:rPr sz="1100" b="1">
                 <a:solidFill>
-                  <a:srgbClr val="8B919D"/>
+                  <a:srgbClr val="C2410C"/>
                 </a:solidFill>
                 <a:latin typeface="Consolas"/>
               </a:rPr>
-              <a:t>CROWDED — “CAPTURE”</a:t>
+              <a:t>INPUT</a:t>
             </a:r>
           </a:p>
         </p:txBody>
@@ -7118,8 +6826,8 @@
         </p:nvSpPr>
         <p:spPr>
           <a:xfrm>
-            <a:off x="1097280" y="2907792"/>
-            <a:ext cx="4754880" cy="457200"/>
+            <a:off x="1078992" y="2880360"/>
+            <a:ext cx="2971800" cy="457200"/>
           </a:xfrm>
           <a:prstGeom prst="rect">
             <a:avLst/>
@@ -7144,13 +6852,13 @@
               </a:spcAft>
             </a:pPr>
             <a:r>
-              <a:rPr sz="1900" b="1">
+              <a:rPr sz="1700" b="1">
                 <a:solidFill>
                   <a:srgbClr val="16181F"/>
                 </a:solidFill>
                 <a:latin typeface="Calibri"/>
               </a:rPr>
-              <a:t>Transcribe &amp; summarize</a:t>
+              <a:t>Drop it in</a:t>
             </a:r>
           </a:p>
         </p:txBody>
@@ -7163,8 +6871,8 @@
         </p:nvSpPr>
         <p:spPr>
           <a:xfrm>
-            <a:off x="1097280" y="3429000"/>
-            <a:ext cx="4754880" cy="914400"/>
+            <a:off x="1078992" y="3383280"/>
+            <a:ext cx="2971800" cy="731520"/>
           </a:xfrm>
           <a:prstGeom prst="rect">
             <a:avLst/>
@@ -7189,13 +6897,13 @@
               </a:spcAft>
             </a:pPr>
             <a:r>
-              <a:rPr sz="1350" b="0">
+              <a:rPr sz="1300" b="0">
                 <a:solidFill>
                   <a:srgbClr val="5A616E"/>
                 </a:solidFill>
                 <a:latin typeface="Calibri"/>
               </a:rPr>
-              <a:t>Otter, Fireflies, Fathom, Granola — all competing on better transcripts. Table stakes now. The commitments they surface still die in a doc.</a:t>
+              <a:t>Paste a transcript, a public Google Doc URL, or a file. No account.</a:t>
             </a:r>
           </a:p>
         </p:txBody>
@@ -7208,8 +6916,8 @@
         </p:nvSpPr>
         <p:spPr>
           <a:xfrm>
-            <a:off x="6263640" y="2286000"/>
-            <a:ext cx="5120640" cy="2148840"/>
+            <a:off x="4434840" y="2331720"/>
+            <a:ext cx="3429000" cy="1828800"/>
           </a:xfrm>
           <a:prstGeom prst="roundRect">
             <a:avLst>
@@ -7217,11 +6925,11 @@
             </a:avLst>
           </a:prstGeom>
           <a:solidFill>
-            <a:srgbClr val="FBEFEA"/>
+            <a:srgbClr val="FFFFFF"/>
           </a:solidFill>
-          <a:ln w="17780">
+          <a:ln w="12700">
             <a:solidFill>
-              <a:srgbClr val="C2410C"/>
+              <a:srgbClr val="DEE1E7"/>
             </a:solidFill>
           </a:ln>
           <a:effectLst/>
@@ -7256,8 +6964,8 @@
         </p:nvSpPr>
         <p:spPr>
           <a:xfrm>
-            <a:off x="6537960" y="2487168"/>
-            <a:ext cx="4572000" cy="365760"/>
+            <a:off x="4690872" y="2514600"/>
+            <a:ext cx="2971800" cy="365760"/>
           </a:xfrm>
           <a:prstGeom prst="rect">
             <a:avLst/>
@@ -7288,7 +6996,7 @@
                 </a:solidFill>
                 <a:latin typeface="Consolas"/>
               </a:rPr>
-              <a:t>OPEN — “THE LAST MILE”</a:t>
+              <a:t>EXTRACT</a:t>
             </a:r>
           </a:p>
         </p:txBody>
@@ -7301,8 +7009,8 @@
         </p:nvSpPr>
         <p:spPr>
           <a:xfrm>
-            <a:off x="6537960" y="2907792"/>
-            <a:ext cx="4572000" cy="457200"/>
+            <a:off x="4690872" y="2880360"/>
+            <a:ext cx="2971800" cy="457200"/>
           </a:xfrm>
           <a:prstGeom prst="rect">
             <a:avLst/>
@@ -7327,13 +7035,13 @@
               </a:spcAft>
             </a:pPr>
             <a:r>
-              <a:rPr sz="1900" b="1">
+              <a:rPr sz="1700" b="1">
                 <a:solidFill>
                   <a:srgbClr val="16181F"/>
                 </a:solidFill>
                 <a:latin typeface="Calibri"/>
               </a:rPr>
-              <a:t>Distribute &amp; act</a:t>
+              <a:t>AI structures it</a:t>
             </a:r>
           </a:p>
         </p:txBody>
@@ -7346,8 +7054,8 @@
         </p:nvSpPr>
         <p:spPr>
           <a:xfrm>
-            <a:off x="6537960" y="3429000"/>
-            <a:ext cx="4572000" cy="914400"/>
+            <a:off x="4690872" y="3383280"/>
+            <a:ext cx="2971800" cy="731520"/>
           </a:xfrm>
           <a:prstGeom prst="rect">
             <a:avLst/>
@@ -7372,27 +7080,210 @@
               </a:spcAft>
             </a:pPr>
             <a:r>
-              <a:rPr sz="1350" b="0">
+              <a:rPr sz="1300" b="0">
                 <a:solidFill>
                   <a:srgbClr val="5A616E"/>
                 </a:solidFill>
                 <a:latin typeface="Calibri"/>
               </a:rPr>
-              <a:t>Getting each commitment into the tool the owner actually lives in — their calendar, their inbox — is where follow-through is won or lost.</a:t>
-            </a:r>
-          </a:p>
-        </p:txBody>
-      </p:sp>
-      <p:sp>
-        <p:nvSpPr>
-          <p:cNvPr id="14" name="Rectangle 13"/>
+              <a:t>Summary, decisions, and action items — each with owner, email, due date, context.</a:t>
+            </a:r>
+          </a:p>
+        </p:txBody>
+      </p:sp>
+      <p:sp>
+        <p:nvSpPr>
+          <p:cNvPr id="14" name="Rounded Rectangle 13"/>
           <p:cNvSpPr/>
           <p:nvPr/>
         </p:nvSpPr>
         <p:spPr>
           <a:xfrm>
-            <a:off x="822960" y="4892040"/>
-            <a:ext cx="54864" cy="1097280"/>
+            <a:off x="8046720" y="2331720"/>
+            <a:ext cx="3429000" cy="1828800"/>
+          </a:xfrm>
+          <a:prstGeom prst="roundRect">
+            <a:avLst>
+              <a:gd name="adj" fmla="val 4500"/>
+            </a:avLst>
+          </a:prstGeom>
+          <a:solidFill>
+            <a:srgbClr val="FFFFFF"/>
+          </a:solidFill>
+          <a:ln w="12700">
+            <a:solidFill>
+              <a:srgbClr val="DEE1E7"/>
+            </a:solidFill>
+          </a:ln>
+          <a:effectLst/>
+        </p:spPr>
+        <p:style>
+          <a:lnRef idx="1">
+            <a:schemeClr val="accent1"/>
+          </a:lnRef>
+          <a:fillRef idx="3">
+            <a:schemeClr val="accent1"/>
+          </a:fillRef>
+          <a:effectRef idx="2">
+            <a:schemeClr val="accent1"/>
+          </a:effectRef>
+          <a:fontRef idx="minor">
+            <a:schemeClr val="lt1"/>
+          </a:fontRef>
+        </p:style>
+        <p:txBody>
+          <a:bodyPr rtlCol="0" anchor="ctr"/>
+          <a:lstStyle/>
+          <a:p>
+            <a:pPr algn="ctr"/>
+          </a:p>
+        </p:txBody>
+      </p:sp>
+      <p:sp>
+        <p:nvSpPr>
+          <p:cNvPr id="15" name="TextBox 14"/>
+          <p:cNvSpPr txBox="1"/>
+          <p:nvPr/>
+        </p:nvSpPr>
+        <p:spPr>
+          <a:xfrm>
+            <a:off x="8302752" y="2514600"/>
+            <a:ext cx="2971800" cy="365760"/>
+          </a:xfrm>
+          <a:prstGeom prst="rect">
+            <a:avLst/>
+          </a:prstGeom>
+          <a:noFill/>
+        </p:spPr>
+        <p:txBody>
+          <a:bodyPr wrap="square" anchor="t">
+            <a:spAutoFit/>
+          </a:bodyPr>
+          <a:lstStyle/>
+          <a:p>
+            <a:pPr algn="l">
+              <a:lnSpc>
+                <a:spcPct val="106000"/>
+              </a:lnSpc>
+              <a:spcBef>
+                <a:spcPts val="0"/>
+              </a:spcBef>
+              <a:spcAft>
+                <a:spcPts val="0"/>
+              </a:spcAft>
+            </a:pPr>
+            <a:r>
+              <a:rPr sz="1100" b="1">
+                <a:solidFill>
+                  <a:srgbClr val="C2410C"/>
+                </a:solidFill>
+                <a:latin typeface="Consolas"/>
+              </a:rPr>
+              <a:t>DISTRIBUTE</a:t>
+            </a:r>
+          </a:p>
+        </p:txBody>
+      </p:sp>
+      <p:sp>
+        <p:nvSpPr>
+          <p:cNvPr id="16" name="TextBox 15"/>
+          <p:cNvSpPr txBox="1"/>
+          <p:nvPr/>
+        </p:nvSpPr>
+        <p:spPr>
+          <a:xfrm>
+            <a:off x="8302752" y="2880360"/>
+            <a:ext cx="2971800" cy="457200"/>
+          </a:xfrm>
+          <a:prstGeom prst="rect">
+            <a:avLst/>
+          </a:prstGeom>
+          <a:noFill/>
+        </p:spPr>
+        <p:txBody>
+          <a:bodyPr wrap="square" anchor="t">
+            <a:spAutoFit/>
+          </a:bodyPr>
+          <a:lstStyle/>
+          <a:p>
+            <a:pPr algn="l">
+              <a:lnSpc>
+                <a:spcPct val="106000"/>
+              </a:lnSpc>
+              <a:spcBef>
+                <a:spcPts val="0"/>
+              </a:spcBef>
+              <a:spcAft>
+                <a:spcPts val="0"/>
+              </a:spcAft>
+            </a:pPr>
+            <a:r>
+              <a:rPr sz="1700" b="1">
+                <a:solidFill>
+                  <a:srgbClr val="16181F"/>
+                </a:solidFill>
+                <a:latin typeface="Calibri"/>
+              </a:rPr>
+              <a:t>One-click send</a:t>
+            </a:r>
+          </a:p>
+        </p:txBody>
+      </p:sp>
+      <p:sp>
+        <p:nvSpPr>
+          <p:cNvPr id="17" name="TextBox 16"/>
+          <p:cNvSpPr txBox="1"/>
+          <p:nvPr/>
+        </p:nvSpPr>
+        <p:spPr>
+          <a:xfrm>
+            <a:off x="8302752" y="3383280"/>
+            <a:ext cx="2971800" cy="731520"/>
+          </a:xfrm>
+          <a:prstGeom prst="rect">
+            <a:avLst/>
+          </a:prstGeom>
+          <a:noFill/>
+        </p:spPr>
+        <p:txBody>
+          <a:bodyPr wrap="square" anchor="t">
+            <a:spAutoFit/>
+          </a:bodyPr>
+          <a:lstStyle/>
+          <a:p>
+            <a:pPr algn="l">
+              <a:lnSpc>
+                <a:spcPct val="112000"/>
+              </a:lnSpc>
+              <a:spcBef>
+                <a:spcPts val="0"/>
+              </a:spcBef>
+              <a:spcAft>
+                <a:spcPts val="0"/>
+              </a:spcAft>
+            </a:pPr>
+            <a:r>
+              <a:rPr sz="1300" b="0">
+                <a:solidFill>
+                  <a:srgbClr val="5A616E"/>
+                </a:solidFill>
+                <a:latin typeface="Calibri"/>
+              </a:rPr>
+              <a:t>Each item opens a prefilled Google Calendar event or Gmail draft. Just Save / Send.</a:t>
+            </a:r>
+          </a:p>
+        </p:txBody>
+      </p:sp>
+      <p:sp>
+        <p:nvSpPr>
+          <p:cNvPr id="18" name="Rectangle 17"/>
+          <p:cNvSpPr/>
+          <p:nvPr/>
+        </p:nvSpPr>
+        <p:spPr>
+          <a:xfrm>
+            <a:off x="822960" y="4617720"/>
+            <a:ext cx="54864" cy="1234440"/>
           </a:xfrm>
           <a:prstGeom prst="rect">
             <a:avLst/>
@@ -7429,14 +7320,14 @@
       </p:sp>
       <p:sp>
         <p:nvSpPr>
-          <p:cNvPr id="15" name="TextBox 14"/>
-          <p:cNvSpPr txBox="1"/>
-          <p:nvPr/>
-        </p:nvSpPr>
-        <p:spPr>
-          <a:xfrm>
-            <a:off x="1097280" y="4983480"/>
-            <a:ext cx="10241280" cy="1005840"/>
+          <p:cNvPr id="19" name="TextBox 18"/>
+          <p:cNvSpPr txBox="1"/>
+          <p:nvPr/>
+        </p:nvSpPr>
+        <p:spPr>
+          <a:xfrm>
+            <a:off x="1097280" y="4681728"/>
+            <a:ext cx="10241280" cy="1188720"/>
           </a:xfrm>
           <a:prstGeom prst="rect">
             <a:avLst/>
@@ -7461,31 +7352,22 @@
               </a:spcAft>
             </a:pPr>
             <a:r>
-              <a:rPr sz="2100" b="0">
+              <a:rPr sz="1800" b="0">
                 <a:solidFill>
                   <a:srgbClr val="16181F"/>
                 </a:solidFill>
                 <a:latin typeface="Calibri"/>
               </a:rPr>
-              <a:t>The blocker on the last mile isn't a smarter model — it's </a:t>
-            </a:r>
-            <a:r>
-              <a:rPr sz="2100" b="1">
+              <a:t>The “no-OAuth trick”: prefilled Calendar / Gmail URLs open in the user's already-logged-in Google. </a:t>
+            </a:r>
+            <a:r>
+              <a:rPr sz="1800" b="1">
                 <a:solidFill>
                   <a:srgbClr val="C2410C"/>
                 </a:solidFill>
                 <a:latin typeface="Calibri"/>
               </a:rPr>
-              <a:t>setup friction</a:t>
-            </a:r>
-            <a:r>
-              <a:rPr sz="2100" b="0">
-                <a:solidFill>
-                  <a:srgbClr val="16181F"/>
-                </a:solidFill>
-                <a:latin typeface="Calibri"/>
-              </a:rPr>
-              <a:t>. So the wedge is zero-setup distribution.</a:t>
+              <a:t>Time-to-value ~10 seconds — no integration, no admin approval, no scope review.</a:t>
             </a:r>
           </a:p>
         </p:txBody>
@@ -7636,7 +7518,7 @@
                 </a:solidFill>
                 <a:latin typeface="Consolas"/>
               </a:rPr>
-              <a:t>03 · THE PRODUCT</a:t>
+              <a:t>02 · THE PROBLEM</a:t>
             </a:r>
           </a:p>
         </p:txBody>
@@ -7681,56 +7563,53 @@
                 </a:solidFill>
                 <a:latin typeface="Calibri"/>
               </a:rPr>
-              <a:t>Paste a meeting → get owned action → distribute in one click.</a:t>
-            </a:r>
-          </a:p>
-        </p:txBody>
-      </p:sp>
-      <p:sp>
-        <p:nvSpPr>
-          <p:cNvPr id="6" name="Rounded Rectangle 5"/>
-          <p:cNvSpPr/>
-          <p:nvPr/>
-        </p:nvSpPr>
-        <p:spPr>
-          <a:xfrm>
-            <a:off x="822960" y="2331720"/>
-            <a:ext cx="3429000" cy="1828800"/>
-          </a:xfrm>
-          <a:prstGeom prst="roundRect">
-            <a:avLst>
-              <a:gd name="adj" fmla="val 4500"/>
-            </a:avLst>
-          </a:prstGeom>
-          <a:solidFill>
-            <a:srgbClr val="FFFFFF"/>
-          </a:solidFill>
-          <a:ln w="12700">
-            <a:solidFill>
-              <a:srgbClr val="DEE1E7"/>
-            </a:solidFill>
-          </a:ln>
-          <a:effectLst/>
-        </p:spPr>
-        <p:style>
-          <a:lnRef idx="1">
-            <a:schemeClr val="accent1"/>
-          </a:lnRef>
-          <a:fillRef idx="3">
-            <a:schemeClr val="accent1"/>
-          </a:fillRef>
-          <a:effectRef idx="2">
-            <a:schemeClr val="accent1"/>
-          </a:effectRef>
-          <a:fontRef idx="minor">
-            <a:schemeClr val="lt1"/>
-          </a:fontRef>
-        </p:style>
-        <p:txBody>
-          <a:bodyPr rtlCol="0" anchor="ctr"/>
-          <a:lstStyle/>
-          <a:p>
-            <a:pPr algn="ctr"/>
+              <a:t>Meetings manufacture commitments. Then the commitments go missing.</a:t>
+            </a:r>
+          </a:p>
+        </p:txBody>
+      </p:sp>
+      <p:sp>
+        <p:nvSpPr>
+          <p:cNvPr id="6" name="TextBox 5"/>
+          <p:cNvSpPr txBox="1"/>
+          <p:nvPr/>
+        </p:nvSpPr>
+        <p:spPr>
+          <a:xfrm>
+            <a:off x="822960" y="2286000"/>
+            <a:ext cx="4023360" cy="1280160"/>
+          </a:xfrm>
+          <a:prstGeom prst="rect">
+            <a:avLst/>
+          </a:prstGeom>
+          <a:noFill/>
+        </p:spPr>
+        <p:txBody>
+          <a:bodyPr wrap="square" anchor="t">
+            <a:spAutoFit/>
+          </a:bodyPr>
+          <a:lstStyle/>
+          <a:p>
+            <a:pPr algn="l">
+              <a:lnSpc>
+                <a:spcPct val="106000"/>
+              </a:lnSpc>
+              <a:spcBef>
+                <a:spcPts val="0"/>
+              </a:spcBef>
+              <a:spcAft>
+                <a:spcPts val="0"/>
+              </a:spcAft>
+            </a:pPr>
+            <a:r>
+              <a:rPr sz="6600" b="1">
+                <a:solidFill>
+                  <a:srgbClr val="C2410C"/>
+                </a:solidFill>
+                <a:latin typeface="Calibri"/>
+              </a:rPr>
+              <a:t>~70%</a:t>
+            </a:r>
           </a:p>
         </p:txBody>
       </p:sp>
@@ -7742,8 +7621,53 @@
         </p:nvSpPr>
         <p:spPr>
           <a:xfrm>
-            <a:off x="1078992" y="2514600"/>
-            <a:ext cx="2971800" cy="365760"/>
+            <a:off x="822960" y="3566160"/>
+            <a:ext cx="4480560" cy="1737360"/>
+          </a:xfrm>
+          <a:prstGeom prst="rect">
+            <a:avLst/>
+          </a:prstGeom>
+          <a:noFill/>
+        </p:spPr>
+        <p:txBody>
+          <a:bodyPr wrap="square" anchor="t">
+            <a:spAutoFit/>
+          </a:bodyPr>
+          <a:lstStyle/>
+          <a:p>
+            <a:pPr algn="l">
+              <a:lnSpc>
+                <a:spcPct val="116000"/>
+              </a:lnSpc>
+              <a:spcBef>
+                <a:spcPts val="0"/>
+              </a:spcBef>
+              <a:spcAft>
+                <a:spcPts val="0"/>
+              </a:spcAft>
+            </a:pPr>
+            <a:r>
+              <a:rPr sz="1550" b="0">
+                <a:solidFill>
+                  <a:srgbClr val="5A616E"/>
+                </a:solidFill>
+                <a:latin typeface="Calibri"/>
+              </a:rPr>
+              <a:t>of meeting action items are never completed — they live in someone's notes, a Slack thread, a doc nobody reopens.</a:t>
+            </a:r>
+          </a:p>
+        </p:txBody>
+      </p:sp>
+      <p:sp>
+        <p:nvSpPr>
+          <p:cNvPr id="8" name="TextBox 7"/>
+          <p:cNvSpPr txBox="1"/>
+          <p:nvPr/>
+        </p:nvSpPr>
+        <p:spPr>
+          <a:xfrm>
+            <a:off x="5486400" y="2331720"/>
+            <a:ext cx="914400" cy="365760"/>
           </a:xfrm>
           <a:prstGeom prst="rect">
             <a:avLst/>
@@ -7768,27 +7692,72 @@
               </a:spcAft>
             </a:pPr>
             <a:r>
-              <a:rPr sz="1100" b="1">
+              <a:rPr sz="1250" b="1">
                 <a:solidFill>
                   <a:srgbClr val="C2410C"/>
                 </a:solidFill>
                 <a:latin typeface="Consolas"/>
               </a:rPr>
-              <a:t>INPUT</a:t>
-            </a:r>
-          </a:p>
-        </p:txBody>
-      </p:sp>
-      <p:sp>
-        <p:nvSpPr>
-          <p:cNvPr id="8" name="TextBox 7"/>
-          <p:cNvSpPr txBox="1"/>
-          <p:nvPr/>
-        </p:nvSpPr>
-        <p:spPr>
-          <a:xfrm>
-            <a:off x="1078992" y="2880360"/>
-            <a:ext cx="2971800" cy="457200"/>
+              <a:t>who</a:t>
+            </a:r>
+          </a:p>
+        </p:txBody>
+      </p:sp>
+      <p:sp>
+        <p:nvSpPr>
+          <p:cNvPr id="9" name="TextBox 8"/>
+          <p:cNvSpPr txBox="1"/>
+          <p:nvPr/>
+        </p:nvSpPr>
+        <p:spPr>
+          <a:xfrm>
+            <a:off x="6400800" y="2313432"/>
+            <a:ext cx="4937760" cy="1005840"/>
+          </a:xfrm>
+          <a:prstGeom prst="rect">
+            <a:avLst/>
+          </a:prstGeom>
+          <a:noFill/>
+        </p:spPr>
+        <p:txBody>
+          <a:bodyPr wrap="square" anchor="t">
+            <a:spAutoFit/>
+          </a:bodyPr>
+          <a:lstStyle/>
+          <a:p>
+            <a:pPr algn="l">
+              <a:lnSpc>
+                <a:spcPct val="112000"/>
+              </a:lnSpc>
+              <a:spcBef>
+                <a:spcPts val="0"/>
+              </a:spcBef>
+              <a:spcAft>
+                <a:spcPts val="0"/>
+              </a:spcAft>
+            </a:pPr>
+            <a:r>
+              <a:rPr sz="1450" b="0">
+                <a:solidFill>
+                  <a:srgbClr val="5A616E"/>
+                </a:solidFill>
+                <a:latin typeface="Calibri"/>
+              </a:rPr>
+              <a:t>Knowledge workers spend a huge share of the week in meetings — what matters is the follow-through, not the recording.</a:t>
+            </a:r>
+          </a:p>
+        </p:txBody>
+      </p:sp>
+      <p:sp>
+        <p:nvSpPr>
+          <p:cNvPr id="10" name="TextBox 9"/>
+          <p:cNvSpPr txBox="1"/>
+          <p:nvPr/>
+        </p:nvSpPr>
+        <p:spPr>
+          <a:xfrm>
+            <a:off x="5486400" y="3383279"/>
+            <a:ext cx="914400" cy="365760"/>
           </a:xfrm>
           <a:prstGeom prst="rect">
             <a:avLst/>
@@ -7813,27 +7782,117 @@
               </a:spcAft>
             </a:pPr>
             <a:r>
-              <a:rPr sz="1700" b="1">
-                <a:solidFill>
-                  <a:srgbClr val="16181F"/>
+              <a:rPr sz="1250" b="1">
+                <a:solidFill>
+                  <a:srgbClr val="C2410C"/>
+                </a:solidFill>
+                <a:latin typeface="Consolas"/>
+              </a:rPr>
+              <a:t>gap</a:t>
+            </a:r>
+          </a:p>
+        </p:txBody>
+      </p:sp>
+      <p:sp>
+        <p:nvSpPr>
+          <p:cNvPr id="11" name="TextBox 10"/>
+          <p:cNvSpPr txBox="1"/>
+          <p:nvPr/>
+        </p:nvSpPr>
+        <p:spPr>
+          <a:xfrm>
+            <a:off x="6400800" y="3364991"/>
+            <a:ext cx="4937760" cy="1005840"/>
+          </a:xfrm>
+          <a:prstGeom prst="rect">
+            <a:avLst/>
+          </a:prstGeom>
+          <a:noFill/>
+        </p:spPr>
+        <p:txBody>
+          <a:bodyPr wrap="square" anchor="t">
+            <a:spAutoFit/>
+          </a:bodyPr>
+          <a:lstStyle/>
+          <a:p>
+            <a:pPr algn="l">
+              <a:lnSpc>
+                <a:spcPct val="112000"/>
+              </a:lnSpc>
+              <a:spcBef>
+                <a:spcPts val="0"/>
+              </a:spcBef>
+              <a:spcAft>
+                <a:spcPts val="0"/>
+              </a:spcAft>
+            </a:pPr>
+            <a:r>
+              <a:rPr sz="1450" b="0">
+                <a:solidFill>
+                  <a:srgbClr val="5A616E"/>
                 </a:solidFill>
                 <a:latin typeface="Calibri"/>
               </a:rPr>
-              <a:t>Drop it in</a:t>
-            </a:r>
-          </a:p>
-        </p:txBody>
-      </p:sp>
-      <p:sp>
-        <p:nvSpPr>
-          <p:cNvPr id="9" name="TextBox 8"/>
-          <p:cNvSpPr txBox="1"/>
-          <p:nvPr/>
-        </p:nvSpPr>
-        <p:spPr>
-          <a:xfrm>
-            <a:off x="1078992" y="3383280"/>
-            <a:ext cx="2971800" cy="731520"/>
+              <a:t>The pain isn't capturing what was said. It's doing what was decided.</a:t>
+            </a:r>
+          </a:p>
+        </p:txBody>
+      </p:sp>
+      <p:sp>
+        <p:nvSpPr>
+          <p:cNvPr id="12" name="TextBox 11"/>
+          <p:cNvSpPr txBox="1"/>
+          <p:nvPr/>
+        </p:nvSpPr>
+        <p:spPr>
+          <a:xfrm>
+            <a:off x="5486400" y="4434840"/>
+            <a:ext cx="914400" cy="365760"/>
+          </a:xfrm>
+          <a:prstGeom prst="rect">
+            <a:avLst/>
+          </a:prstGeom>
+          <a:noFill/>
+        </p:spPr>
+        <p:txBody>
+          <a:bodyPr wrap="square" anchor="t">
+            <a:spAutoFit/>
+          </a:bodyPr>
+          <a:lstStyle/>
+          <a:p>
+            <a:pPr algn="l">
+              <a:lnSpc>
+                <a:spcPct val="106000"/>
+              </a:lnSpc>
+              <a:spcBef>
+                <a:spcPts val="0"/>
+              </a:spcBef>
+              <a:spcAft>
+                <a:spcPts val="0"/>
+              </a:spcAft>
+            </a:pPr>
+            <a:r>
+              <a:rPr sz="1250" b="1">
+                <a:solidFill>
+                  <a:srgbClr val="C2410C"/>
+                </a:solidFill>
+                <a:latin typeface="Consolas"/>
+              </a:rPr>
+              <a:t>cost</a:t>
+            </a:r>
+          </a:p>
+        </p:txBody>
+      </p:sp>
+      <p:sp>
+        <p:nvSpPr>
+          <p:cNvPr id="13" name="TextBox 12"/>
+          <p:cNvSpPr txBox="1"/>
+          <p:nvPr/>
+        </p:nvSpPr>
+        <p:spPr>
+          <a:xfrm>
+            <a:off x="6400800" y="4416552"/>
+            <a:ext cx="4937760" cy="1005840"/>
           </a:xfrm>
           <a:prstGeom prst="rect">
             <a:avLst/>
@@ -7858,477 +7917,58 @@
               </a:spcAft>
             </a:pPr>
             <a:r>
-              <a:rPr sz="1300" b="0">
+              <a:rPr sz="1450" b="0">
                 <a:solidFill>
                   <a:srgbClr val="5A616E"/>
                 </a:solidFill>
                 <a:latin typeface="Calibri"/>
               </a:rPr>
-              <a:t>Paste a transcript, a public Google Doc URL, or a file. No account.</a:t>
-            </a:r>
-          </a:p>
-        </p:txBody>
-      </p:sp>
-      <p:sp>
-        <p:nvSpPr>
-          <p:cNvPr id="10" name="Rounded Rectangle 9"/>
-          <p:cNvSpPr/>
-          <p:nvPr/>
-        </p:nvSpPr>
-        <p:spPr>
-          <a:xfrm>
-            <a:off x="4434840" y="2331720"/>
-            <a:ext cx="3429000" cy="1828800"/>
-          </a:xfrm>
-          <a:prstGeom prst="roundRect">
-            <a:avLst>
-              <a:gd name="adj" fmla="val 4500"/>
-            </a:avLst>
-          </a:prstGeom>
-          <a:solidFill>
-            <a:srgbClr val="FFFFFF"/>
-          </a:solidFill>
-          <a:ln w="12700">
-            <a:solidFill>
-              <a:srgbClr val="DEE1E7"/>
-            </a:solidFill>
-          </a:ln>
-          <a:effectLst/>
-        </p:spPr>
-        <p:style>
-          <a:lnRef idx="1">
-            <a:schemeClr val="accent1"/>
-          </a:lnRef>
-          <a:fillRef idx="3">
-            <a:schemeClr val="accent1"/>
-          </a:fillRef>
-          <a:effectRef idx="2">
-            <a:schemeClr val="accent1"/>
-          </a:effectRef>
-          <a:fontRef idx="minor">
-            <a:schemeClr val="lt1"/>
-          </a:fontRef>
-        </p:style>
-        <p:txBody>
-          <a:bodyPr rtlCol="0" anchor="ctr"/>
-          <a:lstStyle/>
-          <a:p>
-            <a:pPr algn="ctr"/>
-          </a:p>
-        </p:txBody>
-      </p:sp>
-      <p:sp>
-        <p:nvSpPr>
-          <p:cNvPr id="11" name="TextBox 10"/>
-          <p:cNvSpPr txBox="1"/>
-          <p:nvPr/>
-        </p:nvSpPr>
-        <p:spPr>
-          <a:xfrm>
-            <a:off x="4690872" y="2514600"/>
-            <a:ext cx="2971800" cy="365760"/>
-          </a:xfrm>
-          <a:prstGeom prst="rect">
-            <a:avLst/>
-          </a:prstGeom>
-          <a:noFill/>
-        </p:spPr>
-        <p:txBody>
-          <a:bodyPr wrap="square" anchor="t">
-            <a:spAutoFit/>
-          </a:bodyPr>
-          <a:lstStyle/>
-          <a:p>
-            <a:pPr algn="l">
-              <a:lnSpc>
-                <a:spcPct val="106000"/>
-              </a:lnSpc>
-              <a:spcBef>
-                <a:spcPts val="0"/>
-              </a:spcBef>
-              <a:spcAft>
-                <a:spcPts val="0"/>
-              </a:spcAft>
-            </a:pPr>
-            <a:r>
-              <a:rPr sz="1100" b="1">
-                <a:solidFill>
-                  <a:srgbClr val="C2410C"/>
-                </a:solidFill>
-                <a:latin typeface="Consolas"/>
-              </a:rPr>
-              <a:t>EXTRACT</a:t>
-            </a:r>
-          </a:p>
-        </p:txBody>
-      </p:sp>
-      <p:sp>
-        <p:nvSpPr>
-          <p:cNvPr id="12" name="TextBox 11"/>
-          <p:cNvSpPr txBox="1"/>
-          <p:nvPr/>
-        </p:nvSpPr>
-        <p:spPr>
-          <a:xfrm>
-            <a:off x="4690872" y="2880360"/>
-            <a:ext cx="2971800" cy="457200"/>
-          </a:xfrm>
-          <a:prstGeom prst="rect">
-            <a:avLst/>
-          </a:prstGeom>
-          <a:noFill/>
-        </p:spPr>
-        <p:txBody>
-          <a:bodyPr wrap="square" anchor="t">
-            <a:spAutoFit/>
-          </a:bodyPr>
-          <a:lstStyle/>
-          <a:p>
-            <a:pPr algn="l">
-              <a:lnSpc>
-                <a:spcPct val="106000"/>
-              </a:lnSpc>
-              <a:spcBef>
-                <a:spcPts val="0"/>
-              </a:spcBef>
-              <a:spcAft>
-                <a:spcPts val="0"/>
-              </a:spcAft>
-            </a:pPr>
-            <a:r>
-              <a:rPr sz="1700" b="1">
-                <a:solidFill>
-                  <a:srgbClr val="16181F"/>
+              <a:t>Dropped commitments = re-work, missed deadlines, and eroded trust.</a:t>
+            </a:r>
+          </a:p>
+        </p:txBody>
+      </p:sp>
+      <p:sp>
+        <p:nvSpPr>
+          <p:cNvPr id="14" name="TextBox 13"/>
+          <p:cNvSpPr txBox="1"/>
+          <p:nvPr/>
+        </p:nvSpPr>
+        <p:spPr>
+          <a:xfrm>
+            <a:off x="822960" y="6126480"/>
+            <a:ext cx="10515600" cy="457200"/>
+          </a:xfrm>
+          <a:prstGeom prst="rect">
+            <a:avLst/>
+          </a:prstGeom>
+          <a:noFill/>
+        </p:spPr>
+        <p:txBody>
+          <a:bodyPr wrap="square" anchor="t">
+            <a:spAutoFit/>
+          </a:bodyPr>
+          <a:lstStyle/>
+          <a:p>
+            <a:pPr algn="l">
+              <a:lnSpc>
+                <a:spcPct val="110000"/>
+              </a:lnSpc>
+              <a:spcBef>
+                <a:spcPts val="0"/>
+              </a:spcBef>
+              <a:spcAft>
+                <a:spcPts val="0"/>
+              </a:spcAft>
+            </a:pPr>
+            <a:r>
+              <a:rPr sz="1150" b="0">
+                <a:solidFill>
+                  <a:srgbClr val="8B919D"/>
                 </a:solidFill>
                 <a:latin typeface="Calibri"/>
               </a:rPr>
-              <a:t>AI structures it</a:t>
-            </a:r>
-          </a:p>
-        </p:txBody>
-      </p:sp>
-      <p:sp>
-        <p:nvSpPr>
-          <p:cNvPr id="13" name="TextBox 12"/>
-          <p:cNvSpPr txBox="1"/>
-          <p:nvPr/>
-        </p:nvSpPr>
-        <p:spPr>
-          <a:xfrm>
-            <a:off x="4690872" y="3383280"/>
-            <a:ext cx="2971800" cy="731520"/>
-          </a:xfrm>
-          <a:prstGeom prst="rect">
-            <a:avLst/>
-          </a:prstGeom>
-          <a:noFill/>
-        </p:spPr>
-        <p:txBody>
-          <a:bodyPr wrap="square" anchor="t">
-            <a:spAutoFit/>
-          </a:bodyPr>
-          <a:lstStyle/>
-          <a:p>
-            <a:pPr algn="l">
-              <a:lnSpc>
-                <a:spcPct val="112000"/>
-              </a:lnSpc>
-              <a:spcBef>
-                <a:spcPts val="0"/>
-              </a:spcBef>
-              <a:spcAft>
-                <a:spcPts val="0"/>
-              </a:spcAft>
-            </a:pPr>
-            <a:r>
-              <a:rPr sz="1300" b="0">
-                <a:solidFill>
-                  <a:srgbClr val="5A616E"/>
-                </a:solidFill>
-                <a:latin typeface="Calibri"/>
-              </a:rPr>
-              <a:t>Summary, decisions, and action items — each with owner, email, due date, context.</a:t>
-            </a:r>
-          </a:p>
-        </p:txBody>
-      </p:sp>
-      <p:sp>
-        <p:nvSpPr>
-          <p:cNvPr id="14" name="Rounded Rectangle 13"/>
-          <p:cNvSpPr/>
-          <p:nvPr/>
-        </p:nvSpPr>
-        <p:spPr>
-          <a:xfrm>
-            <a:off x="8046720" y="2331720"/>
-            <a:ext cx="3429000" cy="1828800"/>
-          </a:xfrm>
-          <a:prstGeom prst="roundRect">
-            <a:avLst>
-              <a:gd name="adj" fmla="val 4500"/>
-            </a:avLst>
-          </a:prstGeom>
-          <a:solidFill>
-            <a:srgbClr val="FFFFFF"/>
-          </a:solidFill>
-          <a:ln w="12700">
-            <a:solidFill>
-              <a:srgbClr val="DEE1E7"/>
-            </a:solidFill>
-          </a:ln>
-          <a:effectLst/>
-        </p:spPr>
-        <p:style>
-          <a:lnRef idx="1">
-            <a:schemeClr val="accent1"/>
-          </a:lnRef>
-          <a:fillRef idx="3">
-            <a:schemeClr val="accent1"/>
-          </a:fillRef>
-          <a:effectRef idx="2">
-            <a:schemeClr val="accent1"/>
-          </a:effectRef>
-          <a:fontRef idx="minor">
-            <a:schemeClr val="lt1"/>
-          </a:fontRef>
-        </p:style>
-        <p:txBody>
-          <a:bodyPr rtlCol="0" anchor="ctr"/>
-          <a:lstStyle/>
-          <a:p>
-            <a:pPr algn="ctr"/>
-          </a:p>
-        </p:txBody>
-      </p:sp>
-      <p:sp>
-        <p:nvSpPr>
-          <p:cNvPr id="15" name="TextBox 14"/>
-          <p:cNvSpPr txBox="1"/>
-          <p:nvPr/>
-        </p:nvSpPr>
-        <p:spPr>
-          <a:xfrm>
-            <a:off x="8302752" y="2514600"/>
-            <a:ext cx="2971800" cy="365760"/>
-          </a:xfrm>
-          <a:prstGeom prst="rect">
-            <a:avLst/>
-          </a:prstGeom>
-          <a:noFill/>
-        </p:spPr>
-        <p:txBody>
-          <a:bodyPr wrap="square" anchor="t">
-            <a:spAutoFit/>
-          </a:bodyPr>
-          <a:lstStyle/>
-          <a:p>
-            <a:pPr algn="l">
-              <a:lnSpc>
-                <a:spcPct val="106000"/>
-              </a:lnSpc>
-              <a:spcBef>
-                <a:spcPts val="0"/>
-              </a:spcBef>
-              <a:spcAft>
-                <a:spcPts val="0"/>
-              </a:spcAft>
-            </a:pPr>
-            <a:r>
-              <a:rPr sz="1100" b="1">
-                <a:solidFill>
-                  <a:srgbClr val="C2410C"/>
-                </a:solidFill>
-                <a:latin typeface="Consolas"/>
-              </a:rPr>
-              <a:t>DISTRIBUTE</a:t>
-            </a:r>
-          </a:p>
-        </p:txBody>
-      </p:sp>
-      <p:sp>
-        <p:nvSpPr>
-          <p:cNvPr id="16" name="TextBox 15"/>
-          <p:cNvSpPr txBox="1"/>
-          <p:nvPr/>
-        </p:nvSpPr>
-        <p:spPr>
-          <a:xfrm>
-            <a:off x="8302752" y="2880360"/>
-            <a:ext cx="2971800" cy="457200"/>
-          </a:xfrm>
-          <a:prstGeom prst="rect">
-            <a:avLst/>
-          </a:prstGeom>
-          <a:noFill/>
-        </p:spPr>
-        <p:txBody>
-          <a:bodyPr wrap="square" anchor="t">
-            <a:spAutoFit/>
-          </a:bodyPr>
-          <a:lstStyle/>
-          <a:p>
-            <a:pPr algn="l">
-              <a:lnSpc>
-                <a:spcPct val="106000"/>
-              </a:lnSpc>
-              <a:spcBef>
-                <a:spcPts val="0"/>
-              </a:spcBef>
-              <a:spcAft>
-                <a:spcPts val="0"/>
-              </a:spcAft>
-            </a:pPr>
-            <a:r>
-              <a:rPr sz="1700" b="1">
-                <a:solidFill>
-                  <a:srgbClr val="16181F"/>
-                </a:solidFill>
-                <a:latin typeface="Calibri"/>
-              </a:rPr>
-              <a:t>One-click send</a:t>
-            </a:r>
-          </a:p>
-        </p:txBody>
-      </p:sp>
-      <p:sp>
-        <p:nvSpPr>
-          <p:cNvPr id="17" name="TextBox 16"/>
-          <p:cNvSpPr txBox="1"/>
-          <p:nvPr/>
-        </p:nvSpPr>
-        <p:spPr>
-          <a:xfrm>
-            <a:off x="8302752" y="3383280"/>
-            <a:ext cx="2971800" cy="731520"/>
-          </a:xfrm>
-          <a:prstGeom prst="rect">
-            <a:avLst/>
-          </a:prstGeom>
-          <a:noFill/>
-        </p:spPr>
-        <p:txBody>
-          <a:bodyPr wrap="square" anchor="t">
-            <a:spAutoFit/>
-          </a:bodyPr>
-          <a:lstStyle/>
-          <a:p>
-            <a:pPr algn="l">
-              <a:lnSpc>
-                <a:spcPct val="112000"/>
-              </a:lnSpc>
-              <a:spcBef>
-                <a:spcPts val="0"/>
-              </a:spcBef>
-              <a:spcAft>
-                <a:spcPts val="0"/>
-              </a:spcAft>
-            </a:pPr>
-            <a:r>
-              <a:rPr sz="1300" b="0">
-                <a:solidFill>
-                  <a:srgbClr val="5A616E"/>
-                </a:solidFill>
-                <a:latin typeface="Calibri"/>
-              </a:rPr>
-              <a:t>Each item opens a prefilled Google Calendar event or Gmail draft. Just Save / Send.</a:t>
-            </a:r>
-          </a:p>
-        </p:txBody>
-      </p:sp>
-      <p:sp>
-        <p:nvSpPr>
-          <p:cNvPr id="18" name="Rectangle 17"/>
-          <p:cNvSpPr/>
-          <p:nvPr/>
-        </p:nvSpPr>
-        <p:spPr>
-          <a:xfrm>
-            <a:off x="822960" y="4617720"/>
-            <a:ext cx="54864" cy="1234440"/>
-          </a:xfrm>
-          <a:prstGeom prst="rect">
-            <a:avLst/>
-          </a:prstGeom>
-          <a:solidFill>
-            <a:srgbClr val="C2410C"/>
-          </a:solidFill>
-          <a:ln>
-            <a:noFill/>
-          </a:ln>
-          <a:effectLst/>
-        </p:spPr>
-        <p:style>
-          <a:lnRef idx="1">
-            <a:schemeClr val="accent1"/>
-          </a:lnRef>
-          <a:fillRef idx="3">
-            <a:schemeClr val="accent1"/>
-          </a:fillRef>
-          <a:effectRef idx="2">
-            <a:schemeClr val="accent1"/>
-          </a:effectRef>
-          <a:fontRef idx="minor">
-            <a:schemeClr val="lt1"/>
-          </a:fontRef>
-        </p:style>
-        <p:txBody>
-          <a:bodyPr rtlCol="0" anchor="ctr"/>
-          <a:lstStyle/>
-          <a:p>
-            <a:pPr algn="ctr"/>
-          </a:p>
-        </p:txBody>
-      </p:sp>
-      <p:sp>
-        <p:nvSpPr>
-          <p:cNvPr id="19" name="TextBox 18"/>
-          <p:cNvSpPr txBox="1"/>
-          <p:nvPr/>
-        </p:nvSpPr>
-        <p:spPr>
-          <a:xfrm>
-            <a:off x="1097280" y="4681728"/>
-            <a:ext cx="10241280" cy="1188720"/>
-          </a:xfrm>
-          <a:prstGeom prst="rect">
-            <a:avLst/>
-          </a:prstGeom>
-          <a:noFill/>
-        </p:spPr>
-        <p:txBody>
-          <a:bodyPr wrap="square" anchor="t">
-            <a:spAutoFit/>
-          </a:bodyPr>
-          <a:lstStyle/>
-          <a:p>
-            <a:pPr algn="l">
-              <a:lnSpc>
-                <a:spcPct val="114000"/>
-              </a:lnSpc>
-              <a:spcBef>
-                <a:spcPts val="0"/>
-              </a:spcBef>
-              <a:spcAft>
-                <a:spcPts val="0"/>
-              </a:spcAft>
-            </a:pPr>
-            <a:r>
-              <a:rPr sz="1800" b="0">
-                <a:solidFill>
-                  <a:srgbClr val="16181F"/>
-                </a:solidFill>
-                <a:latin typeface="Calibri"/>
-              </a:rPr>
-              <a:t>The “no-OAuth trick”: prefilled Calendar / Gmail URLs open in the user's already-logged-in Google. </a:t>
-            </a:r>
-            <a:r>
-              <a:rPr sz="1800" b="1">
-                <a:solidFill>
-                  <a:srgbClr val="C2410C"/>
-                </a:solidFill>
-                <a:latin typeface="Calibri"/>
-              </a:rPr>
-              <a:t>Time-to-value ~10 seconds — no integration, no admin approval, no scope review.</a:t>
+              <a:t>Industry estimates range ~44–73% never completed (Fellow, Streamli9). Directional — as PM, first job is to validate with first-party instrumentation before over-investing.</a:t>
             </a:r>
           </a:p>
         </p:txBody>
@@ -8479,7 +8119,7 @@
                 </a:solidFill>
                 <a:latin typeface="Consolas"/>
               </a:rPr>
-              <a:t>—  SEE IT WORK</a:t>
+              <a:t>03 · THE INSIGHT</a:t>
             </a:r>
           </a:p>
         </p:txBody>
@@ -8518,56 +8158,36 @@
               </a:spcAft>
             </a:pPr>
             <a:r>
-              <a:rPr sz="2800" b="1">
+              <a:rPr sz="3300" b="1">
                 <a:solidFill>
                   <a:srgbClr val="16181F"/>
                 </a:solidFill>
                 <a:latin typeface="Calibri"/>
               </a:rPr>
-              <a:t>Paste a transcript → the board writes itself.</a:t>
-            </a:r>
-          </a:p>
-        </p:txBody>
-      </p:sp>
-      <p:pic>
-        <p:nvPicPr>
-          <p:cNvPr id="6" name="Picture 5" descr="postmeet-screenshot.png"/>
-          <p:cNvPicPr>
-            <a:picLocks noChangeAspect="1"/>
-          </p:cNvPicPr>
-          <p:nvPr/>
-        </p:nvPicPr>
-        <p:blipFill>
-          <a:blip r:embed="rId2"/>
-          <a:stretch>
-            <a:fillRect/>
-          </a:stretch>
-        </p:blipFill>
-        <p:spPr>
-          <a:xfrm>
-            <a:off x="3013488" y="1645920"/>
-            <a:ext cx="6164719" cy="4709160"/>
-          </a:xfrm>
-          <a:prstGeom prst="rect">
-            <a:avLst/>
-          </a:prstGeom>
-        </p:spPr>
-      </p:pic>
-      <p:sp>
-        <p:nvSpPr>
-          <p:cNvPr id="7" name="Rectangle 6"/>
+              <a:t>Everyone is fighting over capture. The last mile is wide open.</a:t>
+            </a:r>
+          </a:p>
+        </p:txBody>
+      </p:sp>
+      <p:sp>
+        <p:nvSpPr>
+          <p:cNvPr id="6" name="Rounded Rectangle 5"/>
           <p:cNvSpPr/>
           <p:nvPr/>
         </p:nvSpPr>
         <p:spPr>
           <a:xfrm>
-            <a:off x="3013488" y="1645920"/>
-            <a:ext cx="6164718" cy="4709160"/>
-          </a:xfrm>
-          <a:prstGeom prst="rect">
-            <a:avLst/>
-          </a:prstGeom>
-          <a:noFill/>
+            <a:off x="822960" y="2286000"/>
+            <a:ext cx="5257800" cy="2148840"/>
+          </a:xfrm>
+          <a:prstGeom prst="roundRect">
+            <a:avLst>
+              <a:gd name="adj" fmla="val 4500"/>
+            </a:avLst>
+          </a:prstGeom>
+          <a:solidFill>
+            <a:srgbClr val="FFFFFF"/>
+          </a:solidFill>
           <a:ln w="12700">
             <a:solidFill>
               <a:srgbClr val="DEE1E7"/>
@@ -8599,14 +8219,59 @@
       </p:sp>
       <p:sp>
         <p:nvSpPr>
+          <p:cNvPr id="7" name="TextBox 6"/>
+          <p:cNvSpPr txBox="1"/>
+          <p:nvPr/>
+        </p:nvSpPr>
+        <p:spPr>
+          <a:xfrm>
+            <a:off x="1097280" y="2487168"/>
+            <a:ext cx="4754880" cy="365760"/>
+          </a:xfrm>
+          <a:prstGeom prst="rect">
+            <a:avLst/>
+          </a:prstGeom>
+          <a:noFill/>
+        </p:spPr>
+        <p:txBody>
+          <a:bodyPr wrap="square" anchor="t">
+            <a:spAutoFit/>
+          </a:bodyPr>
+          <a:lstStyle/>
+          <a:p>
+            <a:pPr algn="l">
+              <a:lnSpc>
+                <a:spcPct val="106000"/>
+              </a:lnSpc>
+              <a:spcBef>
+                <a:spcPts val="0"/>
+              </a:spcBef>
+              <a:spcAft>
+                <a:spcPts val="0"/>
+              </a:spcAft>
+            </a:pPr>
+            <a:r>
+              <a:rPr sz="1100" b="1">
+                <a:solidFill>
+                  <a:srgbClr val="8B919D"/>
+                </a:solidFill>
+                <a:latin typeface="Consolas"/>
+              </a:rPr>
+              <a:t>CROWDED — “CAPTURE”</a:t>
+            </a:r>
+          </a:p>
+        </p:txBody>
+      </p:sp>
+      <p:sp>
+        <p:nvSpPr>
           <p:cNvPr id="8" name="TextBox 7"/>
           <p:cNvSpPr txBox="1"/>
           <p:nvPr/>
         </p:nvSpPr>
         <p:spPr>
           <a:xfrm>
-            <a:off x="822960" y="6419088"/>
-            <a:ext cx="10515600" cy="320040"/>
+            <a:off x="1097280" y="2907792"/>
+            <a:ext cx="4754880" cy="457200"/>
           </a:xfrm>
           <a:prstGeom prst="rect">
             <a:avLst/>
@@ -8631,13 +8296,348 @@
               </a:spcAft>
             </a:pPr>
             <a:r>
-              <a:rPr sz="1050" b="0">
-                <a:solidFill>
-                  <a:srgbClr val="8B919D"/>
+              <a:rPr sz="1900" b="1">
+                <a:solidFill>
+                  <a:srgbClr val="16181F"/>
                 </a:solidFill>
                 <a:latin typeface="Calibri"/>
               </a:rPr>
-              <a:t>Real output from the live app — extracted in ~2.8s: summary, decisions, and one column per owner, each card one click from a prefilled Calendar event or Gmail draft.</a:t>
+              <a:t>Transcribe &amp; summarize</a:t>
+            </a:r>
+          </a:p>
+        </p:txBody>
+      </p:sp>
+      <p:sp>
+        <p:nvSpPr>
+          <p:cNvPr id="9" name="TextBox 8"/>
+          <p:cNvSpPr txBox="1"/>
+          <p:nvPr/>
+        </p:nvSpPr>
+        <p:spPr>
+          <a:xfrm>
+            <a:off x="1097280" y="3429000"/>
+            <a:ext cx="4754880" cy="914400"/>
+          </a:xfrm>
+          <a:prstGeom prst="rect">
+            <a:avLst/>
+          </a:prstGeom>
+          <a:noFill/>
+        </p:spPr>
+        <p:txBody>
+          <a:bodyPr wrap="square" anchor="t">
+            <a:spAutoFit/>
+          </a:bodyPr>
+          <a:lstStyle/>
+          <a:p>
+            <a:pPr algn="l">
+              <a:lnSpc>
+                <a:spcPct val="112000"/>
+              </a:lnSpc>
+              <a:spcBef>
+                <a:spcPts val="0"/>
+              </a:spcBef>
+              <a:spcAft>
+                <a:spcPts val="0"/>
+              </a:spcAft>
+            </a:pPr>
+            <a:r>
+              <a:rPr sz="1350" b="0">
+                <a:solidFill>
+                  <a:srgbClr val="5A616E"/>
+                </a:solidFill>
+                <a:latin typeface="Calibri"/>
+              </a:rPr>
+              <a:t>Otter, Fireflies, Fathom, Granola — all competing on better transcripts. Table stakes now. The commitments they surface still die in a doc.</a:t>
+            </a:r>
+          </a:p>
+        </p:txBody>
+      </p:sp>
+      <p:sp>
+        <p:nvSpPr>
+          <p:cNvPr id="10" name="Rounded Rectangle 9"/>
+          <p:cNvSpPr/>
+          <p:nvPr/>
+        </p:nvSpPr>
+        <p:spPr>
+          <a:xfrm>
+            <a:off x="6263640" y="2286000"/>
+            <a:ext cx="5120640" cy="2148840"/>
+          </a:xfrm>
+          <a:prstGeom prst="roundRect">
+            <a:avLst>
+              <a:gd name="adj" fmla="val 4500"/>
+            </a:avLst>
+          </a:prstGeom>
+          <a:solidFill>
+            <a:srgbClr val="FBEFEA"/>
+          </a:solidFill>
+          <a:ln w="17780">
+            <a:solidFill>
+              <a:srgbClr val="C2410C"/>
+            </a:solidFill>
+          </a:ln>
+          <a:effectLst/>
+        </p:spPr>
+        <p:style>
+          <a:lnRef idx="1">
+            <a:schemeClr val="accent1"/>
+          </a:lnRef>
+          <a:fillRef idx="3">
+            <a:schemeClr val="accent1"/>
+          </a:fillRef>
+          <a:effectRef idx="2">
+            <a:schemeClr val="accent1"/>
+          </a:effectRef>
+          <a:fontRef idx="minor">
+            <a:schemeClr val="lt1"/>
+          </a:fontRef>
+        </p:style>
+        <p:txBody>
+          <a:bodyPr rtlCol="0" anchor="ctr"/>
+          <a:lstStyle/>
+          <a:p>
+            <a:pPr algn="ctr"/>
+          </a:p>
+        </p:txBody>
+      </p:sp>
+      <p:sp>
+        <p:nvSpPr>
+          <p:cNvPr id="11" name="TextBox 10"/>
+          <p:cNvSpPr txBox="1"/>
+          <p:nvPr/>
+        </p:nvSpPr>
+        <p:spPr>
+          <a:xfrm>
+            <a:off x="6537960" y="2487168"/>
+            <a:ext cx="4572000" cy="365760"/>
+          </a:xfrm>
+          <a:prstGeom prst="rect">
+            <a:avLst/>
+          </a:prstGeom>
+          <a:noFill/>
+        </p:spPr>
+        <p:txBody>
+          <a:bodyPr wrap="square" anchor="t">
+            <a:spAutoFit/>
+          </a:bodyPr>
+          <a:lstStyle/>
+          <a:p>
+            <a:pPr algn="l">
+              <a:lnSpc>
+                <a:spcPct val="106000"/>
+              </a:lnSpc>
+              <a:spcBef>
+                <a:spcPts val="0"/>
+              </a:spcBef>
+              <a:spcAft>
+                <a:spcPts val="0"/>
+              </a:spcAft>
+            </a:pPr>
+            <a:r>
+              <a:rPr sz="1100" b="1">
+                <a:solidFill>
+                  <a:srgbClr val="C2410C"/>
+                </a:solidFill>
+                <a:latin typeface="Consolas"/>
+              </a:rPr>
+              <a:t>OPEN — “THE LAST MILE”</a:t>
+            </a:r>
+          </a:p>
+        </p:txBody>
+      </p:sp>
+      <p:sp>
+        <p:nvSpPr>
+          <p:cNvPr id="12" name="TextBox 11"/>
+          <p:cNvSpPr txBox="1"/>
+          <p:nvPr/>
+        </p:nvSpPr>
+        <p:spPr>
+          <a:xfrm>
+            <a:off x="6537960" y="2907792"/>
+            <a:ext cx="4572000" cy="457200"/>
+          </a:xfrm>
+          <a:prstGeom prst="rect">
+            <a:avLst/>
+          </a:prstGeom>
+          <a:noFill/>
+        </p:spPr>
+        <p:txBody>
+          <a:bodyPr wrap="square" anchor="t">
+            <a:spAutoFit/>
+          </a:bodyPr>
+          <a:lstStyle/>
+          <a:p>
+            <a:pPr algn="l">
+              <a:lnSpc>
+                <a:spcPct val="106000"/>
+              </a:lnSpc>
+              <a:spcBef>
+                <a:spcPts val="0"/>
+              </a:spcBef>
+              <a:spcAft>
+                <a:spcPts val="0"/>
+              </a:spcAft>
+            </a:pPr>
+            <a:r>
+              <a:rPr sz="1900" b="1">
+                <a:solidFill>
+                  <a:srgbClr val="16181F"/>
+                </a:solidFill>
+                <a:latin typeface="Calibri"/>
+              </a:rPr>
+              <a:t>Distribute &amp; act</a:t>
+            </a:r>
+          </a:p>
+        </p:txBody>
+      </p:sp>
+      <p:sp>
+        <p:nvSpPr>
+          <p:cNvPr id="13" name="TextBox 12"/>
+          <p:cNvSpPr txBox="1"/>
+          <p:nvPr/>
+        </p:nvSpPr>
+        <p:spPr>
+          <a:xfrm>
+            <a:off x="6537960" y="3429000"/>
+            <a:ext cx="4572000" cy="914400"/>
+          </a:xfrm>
+          <a:prstGeom prst="rect">
+            <a:avLst/>
+          </a:prstGeom>
+          <a:noFill/>
+        </p:spPr>
+        <p:txBody>
+          <a:bodyPr wrap="square" anchor="t">
+            <a:spAutoFit/>
+          </a:bodyPr>
+          <a:lstStyle/>
+          <a:p>
+            <a:pPr algn="l">
+              <a:lnSpc>
+                <a:spcPct val="112000"/>
+              </a:lnSpc>
+              <a:spcBef>
+                <a:spcPts val="0"/>
+              </a:spcBef>
+              <a:spcAft>
+                <a:spcPts val="0"/>
+              </a:spcAft>
+            </a:pPr>
+            <a:r>
+              <a:rPr sz="1350" b="0">
+                <a:solidFill>
+                  <a:srgbClr val="5A616E"/>
+                </a:solidFill>
+                <a:latin typeface="Calibri"/>
+              </a:rPr>
+              <a:t>Getting each commitment into the tool the owner actually lives in — their calendar, their inbox — is where follow-through is won or lost.</a:t>
+            </a:r>
+          </a:p>
+        </p:txBody>
+      </p:sp>
+      <p:sp>
+        <p:nvSpPr>
+          <p:cNvPr id="14" name="Rectangle 13"/>
+          <p:cNvSpPr/>
+          <p:nvPr/>
+        </p:nvSpPr>
+        <p:spPr>
+          <a:xfrm>
+            <a:off x="822960" y="4892040"/>
+            <a:ext cx="54864" cy="1097280"/>
+          </a:xfrm>
+          <a:prstGeom prst="rect">
+            <a:avLst/>
+          </a:prstGeom>
+          <a:solidFill>
+            <a:srgbClr val="C2410C"/>
+          </a:solidFill>
+          <a:ln>
+            <a:noFill/>
+          </a:ln>
+          <a:effectLst/>
+        </p:spPr>
+        <p:style>
+          <a:lnRef idx="1">
+            <a:schemeClr val="accent1"/>
+          </a:lnRef>
+          <a:fillRef idx="3">
+            <a:schemeClr val="accent1"/>
+          </a:fillRef>
+          <a:effectRef idx="2">
+            <a:schemeClr val="accent1"/>
+          </a:effectRef>
+          <a:fontRef idx="minor">
+            <a:schemeClr val="lt1"/>
+          </a:fontRef>
+        </p:style>
+        <p:txBody>
+          <a:bodyPr rtlCol="0" anchor="ctr"/>
+          <a:lstStyle/>
+          <a:p>
+            <a:pPr algn="ctr"/>
+          </a:p>
+        </p:txBody>
+      </p:sp>
+      <p:sp>
+        <p:nvSpPr>
+          <p:cNvPr id="15" name="TextBox 14"/>
+          <p:cNvSpPr txBox="1"/>
+          <p:nvPr/>
+        </p:nvSpPr>
+        <p:spPr>
+          <a:xfrm>
+            <a:off x="1097280" y="4983480"/>
+            <a:ext cx="10241280" cy="1005840"/>
+          </a:xfrm>
+          <a:prstGeom prst="rect">
+            <a:avLst/>
+          </a:prstGeom>
+          <a:noFill/>
+        </p:spPr>
+        <p:txBody>
+          <a:bodyPr wrap="square" anchor="t">
+            <a:spAutoFit/>
+          </a:bodyPr>
+          <a:lstStyle/>
+          <a:p>
+            <a:pPr algn="l">
+              <a:lnSpc>
+                <a:spcPct val="114000"/>
+              </a:lnSpc>
+              <a:spcBef>
+                <a:spcPts val="0"/>
+              </a:spcBef>
+              <a:spcAft>
+                <a:spcPts val="0"/>
+              </a:spcAft>
+            </a:pPr>
+            <a:r>
+              <a:rPr sz="2100" b="0">
+                <a:solidFill>
+                  <a:srgbClr val="16181F"/>
+                </a:solidFill>
+                <a:latin typeface="Calibri"/>
+              </a:rPr>
+              <a:t>The blocker on the last mile isn't a smarter model — it's </a:t>
+            </a:r>
+            <a:r>
+              <a:rPr sz="2100" b="1">
+                <a:solidFill>
+                  <a:srgbClr val="C2410C"/>
+                </a:solidFill>
+                <a:latin typeface="Calibri"/>
+              </a:rPr>
+              <a:t>setup friction</a:t>
+            </a:r>
+            <a:r>
+              <a:rPr sz="2100" b="0">
+                <a:solidFill>
+                  <a:srgbClr val="16181F"/>
+                </a:solidFill>
+                <a:latin typeface="Calibri"/>
+              </a:rPr>
+              <a:t>. So the wedge is zero-setup distribution.</a:t>
             </a:r>
           </a:p>
         </p:txBody>

--- a/docs/postmeet-pitch.pptx
+++ b/docs/postmeet-pitch.pptx
@@ -6432,8 +6432,8 @@
         </p:blipFill>
         <p:spPr>
           <a:xfrm>
-            <a:off x="3013488" y="1645920"/>
-            <a:ext cx="6164719" cy="4709160"/>
+            <a:off x="2548999" y="1645920"/>
+            <a:ext cx="7093696" cy="4709160"/>
           </a:xfrm>
           <a:prstGeom prst="rect">
             <a:avLst/>
@@ -6448,8 +6448,8 @@
         </p:nvSpPr>
         <p:spPr>
           <a:xfrm>
-            <a:off x="3013488" y="1645920"/>
-            <a:ext cx="6164718" cy="4709160"/>
+            <a:off x="2548999" y="1645920"/>
+            <a:ext cx="7093696" cy="4709160"/>
           </a:xfrm>
           <a:prstGeom prst="rect">
             <a:avLst/>
@@ -6524,7 +6524,7 @@
                 </a:solidFill>
                 <a:latin typeface="Calibri"/>
               </a:rPr>
-              <a:t>Real output from the live app — extracted in ~2.8s: summary, decisions, and one column per owner, each card one click from a prefilled Calendar event or Gmail draft.</a:t>
+              <a:t>Real output from the live app — extracted in ~3s: summary, decisions, and one column per owner, each card one click from a prefilled Calendar event or Gmail draft.</a:t>
             </a:r>
           </a:p>
         </p:txBody>

--- a/docs/postmeet-pitch.pptx
+++ b/docs/postmeet-pitch.pptx
@@ -3361,7 +3361,7 @@
         </p:nvSpPr>
         <p:spPr>
           <a:xfrm>
-            <a:off x="822960" y="5120640"/>
+            <a:off x="822960" y="5047488"/>
             <a:ext cx="10515600" cy="365760"/>
           </a:xfrm>
           <a:prstGeom prst="rect">
@@ -3409,13 +3409,115 @@
       </p:sp>
       <p:sp>
         <p:nvSpPr>
-          <p:cNvPr id="8" name="TextBox 7"/>
-          <p:cNvSpPr txBox="1"/>
-          <p:nvPr/>
-        </p:nvSpPr>
-        <p:spPr>
-          <a:xfrm>
-            <a:off x="822960" y="5623560"/>
+          <p:cNvPr id="8" name="Rounded Rectangle 7"/>
+          <p:cNvSpPr/>
+          <p:nvPr/>
+        </p:nvSpPr>
+        <p:spPr>
+          <a:xfrm>
+            <a:off x="822960" y="5486400"/>
+            <a:ext cx="5623560" cy="402336"/>
+          </a:xfrm>
+          <a:prstGeom prst="roundRect">
+            <a:avLst>
+              <a:gd name="adj" fmla="val 4500"/>
+            </a:avLst>
+          </a:prstGeom>
+          <a:solidFill>
+            <a:srgbClr val="FBEFEA"/>
+          </a:solidFill>
+          <a:ln w="15240">
+            <a:solidFill>
+              <a:srgbClr val="C2410C"/>
+            </a:solidFill>
+          </a:ln>
+          <a:effectLst/>
+        </p:spPr>
+        <p:style>
+          <a:lnRef idx="1">
+            <a:schemeClr val="accent1"/>
+          </a:lnRef>
+          <a:fillRef idx="3">
+            <a:schemeClr val="accent1"/>
+          </a:fillRef>
+          <a:effectRef idx="2">
+            <a:schemeClr val="accent1"/>
+          </a:effectRef>
+          <a:fontRef idx="minor">
+            <a:schemeClr val="lt1"/>
+          </a:fontRef>
+        </p:style>
+        <p:txBody>
+          <a:bodyPr rtlCol="0" anchor="ctr"/>
+          <a:lstStyle/>
+          <a:p>
+            <a:pPr algn="ctr"/>
+          </a:p>
+        </p:txBody>
+      </p:sp>
+      <p:sp>
+        <p:nvSpPr>
+          <p:cNvPr id="9" name="TextBox 8"/>
+          <p:cNvSpPr txBox="1"/>
+          <p:nvPr/>
+        </p:nvSpPr>
+        <p:spPr>
+          <a:xfrm>
+            <a:off x="1024128" y="5541264"/>
+            <a:ext cx="5394960" cy="310896"/>
+          </a:xfrm>
+          <a:prstGeom prst="rect">
+            <a:avLst/>
+          </a:prstGeom>
+          <a:noFill/>
+        </p:spPr>
+        <p:txBody>
+          <a:bodyPr wrap="square" anchor="t">
+            <a:spAutoFit/>
+          </a:bodyPr>
+          <a:lstStyle/>
+          <a:p>
+            <a:pPr algn="l">
+              <a:lnSpc>
+                <a:spcPct val="106000"/>
+              </a:lnSpc>
+              <a:spcBef>
+                <a:spcPts val="0"/>
+              </a:spcBef>
+              <a:spcAft>
+                <a:spcPts val="0"/>
+              </a:spcAft>
+            </a:pPr>
+            <a:r>
+              <a:rPr sz="1150" b="1">
+                <a:solidFill>
+                  <a:srgbClr val="C2410C"/>
+                </a:solidFill>
+                <a:latin typeface="Consolas"/>
+              </a:rPr>
+              <a:t>🏆  2nd Runner-Up</a:t>
+            </a:r>
+            <a:r>
+              <a:rPr sz="1000" b="0">
+                <a:solidFill>
+                  <a:srgbClr val="5A616E"/>
+                </a:solidFill>
+                <a:latin typeface="Consolas"/>
+              </a:rPr>
+              <a:t>  ·  PromptWars Chennai 2026  ·  Google for Developers × Hack2Skill</a:t>
+            </a:r>
+          </a:p>
+        </p:txBody>
+      </p:sp>
+      <p:sp>
+        <p:nvSpPr>
+          <p:cNvPr id="10" name="TextBox 9"/>
+          <p:cNvSpPr txBox="1"/>
+          <p:nvPr/>
+        </p:nvSpPr>
+        <p:spPr>
+          <a:xfrm>
+            <a:off x="822960" y="6053328"/>
             <a:ext cx="10515600" cy="365760"/>
           </a:xfrm>
           <a:prstGeom prst="rect">

--- a/docs/postmeet-pitch.pptx
+++ b/docs/postmeet-pitch.pptx
@@ -3416,7 +3416,7 @@
         <p:spPr>
           <a:xfrm>
             <a:off x="822960" y="5486400"/>
-            <a:ext cx="5623560" cy="402336"/>
+            <a:ext cx="8138160" cy="402336"/>
           </a:xfrm>
           <a:prstGeom prst="roundRect">
             <a:avLst>
@@ -3464,7 +3464,7 @@
         <p:spPr>
           <a:xfrm>
             <a:off x="1024128" y="5541264"/>
-            <a:ext cx="5394960" cy="310896"/>
+            <a:ext cx="7863840" cy="310896"/>
           </a:xfrm>
           <a:prstGeom prst="rect">
             <a:avLst/>
@@ -3495,7 +3495,7 @@
                 </a:solidFill>
                 <a:latin typeface="Consolas"/>
               </a:rPr>
-              <a:t>🏆  2nd Runner-Up</a:t>
+              <a:t>🏆  Top 10 Finalist → 2nd Runner-Up</a:t>
             </a:r>
             <a:r>
               <a:rPr sz="1000" b="0">

--- a/docs/postmeet-pitch.pptx
+++ b/docs/postmeet-pitch.pptx
@@ -3361,7 +3361,7 @@
         </p:nvSpPr>
         <p:spPr>
           <a:xfrm>
-            <a:off x="822960" y="5047488"/>
+            <a:off x="822960" y="4956048"/>
             <a:ext cx="10515600" cy="365760"/>
           </a:xfrm>
           <a:prstGeom prst="rect">
@@ -3415,8 +3415,8 @@
         </p:nvSpPr>
         <p:spPr>
           <a:xfrm>
-            <a:off x="822960" y="5486400"/>
-            <a:ext cx="8138160" cy="402336"/>
+            <a:off x="822960" y="5349240"/>
+            <a:ext cx="5440680" cy="713232"/>
           </a:xfrm>
           <a:prstGeom prst="roundRect">
             <a:avLst>
@@ -3463,8 +3463,8 @@
         </p:nvSpPr>
         <p:spPr>
           <a:xfrm>
-            <a:off x="1024128" y="5541264"/>
-            <a:ext cx="7863840" cy="310896"/>
+            <a:off x="1051560" y="5422392"/>
+            <a:ext cx="5029200" cy="274320"/>
           </a:xfrm>
           <a:prstGeom prst="rect">
             <a:avLst/>
@@ -3497,27 +3497,63 @@
               </a:rPr>
               <a:t>🏆  Top 10 Finalist → 2nd Runner-Up</a:t>
             </a:r>
-            <a:r>
-              <a:rPr sz="1000" b="0">
+          </a:p>
+        </p:txBody>
+      </p:sp>
+      <p:sp>
+        <p:nvSpPr>
+          <p:cNvPr id="10" name="TextBox 9"/>
+          <p:cNvSpPr txBox="1"/>
+          <p:nvPr/>
+        </p:nvSpPr>
+        <p:spPr>
+          <a:xfrm>
+            <a:off x="1051560" y="5705856"/>
+            <a:ext cx="5029200" cy="274320"/>
+          </a:xfrm>
+          <a:prstGeom prst="rect">
+            <a:avLst/>
+          </a:prstGeom>
+          <a:noFill/>
+        </p:spPr>
+        <p:txBody>
+          <a:bodyPr wrap="square" anchor="t">
+            <a:spAutoFit/>
+          </a:bodyPr>
+          <a:lstStyle/>
+          <a:p>
+            <a:pPr algn="l">
+              <a:lnSpc>
+                <a:spcPct val="106000"/>
+              </a:lnSpc>
+              <a:spcBef>
+                <a:spcPts val="0"/>
+              </a:spcBef>
+              <a:spcAft>
+                <a:spcPts val="0"/>
+              </a:spcAft>
+            </a:pPr>
+            <a:r>
+              <a:rPr sz="850" b="0">
                 <a:solidFill>
                   <a:srgbClr val="5A616E"/>
                 </a:solidFill>
                 <a:latin typeface="Consolas"/>
               </a:rPr>
-              <a:t>  ·  PromptWars Chennai 2026  ·  Google for Developers × Hack2Skill</a:t>
-            </a:r>
-          </a:p>
-        </p:txBody>
-      </p:sp>
-      <p:sp>
-        <p:nvSpPr>
-          <p:cNvPr id="10" name="TextBox 9"/>
-          <p:cNvSpPr txBox="1"/>
-          <p:nvPr/>
-        </p:nvSpPr>
-        <p:spPr>
-          <a:xfrm>
-            <a:off x="822960" y="6053328"/>
+              <a:t>PromptWars Chennai 2026 · Google for Developers × Hack2Skill</a:t>
+            </a:r>
+          </a:p>
+        </p:txBody>
+      </p:sp>
+      <p:sp>
+        <p:nvSpPr>
+          <p:cNvPr id="11" name="TextBox 10"/>
+          <p:cNvSpPr txBox="1"/>
+          <p:nvPr/>
+        </p:nvSpPr>
+        <p:spPr>
+          <a:xfrm>
+            <a:off x="822960" y="6199632"/>
             <a:ext cx="10515600" cy="365760"/>
           </a:xfrm>
           <a:prstGeom prst="rect">
